--- a/docs/presentation/ktcloud4-bean.pptx
+++ b/docs/presentation/ktcloud4-bean.pptx
@@ -514,48 +514,7 @@
               </a:tabLst>
             </a:pPr>
             <a:r>
-              <a:rPr lang="en-US" sz="2000" b="0" u="none" strike="noStrike">
-                <a:solidFill>
-                  <a:srgbClr val="000000"/>
-                </a:solidFill>
-                <a:effectLst/>
-                <a:uFillTx/>
-                <a:latin typeface="Noto Sans CJK KR"/>
-              </a:rPr>
-              <a:t>[1/22 · 00:15] </a:t>
-            </a:r>
-            <a:r>
-              <a:rPr lang="ko-KR" sz="2000" b="0" u="none" strike="noStrike">
-                <a:solidFill>
-                  <a:srgbClr val="000000"/>
-                </a:solidFill>
-                <a:effectLst/>
-                <a:uFillTx/>
-                <a:latin typeface="Noto Sans CJK KR"/>
-              </a:rPr>
-              <a:t>온프레미스–</a:t>
-            </a:r>
-            <a:r>
-              <a:rPr lang="en-US" sz="2000" b="0" u="none" strike="noStrike">
-                <a:solidFill>
-                  <a:srgbClr val="000000"/>
-                </a:solidFill>
-                <a:effectLst/>
-                <a:uFillTx/>
-                <a:latin typeface="Noto Sans CJK KR"/>
-              </a:rPr>
-              <a:t>AWS </a:t>
-            </a:r>
-            <a:r>
-              <a:rPr lang="ko-KR" sz="2000" b="0" u="none" strike="noStrike">
-                <a:solidFill>
-                  <a:srgbClr val="000000"/>
-                </a:solidFill>
-                <a:effectLst/>
-                <a:uFillTx/>
-                <a:latin typeface="Noto Sans CJK KR"/>
-              </a:rPr>
-              <a:t>하이브리드 보안 플랫폼</a:t>
+              <a:t>[1/23 · 0:17] 표지</a:t>
             </a:r>
             <a:endParaRPr lang="en-US" sz="2000" b="0" u="none" strike="noStrike">
               <a:solidFill>
@@ -566,424 +525,21 @@
               <a:latin typeface="Noto Sans CJK KR"/>
             </a:endParaRPr>
           </a:p>
-          <a:p>
-            <a:pPr indent="0" algn="l">
-              <a:lnSpc>
-                <a:spcPct val="100000"/>
-              </a:lnSpc>
-              <a:buNone/>
-              <a:tabLst>
-                <a:tab pos="0" algn="l"/>
-              </a:tabLst>
-            </a:pPr>
-            <a:endParaRPr lang="en-US" sz="2000" b="0" u="none" strike="noStrike">
-              <a:solidFill>
-                <a:srgbClr val="000000"/>
-              </a:solidFill>
-              <a:effectLst/>
-              <a:uFillTx/>
-              <a:latin typeface="Noto Sans CJK KR"/>
-            </a:endParaRPr>
-          </a:p>
-          <a:p>
-            <a:pPr indent="0" algn="l">
-              <a:lnSpc>
-                <a:spcPct val="100000"/>
-              </a:lnSpc>
-              <a:buNone/>
-              <a:tabLst>
-                <a:tab pos="0" algn="l"/>
-              </a:tabLst>
-            </a:pPr>
-            <a:r>
-              <a:rPr lang="en-US" sz="2000" b="0" u="none" strike="noStrike">
-                <a:solidFill>
-                  <a:srgbClr val="000000"/>
-                </a:solidFill>
-                <a:effectLst/>
-                <a:uFillTx/>
-                <a:latin typeface="Noto Sans CJK KR"/>
-              </a:rPr>
-              <a:t>PURPOSE: </a:t>
-            </a:r>
-            <a:r>
-              <a:rPr lang="ko-KR" sz="2000" b="0" u="none" strike="noStrike">
-                <a:solidFill>
-                  <a:srgbClr val="000000"/>
-                </a:solidFill>
-                <a:effectLst/>
-                <a:uFillTx/>
-                <a:latin typeface="Noto Sans CJK KR"/>
-              </a:rPr>
-              <a:t>주제와 팀을 각인한다</a:t>
-            </a:r>
-            <a:r>
-              <a:rPr lang="en-US" sz="2000" b="0" u="none" strike="noStrike">
-                <a:solidFill>
-                  <a:srgbClr val="000000"/>
-                </a:solidFill>
-                <a:effectLst/>
-                <a:uFillTx/>
-                <a:latin typeface="Noto Sans CJK KR"/>
-              </a:rPr>
-              <a:t>.</a:t>
-            </a:r>
-            <a:endParaRPr lang="en-US" sz="2000" b="0" u="none" strike="noStrike">
-              <a:solidFill>
-                <a:srgbClr val="000000"/>
-              </a:solidFill>
-              <a:effectLst/>
-              <a:uFillTx/>
-              <a:latin typeface="Noto Sans CJK KR"/>
-            </a:endParaRPr>
-          </a:p>
-          <a:p>
-            <a:pPr indent="0" algn="l">
-              <a:lnSpc>
-                <a:spcPct val="100000"/>
-              </a:lnSpc>
-              <a:buNone/>
-              <a:tabLst>
-                <a:tab pos="0" algn="l"/>
-              </a:tabLst>
-            </a:pPr>
-            <a:r>
-              <a:rPr lang="en-US" sz="2000" b="0" u="none" strike="noStrike">
-                <a:solidFill>
-                  <a:srgbClr val="000000"/>
-                </a:solidFill>
-                <a:effectLst/>
-                <a:uFillTx/>
-                <a:latin typeface="Noto Sans CJK KR"/>
-              </a:rPr>
-              <a:t>MESSAGE: </a:t>
-            </a:r>
-            <a:r>
-              <a:rPr lang="ko-KR" sz="2000" b="0" u="none" strike="noStrike">
-                <a:solidFill>
-                  <a:srgbClr val="000000"/>
-                </a:solidFill>
-                <a:effectLst/>
-                <a:uFillTx/>
-                <a:latin typeface="Noto Sans CJK KR"/>
-              </a:rPr>
-              <a:t>단일 물리 노드 랩에서 격리</a:t>
-            </a:r>
-            <a:r>
-              <a:rPr lang="en-US" sz="2000" b="0" u="none" strike="noStrike">
-                <a:solidFill>
-                  <a:srgbClr val="000000"/>
-                </a:solidFill>
-                <a:effectLst/>
-                <a:uFillTx/>
-                <a:latin typeface="Noto Sans CJK KR"/>
-              </a:rPr>
-              <a:t>·</a:t>
-            </a:r>
-            <a:r>
-              <a:rPr lang="ko-KR" sz="2000" b="0" u="none" strike="noStrike">
-                <a:solidFill>
-                  <a:srgbClr val="000000"/>
-                </a:solidFill>
-                <a:effectLst/>
-                <a:uFillTx/>
-                <a:latin typeface="Noto Sans CJK KR"/>
-              </a:rPr>
-              <a:t>최소 권한</a:t>
-            </a:r>
-            <a:r>
-              <a:rPr lang="en-US" sz="2000" b="0" u="none" strike="noStrike">
-                <a:solidFill>
-                  <a:srgbClr val="000000"/>
-                </a:solidFill>
-                <a:effectLst/>
-                <a:uFillTx/>
-                <a:latin typeface="Noto Sans CJK KR"/>
-              </a:rPr>
-              <a:t>·</a:t>
-            </a:r>
-            <a:r>
-              <a:rPr lang="ko-KR" sz="2000" b="0" u="none" strike="noStrike">
-                <a:solidFill>
-                  <a:srgbClr val="000000"/>
-                </a:solidFill>
-                <a:effectLst/>
-                <a:uFillTx/>
-                <a:latin typeface="Noto Sans CJK KR"/>
-              </a:rPr>
-              <a:t>선언형 재구축</a:t>
-            </a:r>
-            <a:r>
-              <a:rPr lang="en-US" sz="2000" b="0" u="none" strike="noStrike">
-                <a:solidFill>
-                  <a:srgbClr val="000000"/>
-                </a:solidFill>
-                <a:effectLst/>
-                <a:uFillTx/>
-                <a:latin typeface="Noto Sans CJK KR"/>
-              </a:rPr>
-              <a:t>·</a:t>
-            </a:r>
-            <a:r>
-              <a:rPr lang="ko-KR" sz="2000" b="0" u="none" strike="noStrike">
-                <a:solidFill>
-                  <a:srgbClr val="000000"/>
-                </a:solidFill>
-                <a:effectLst/>
-                <a:uFillTx/>
-                <a:latin typeface="Noto Sans CJK KR"/>
-              </a:rPr>
-              <a:t>오프사이트 복구를 실제로 구현했다</a:t>
-            </a:r>
-            <a:r>
-              <a:rPr lang="en-US" sz="2000" b="0" u="none" strike="noStrike">
-                <a:solidFill>
-                  <a:srgbClr val="000000"/>
-                </a:solidFill>
-                <a:effectLst/>
-                <a:uFillTx/>
-                <a:latin typeface="Noto Sans CJK KR"/>
-              </a:rPr>
-              <a:t>.</a:t>
-            </a:r>
-            <a:endParaRPr lang="en-US" sz="2000" b="0" u="none" strike="noStrike">
-              <a:solidFill>
-                <a:srgbClr val="000000"/>
-              </a:solidFill>
-              <a:effectLst/>
-              <a:uFillTx/>
-              <a:latin typeface="Noto Sans CJK KR"/>
-            </a:endParaRPr>
-          </a:p>
-          <a:p>
-            <a:pPr indent="0" algn="l">
-              <a:lnSpc>
-                <a:spcPct val="100000"/>
-              </a:lnSpc>
-              <a:buNone/>
-              <a:tabLst>
-                <a:tab pos="0" algn="l"/>
-              </a:tabLst>
-            </a:pPr>
-            <a:r>
-              <a:rPr lang="en-US" sz="2000" b="0" u="none" strike="noStrike">
-                <a:solidFill>
-                  <a:srgbClr val="000000"/>
-                </a:solidFill>
-                <a:effectLst/>
-                <a:uFillTx/>
-                <a:latin typeface="Noto Sans CJK KR"/>
-              </a:rPr>
-              <a:t>ASSET: </a:t>
-            </a:r>
-            <a:r>
-              <a:rPr lang="ko-KR" sz="2000" b="0" u="none" strike="noStrike">
-                <a:solidFill>
-                  <a:srgbClr val="000000"/>
-                </a:solidFill>
-                <a:effectLst/>
-                <a:uFillTx/>
-                <a:latin typeface="Noto Sans CJK KR"/>
-              </a:rPr>
-              <a:t>승인된 </a:t>
-            </a:r>
-            <a:r>
-              <a:rPr lang="en-US" sz="2000" b="0" u="none" strike="noStrike">
-                <a:solidFill>
-                  <a:srgbClr val="000000"/>
-                </a:solidFill>
-                <a:effectLst/>
-                <a:uFillTx/>
-                <a:latin typeface="Noto Sans CJK KR"/>
-              </a:rPr>
-              <a:t>16:9 </a:t>
-            </a:r>
-            <a:r>
-              <a:rPr lang="ko-KR" sz="2000" b="0" u="none" strike="noStrike">
-                <a:solidFill>
-                  <a:srgbClr val="000000"/>
-                </a:solidFill>
-                <a:effectLst/>
-                <a:uFillTx/>
-                <a:latin typeface="Noto Sans CJK KR"/>
-              </a:rPr>
-              <a:t>아키텍처 이미지</a:t>
-            </a:r>
-            <a:r>
-              <a:rPr lang="en-US" sz="2000" b="0" u="none" strike="noStrike">
-                <a:solidFill>
-                  <a:srgbClr val="000000"/>
-                </a:solidFill>
-                <a:effectLst/>
-                <a:uFillTx/>
-                <a:latin typeface="Noto Sans CJK KR"/>
-              </a:rPr>
-              <a:t>(</a:t>
-            </a:r>
-            <a:r>
-              <a:rPr lang="ko-KR" sz="2000" b="0" u="none" strike="noStrike">
-                <a:solidFill>
-                  <a:srgbClr val="000000"/>
-                </a:solidFill>
-                <a:effectLst/>
-                <a:uFillTx/>
-                <a:latin typeface="Noto Sans CJK KR"/>
-              </a:rPr>
-              <a:t>어둡게</a:t>
-            </a:r>
-            <a:r>
-              <a:rPr lang="en-US" sz="2000" b="0" u="none" strike="noStrike">
-                <a:solidFill>
-                  <a:srgbClr val="000000"/>
-                </a:solidFill>
-                <a:effectLst/>
-                <a:uFillTx/>
-                <a:latin typeface="Noto Sans CJK KR"/>
-              </a:rPr>
-              <a:t>)</a:t>
-            </a:r>
-            <a:endParaRPr lang="en-US" sz="2000" b="0" u="none" strike="noStrike">
-              <a:solidFill>
-                <a:srgbClr val="000000"/>
-              </a:solidFill>
-              <a:effectLst/>
-              <a:uFillTx/>
-              <a:latin typeface="Noto Sans CJK KR"/>
-            </a:endParaRPr>
-          </a:p>
-          <a:p>
-            <a:pPr indent="0" algn="l">
-              <a:lnSpc>
-                <a:spcPct val="100000"/>
-              </a:lnSpc>
-              <a:buNone/>
-              <a:tabLst>
-                <a:tab pos="0" algn="l"/>
-              </a:tabLst>
-            </a:pPr>
-            <a:r>
-              <a:rPr lang="en-US" sz="2000" b="0" u="none" strike="noStrike">
-                <a:solidFill>
-                  <a:srgbClr val="000000"/>
-                </a:solidFill>
-                <a:effectLst/>
-                <a:uFillTx/>
-                <a:latin typeface="Noto Sans CJK KR"/>
-              </a:rPr>
-              <a:t>EVIDENCE: PRESENT-VISUAL-01</a:t>
-            </a:r>
-            <a:endParaRPr lang="en-US" sz="2000" b="0" u="none" strike="noStrike">
-              <a:solidFill>
-                <a:srgbClr val="000000"/>
-              </a:solidFill>
-              <a:effectLst/>
-              <a:uFillTx/>
-              <a:latin typeface="Noto Sans CJK KR"/>
-            </a:endParaRPr>
-          </a:p>
-          <a:p>
-            <a:pPr indent="0" algn="l">
-              <a:lnSpc>
-                <a:spcPct val="100000"/>
-              </a:lnSpc>
-              <a:buNone/>
-              <a:tabLst>
-                <a:tab pos="0" algn="l"/>
-              </a:tabLst>
-            </a:pPr>
-            <a:endParaRPr lang="en-US" sz="2000" b="0" u="none" strike="noStrike">
-              <a:solidFill>
-                <a:srgbClr val="000000"/>
-              </a:solidFill>
-              <a:effectLst/>
-              <a:uFillTx/>
-              <a:latin typeface="Noto Sans CJK KR"/>
-            </a:endParaRPr>
-          </a:p>
-          <a:p>
-            <a:pPr indent="0" algn="l">
-              <a:lnSpc>
-                <a:spcPct val="100000"/>
-              </a:lnSpc>
-              <a:buNone/>
-              <a:tabLst>
-                <a:tab pos="0" algn="l"/>
-              </a:tabLst>
-            </a:pPr>
-            <a:r>
-              <a:rPr lang="en-US" sz="2000" b="0" u="none" strike="noStrike">
-                <a:solidFill>
-                  <a:srgbClr val="000000"/>
-                </a:solidFill>
-                <a:effectLst/>
-                <a:uFillTx/>
-                <a:latin typeface="Noto Sans CJK KR"/>
-              </a:rPr>
-              <a:t>※ 발표 대본은 </a:t>
-            </a:r>
-            <a:r>
-              <a:rPr lang="en-US" sz="2000" b="0" u="none" strike="noStrike">
-                <a:solidFill>
-                  <a:srgbClr val="000000"/>
-                </a:solidFill>
-                <a:effectLst/>
-                <a:uFillTx/>
-                <a:latin typeface="Noto Sans CJK KR"/>
-              </a:rPr>
-              <a:t>PRESENT-SCRIPT-01</a:t>
-            </a:r>
-            <a:r>
-              <a:rPr lang="ko-KR" sz="2000" b="0" u="none" strike="noStrike">
-                <a:solidFill>
-                  <a:srgbClr val="000000"/>
-                </a:solidFill>
-                <a:effectLst/>
-                <a:uFillTx/>
-                <a:latin typeface="Noto Sans CJK KR"/>
-              </a:rPr>
-              <a:t>이 이 </a:t>
-            </a:r>
-            <a:r>
-              <a:rPr lang="en-US" sz="2000" b="0" u="none" strike="noStrike">
-                <a:solidFill>
-                  <a:srgbClr val="000000"/>
-                </a:solidFill>
-                <a:effectLst/>
-                <a:uFillTx/>
-                <a:latin typeface="Noto Sans CJK KR"/>
-              </a:rPr>
-              <a:t>notes</a:t>
-            </a:r>
-            <a:r>
-              <a:rPr lang="ko-KR" sz="2000" b="0" u="none" strike="noStrike">
-                <a:solidFill>
-                  <a:srgbClr val="000000"/>
-                </a:solidFill>
-                <a:effectLst/>
-                <a:uFillTx/>
-                <a:latin typeface="Noto Sans CJK KR"/>
-              </a:rPr>
-              <a:t>를 대체한다</a:t>
-            </a:r>
-            <a:r>
-              <a:rPr lang="en-US" sz="2000" b="0" u="none" strike="noStrike">
-                <a:solidFill>
-                  <a:srgbClr val="000000"/>
-                </a:solidFill>
-                <a:effectLst/>
-                <a:uFillTx/>
-                <a:latin typeface="Noto Sans CJK KR"/>
-              </a:rPr>
-              <a:t>.</a:t>
-            </a:r>
-            <a:endParaRPr lang="en-US" sz="2000" b="0" u="none" strike="noStrike">
-              <a:solidFill>
-                <a:srgbClr val="000000"/>
-              </a:solidFill>
-              <a:effectLst/>
-              <a:uFillTx/>
-              <a:latin typeface="Noto Sans CJK KR"/>
-            </a:endParaRPr>
+          <a:p/>
+          <a:p>
+            <a:r>
+              <a:t>안녕하세요. Bean 팀 고광근입니다.</a:t>
+            </a:r>
+          </a:p>
+          <a:p>
+            <a:r>
+              <a:t>저희가 4주 동안 만든 건 온프레미스와 AWS를 하나로 묶은 하이브리드 보안 플랫폼입니다.</a:t>
+            </a:r>
+          </a:p>
+          <a:p>
+            <a:r>
+              <a:t>무엇을 어디까지 실제로 돌려봤는지 말씀드리겠습니다.</a:t>
+            </a:r>
           </a:p>
         </p:txBody>
       </p:sp>
@@ -1150,48 +706,7 @@
               </a:tabLst>
             </a:pPr>
             <a:r>
-              <a:rPr lang="en-US" sz="2000" b="0" u="none" strike="noStrike">
-                <a:solidFill>
-                  <a:srgbClr val="000000"/>
-                </a:solidFill>
-                <a:effectLst/>
-                <a:uFillTx/>
-                <a:latin typeface="Noto Sans CJK KR"/>
-              </a:rPr>
-              <a:t>[11/22 · 00:50] </a:t>
-            </a:r>
-            <a:r>
-              <a:rPr lang="ko-KR" sz="2000" b="0" u="none" strike="noStrike">
-                <a:solidFill>
-                  <a:srgbClr val="000000"/>
-                </a:solidFill>
-                <a:effectLst/>
-                <a:uFillTx/>
-                <a:latin typeface="Noto Sans CJK KR"/>
-              </a:rPr>
-              <a:t>온프레미스에서 </a:t>
-            </a:r>
-            <a:r>
-              <a:rPr lang="en-US" sz="2000" b="0" u="none" strike="noStrike">
-                <a:solidFill>
-                  <a:srgbClr val="000000"/>
-                </a:solidFill>
-                <a:effectLst/>
-                <a:uFillTx/>
-                <a:latin typeface="Noto Sans CJK KR"/>
-              </a:rPr>
-              <a:t>EKS</a:t>
-            </a:r>
-            <a:r>
-              <a:rPr lang="ko-KR" sz="2000" b="0" u="none" strike="noStrike">
-                <a:solidFill>
-                  <a:srgbClr val="000000"/>
-                </a:solidFill>
-                <a:effectLst/>
-                <a:uFillTx/>
-                <a:latin typeface="Noto Sans CJK KR"/>
-              </a:rPr>
-              <a:t>까지의 보안 흐름</a:t>
+              <a:t>[10/23 · 0:35] EKS까지의 보안 흐름</a:t>
             </a:r>
             <a:endParaRPr lang="en-US" sz="2000" b="0" u="none" strike="noStrike">
               <a:solidFill>
@@ -1202,391 +717,31 @@
               <a:latin typeface="Noto Sans CJK KR"/>
             </a:endParaRPr>
           </a:p>
-          <a:p>
-            <a:pPr indent="0" algn="l">
-              <a:lnSpc>
-                <a:spcPct val="100000"/>
-              </a:lnSpc>
-              <a:buNone/>
-              <a:tabLst>
-                <a:tab pos="0" algn="l"/>
-              </a:tabLst>
-            </a:pPr>
-            <a:endParaRPr lang="en-US" sz="2000" b="0" u="none" strike="noStrike">
-              <a:solidFill>
-                <a:srgbClr val="000000"/>
-              </a:solidFill>
-              <a:effectLst/>
-              <a:uFillTx/>
-              <a:latin typeface="Noto Sans CJK KR"/>
-            </a:endParaRPr>
-          </a:p>
-          <a:p>
-            <a:pPr indent="0" algn="l">
-              <a:lnSpc>
-                <a:spcPct val="100000"/>
-              </a:lnSpc>
-              <a:buNone/>
-              <a:tabLst>
-                <a:tab pos="0" algn="l"/>
-              </a:tabLst>
-            </a:pPr>
-            <a:r>
-              <a:rPr lang="en-US" sz="2000" b="0" u="none" strike="noStrike">
-                <a:solidFill>
-                  <a:srgbClr val="000000"/>
-                </a:solidFill>
-                <a:effectLst/>
-                <a:uFillTx/>
-                <a:latin typeface="Noto Sans CJK KR"/>
-              </a:rPr>
-              <a:t>PURPOSE: </a:t>
-            </a:r>
-            <a:r>
-              <a:rPr lang="ko-KR" sz="2000" b="0" u="none" strike="noStrike">
-                <a:solidFill>
-                  <a:srgbClr val="000000"/>
-                </a:solidFill>
-                <a:effectLst/>
-                <a:uFillTx/>
-                <a:latin typeface="Noto Sans CJK KR"/>
-              </a:rPr>
-              <a:t>사용자 요청이 어떤 경계를 차례로 통과하는지 따라가게 한다</a:t>
-            </a:r>
-            <a:r>
-              <a:rPr lang="en-US" sz="2000" b="0" u="none" strike="noStrike">
-                <a:solidFill>
-                  <a:srgbClr val="000000"/>
-                </a:solidFill>
-                <a:effectLst/>
-                <a:uFillTx/>
-                <a:latin typeface="Noto Sans CJK KR"/>
-              </a:rPr>
-              <a:t>.</a:t>
-            </a:r>
-            <a:endParaRPr lang="en-US" sz="2000" b="0" u="none" strike="noStrike">
-              <a:solidFill>
-                <a:srgbClr val="000000"/>
-              </a:solidFill>
-              <a:effectLst/>
-              <a:uFillTx/>
-              <a:latin typeface="Noto Sans CJK KR"/>
-            </a:endParaRPr>
-          </a:p>
-          <a:p>
-            <a:pPr indent="0" algn="l">
-              <a:lnSpc>
-                <a:spcPct val="100000"/>
-              </a:lnSpc>
-              <a:buNone/>
-              <a:tabLst>
-                <a:tab pos="0" algn="l"/>
-              </a:tabLst>
-            </a:pPr>
-            <a:r>
-              <a:rPr lang="en-US" sz="2000" b="0" u="none" strike="noStrike">
-                <a:solidFill>
-                  <a:srgbClr val="000000"/>
-                </a:solidFill>
-                <a:effectLst/>
-                <a:uFillTx/>
-                <a:latin typeface="Noto Sans CJK KR"/>
-              </a:rPr>
-              <a:t>MESSAGE: </a:t>
-            </a:r>
-            <a:r>
-              <a:rPr lang="ko-KR" sz="2000" b="0" u="none" strike="noStrike">
-                <a:solidFill>
-                  <a:srgbClr val="000000"/>
-                </a:solidFill>
-                <a:effectLst/>
-                <a:uFillTx/>
-                <a:latin typeface="Noto Sans CJK KR"/>
-              </a:rPr>
-              <a:t>공개 진입은 두 곳뿐이고 </a:t>
-            </a:r>
-            <a:r>
-              <a:rPr lang="en-US" sz="2000" b="0" u="none" strike="noStrike">
-                <a:solidFill>
-                  <a:srgbClr val="000000"/>
-                </a:solidFill>
-                <a:effectLst/>
-                <a:uFillTx/>
-                <a:latin typeface="Noto Sans CJK KR"/>
-              </a:rPr>
-              <a:t>HR </a:t>
-            </a:r>
-            <a:r>
-              <a:rPr lang="ko-KR" sz="2000" b="0" u="none" strike="noStrike">
-                <a:solidFill>
-                  <a:srgbClr val="000000"/>
-                </a:solidFill>
-                <a:effectLst/>
-                <a:uFillTx/>
-                <a:latin typeface="Noto Sans CJK KR"/>
-              </a:rPr>
-              <a:t>경로는 사설 </a:t>
-            </a:r>
-            <a:r>
-              <a:rPr lang="en-US" sz="2000" b="0" u="none" strike="noStrike">
-                <a:solidFill>
-                  <a:srgbClr val="000000"/>
-                </a:solidFill>
-                <a:effectLst/>
-                <a:uFillTx/>
-                <a:latin typeface="Noto Sans CJK KR"/>
-              </a:rPr>
-              <a:t>VPN </a:t>
-            </a:r>
-            <a:r>
-              <a:rPr lang="ko-KR" sz="2000" b="0" u="none" strike="noStrike">
-                <a:solidFill>
-                  <a:srgbClr val="000000"/>
-                </a:solidFill>
-                <a:effectLst/>
-                <a:uFillTx/>
-                <a:latin typeface="Noto Sans CJK KR"/>
-              </a:rPr>
-              <a:t>안에서만 </a:t>
-            </a:r>
-            <a:r>
-              <a:rPr lang="en-US" sz="2000" b="0" u="none" strike="noStrike">
-                <a:solidFill>
-                  <a:srgbClr val="000000"/>
-                </a:solidFill>
-                <a:effectLst/>
-                <a:uFillTx/>
-                <a:latin typeface="Noto Sans CJK KR"/>
-              </a:rPr>
-              <a:t>EKS</a:t>
-            </a:r>
-            <a:r>
-              <a:rPr lang="ko-KR" sz="2000" b="0" u="none" strike="noStrike">
-                <a:solidFill>
-                  <a:srgbClr val="000000"/>
-                </a:solidFill>
-                <a:effectLst/>
-                <a:uFillTx/>
-                <a:latin typeface="Noto Sans CJK KR"/>
-              </a:rPr>
-              <a:t>에 닿는다</a:t>
-            </a:r>
-            <a:r>
-              <a:rPr lang="en-US" sz="2000" b="0" u="none" strike="noStrike">
-                <a:solidFill>
-                  <a:srgbClr val="000000"/>
-                </a:solidFill>
-                <a:effectLst/>
-                <a:uFillTx/>
-                <a:latin typeface="Noto Sans CJK KR"/>
-              </a:rPr>
-              <a:t>.</a:t>
-            </a:r>
-            <a:endParaRPr lang="en-US" sz="2000" b="0" u="none" strike="noStrike">
-              <a:solidFill>
-                <a:srgbClr val="000000"/>
-              </a:solidFill>
-              <a:effectLst/>
-              <a:uFillTx/>
-              <a:latin typeface="Noto Sans CJK KR"/>
-            </a:endParaRPr>
-          </a:p>
-          <a:p>
-            <a:pPr indent="0" algn="l">
-              <a:lnSpc>
-                <a:spcPct val="100000"/>
-              </a:lnSpc>
-              <a:buNone/>
-              <a:tabLst>
-                <a:tab pos="0" algn="l"/>
-              </a:tabLst>
-            </a:pPr>
-            <a:r>
-              <a:rPr lang="en-US" sz="2000" b="0" u="none" strike="noStrike">
-                <a:solidFill>
-                  <a:srgbClr val="000000"/>
-                </a:solidFill>
-                <a:effectLst/>
-                <a:uFillTx/>
-                <a:latin typeface="Noto Sans CJK KR"/>
-              </a:rPr>
-              <a:t>ASSET: </a:t>
-            </a:r>
-            <a:r>
-              <a:rPr lang="ko-KR" sz="2000" b="0" u="none" strike="noStrike">
-                <a:solidFill>
-                  <a:srgbClr val="000000"/>
-                </a:solidFill>
-                <a:effectLst/>
-                <a:uFillTx/>
-                <a:latin typeface="Noto Sans CJK KR"/>
-              </a:rPr>
-              <a:t>승인 이미지 </a:t>
-            </a:r>
-            <a:r>
-              <a:rPr lang="en-US" sz="2000" b="0" u="none" strike="noStrike">
-                <a:solidFill>
-                  <a:srgbClr val="000000"/>
-                </a:solidFill>
-                <a:effectLst/>
-                <a:uFillTx/>
-                <a:latin typeface="Noto Sans CJK KR"/>
-              </a:rPr>
-              <a:t>+ green </a:t>
-            </a:r>
-            <a:r>
-              <a:rPr lang="ko-KR" sz="2000" b="0" u="none" strike="noStrike">
-                <a:solidFill>
-                  <a:srgbClr val="000000"/>
-                </a:solidFill>
-                <a:effectLst/>
-                <a:uFillTx/>
-                <a:latin typeface="Noto Sans CJK KR"/>
-              </a:rPr>
-              <a:t>강조 도형</a:t>
-            </a:r>
-            <a:endParaRPr lang="en-US" sz="2000" b="0" u="none" strike="noStrike">
-              <a:solidFill>
-                <a:srgbClr val="000000"/>
-              </a:solidFill>
-              <a:effectLst/>
-              <a:uFillTx/>
-              <a:latin typeface="Noto Sans CJK KR"/>
-            </a:endParaRPr>
-          </a:p>
-          <a:p>
-            <a:pPr indent="0" algn="l">
-              <a:lnSpc>
-                <a:spcPct val="100000"/>
-              </a:lnSpc>
-              <a:buNone/>
-              <a:tabLst>
-                <a:tab pos="0" algn="l"/>
-              </a:tabLst>
-            </a:pPr>
-            <a:r>
-              <a:rPr lang="en-US" sz="2000" b="0" u="none" strike="noStrike">
-                <a:solidFill>
-                  <a:srgbClr val="000000"/>
-                </a:solidFill>
-                <a:effectLst/>
-                <a:uFillTx/>
-                <a:latin typeface="Noto Sans CJK KR"/>
-              </a:rPr>
-              <a:t>EVIDENCE: EDGE-01 · EDGE-02 · POM-01 · AWS-NET-01 · AWS-HR-01</a:t>
-            </a:r>
-            <a:endParaRPr lang="en-US" sz="2000" b="0" u="none" strike="noStrike">
-              <a:solidFill>
-                <a:srgbClr val="000000"/>
-              </a:solidFill>
-              <a:effectLst/>
-              <a:uFillTx/>
-              <a:latin typeface="Noto Sans CJK KR"/>
-            </a:endParaRPr>
-          </a:p>
-          <a:p>
-            <a:pPr indent="0" algn="l">
-              <a:lnSpc>
-                <a:spcPct val="100000"/>
-              </a:lnSpc>
-              <a:buNone/>
-              <a:tabLst>
-                <a:tab pos="0" algn="l"/>
-              </a:tabLst>
-            </a:pPr>
-            <a:endParaRPr lang="en-US" sz="2000" b="0" u="none" strike="noStrike">
-              <a:solidFill>
-                <a:srgbClr val="000000"/>
-              </a:solidFill>
-              <a:effectLst/>
-              <a:uFillTx/>
-              <a:latin typeface="Noto Sans CJK KR"/>
-            </a:endParaRPr>
-          </a:p>
-          <a:p>
-            <a:pPr indent="0" algn="l">
-              <a:lnSpc>
-                <a:spcPct val="100000"/>
-              </a:lnSpc>
-              <a:buNone/>
-              <a:tabLst>
-                <a:tab pos="0" algn="l"/>
-              </a:tabLst>
-            </a:pPr>
-            <a:r>
-              <a:rPr lang="en-US" sz="2000" b="0" u="none" strike="noStrike">
-                <a:solidFill>
-                  <a:srgbClr val="000000"/>
-                </a:solidFill>
-                <a:effectLst/>
-                <a:uFillTx/>
-                <a:latin typeface="Noto Sans CJK KR"/>
-              </a:rPr>
-              <a:t>※ 발표 대본은 </a:t>
-            </a:r>
-            <a:r>
-              <a:rPr lang="en-US" sz="2000" b="0" u="none" strike="noStrike">
-                <a:solidFill>
-                  <a:srgbClr val="000000"/>
-                </a:solidFill>
-                <a:effectLst/>
-                <a:uFillTx/>
-                <a:latin typeface="Noto Sans CJK KR"/>
-              </a:rPr>
-              <a:t>PRESENT-SCRIPT-01</a:t>
-            </a:r>
-            <a:r>
-              <a:rPr lang="ko-KR" sz="2000" b="0" u="none" strike="noStrike">
-                <a:solidFill>
-                  <a:srgbClr val="000000"/>
-                </a:solidFill>
-                <a:effectLst/>
-                <a:uFillTx/>
-                <a:latin typeface="Noto Sans CJK KR"/>
-              </a:rPr>
-              <a:t>이 이 </a:t>
-            </a:r>
-            <a:r>
-              <a:rPr lang="en-US" sz="2000" b="0" u="none" strike="noStrike">
-                <a:solidFill>
-                  <a:srgbClr val="000000"/>
-                </a:solidFill>
-                <a:effectLst/>
-                <a:uFillTx/>
-                <a:latin typeface="Noto Sans CJK KR"/>
-              </a:rPr>
-              <a:t>notes</a:t>
-            </a:r>
-            <a:r>
-              <a:rPr lang="ko-KR" sz="2000" b="0" u="none" strike="noStrike">
-                <a:solidFill>
-                  <a:srgbClr val="000000"/>
-                </a:solidFill>
-                <a:effectLst/>
-                <a:uFillTx/>
-                <a:latin typeface="Noto Sans CJK KR"/>
-              </a:rPr>
-              <a:t>를 대체한다</a:t>
-            </a:r>
-            <a:r>
-              <a:rPr lang="en-US" sz="2000" b="0" u="none" strike="noStrike">
-                <a:solidFill>
-                  <a:srgbClr val="000000"/>
-                </a:solidFill>
-                <a:effectLst/>
-                <a:uFillTx/>
-                <a:latin typeface="Noto Sans CJK KR"/>
-              </a:rPr>
-              <a:t>.</a:t>
-            </a:r>
-            <a:endParaRPr lang="en-US" sz="2000" b="0" u="none" strike="noStrike">
-              <a:solidFill>
-                <a:srgbClr val="000000"/>
-              </a:solidFill>
-              <a:effectLst/>
-              <a:uFillTx/>
-              <a:latin typeface="Noto Sans CJK KR"/>
-            </a:endParaRPr>
+          <a:p/>
+          <a:p>
+            <a:r>
+              <a:t>사용자는 어떻게 여기까지 갈까요. 초록색 길이 그 경로입니다.</a:t>
+            </a:r>
+          </a:p>
+          <a:p>
+            <a:r>
+              <a:t>HR 포털을 열면 온프레미스의 Traefik과 Pomerium을 먼저 지나면서 Keycloak 신원을 확인받고,</a:t>
+            </a:r>
+          </a:p>
+          <a:p>
+            <a:r>
+              <a:t>그 다음 Site-to-Site VPN을 타고 AWS로 들어갑니다.</a:t>
+            </a:r>
+          </a:p>
+          <a:p>
+            <a:r>
+              <a:t>중요한 건 두 영역을 잇는 사설 경로가 이 VPN 하나뿐이라는 점입니다.</a:t>
+            </a:r>
+          </a:p>
+          <a:p>
+            <a:r>
+              <a:t>HR 서비스는 인터넷 쪽 입구가 없습니다.</a:t>
+            </a:r>
           </a:p>
         </p:txBody>
       </p:sp>
@@ -1672,6 +827,322 @@
       </p:sp>
     </p:spTree>
   </p:cSld>
+</p:notes>
+</file>
+
+<file path=ppt/notesSlides/notesSlide11.xml><?xml version="1.0" encoding="utf-8"?>
+<p:notes xmlns:a="http://schemas.openxmlformats.org/drawingml/2006/main" xmlns:p="http://schemas.openxmlformats.org/presentationml/2006/main" xmlns:r="http://schemas.openxmlformats.org/officeDocument/2006/relationships">
+  <p:cSld>
+    <p:spTree>
+      <p:nvGrpSpPr>
+        <p:cNvPr id="1" name=""/>
+        <p:cNvGrpSpPr/>
+        <p:nvPr/>
+      </p:nvGrpSpPr>
+      <p:grpSpPr>
+        <a:xfrm>
+          <a:off x="0" y="0"/>
+          <a:ext cx="0" cy="0"/>
+          <a:chOff x="0" y="0"/>
+          <a:chExt cx="0" cy="0"/>
+        </a:xfrm>
+      </p:grpSpPr>
+      <p:sp>
+        <p:nvSpPr>
+          <p:cNvPr id="2" name="Slide Image Placeholder 1"/>
+          <p:cNvSpPr>
+            <a:spLocks noGrp="1"/>
+          </p:cNvSpPr>
+          <p:nvPr>
+            <p:ph type="sldImg"/>
+          </p:nvPr>
+        </p:nvSpPr>
+        <p:spPr/>
+      </p:sp>
+      <p:sp>
+        <p:nvSpPr>
+          <p:cNvPr id="3" name="Notes Placeholder 2"/>
+          <p:cNvSpPr>
+            <a:spLocks noGrp="1"/>
+          </p:cNvSpPr>
+          <p:nvPr>
+            <p:ph type="body"/>
+          </p:nvPr>
+        </p:nvSpPr>
+        <p:spPr/>
+        <p:txBody>
+          <a:bodyPr/>
+          <a:lstStyle/>
+          <a:p>
+            <a:r>
+              <a:t>[13/23 · 0:41] 온프레미스 보안 ②</a:t>
+            </a:r>
+          </a:p>
+          <a:p/>
+          <a:p>
+            <a:r>
+              <a:t>나머지 넷은 안쪽을 지킵니다.</a:t>
+            </a:r>
+          </a:p>
+          <a:p>
+            <a:r>
+              <a:t>CrowdSec은 웹 앞단에서 SQL 인젝션이나 XSS를 막습니다. OWASP 코어 룰셋을 붙였고요.</a:t>
+            </a:r>
+          </a:p>
+          <a:p>
+            <a:r>
+              <a:t>Warpgate는 특권 세션 게이트웨이입니다.</a:t>
+            </a:r>
+          </a:p>
+          <a:p>
+            <a:r>
+              <a:t>SSH나 DB에 직접 붙지 않고 전부 여기를 거치는데, MFA를 넘어야 세션이 열립니다.</a:t>
+            </a:r>
+          </a:p>
+          <a:p>
+            <a:r>
+              <a:t>Wazuh는 SIEM 겸 XDR을 맡고요.</a:t>
+            </a:r>
+          </a:p>
+          <a:p>
+            <a:r>
+              <a:t>Vault는 DB 비밀번호나 API 키를 코드에 남기지 않고 중앙에서 주입합니다.</a:t>
+            </a:r>
+          </a:p>
+          <a:p>
+            <a:r>
+              <a:t>아까 본 키값 탈취를 막는 자리입니다.</a:t>
+            </a:r>
+          </a:p>
+          <a:p/>
+          <a:p>
+            <a:r>
+              <a:t>※ 시간이 밀리면 12·13장을 각각 10초씩 줄인다. 14·15장은 줄이지 않는다.</a:t>
+            </a:r>
+          </a:p>
+        </p:txBody>
+      </p:sp>
+      <p:sp>
+        <p:nvSpPr>
+          <p:cNvPr id="4" name="Slide Number Placeholder 3"/>
+          <p:cNvSpPr>
+            <a:spLocks noGrp="1"/>
+          </p:cNvSpPr>
+          <p:nvPr>
+            <p:ph type="sldNum" idx="3"/>
+          </p:nvPr>
+        </p:nvSpPr>
+        <p:spPr/>
+      </p:sp>
+    </p:spTree>
+  </p:cSld>
+  <p:clrMapOvr>
+    <a:masterClrMapping/>
+  </p:clrMapOvr>
+</p:notes>
+</file>
+
+<file path=ppt/notesSlides/notesSlide12.xml><?xml version="1.0" encoding="utf-8"?>
+<p:notes xmlns:a="http://schemas.openxmlformats.org/drawingml/2006/main" xmlns:p="http://schemas.openxmlformats.org/presentationml/2006/main" xmlns:r="http://schemas.openxmlformats.org/officeDocument/2006/relationships">
+  <p:cSld>
+    <p:spTree>
+      <p:nvGrpSpPr>
+        <p:cNvPr id="1" name=""/>
+        <p:cNvGrpSpPr/>
+        <p:nvPr/>
+      </p:nvGrpSpPr>
+      <p:grpSpPr>
+        <a:xfrm>
+          <a:off x="0" y="0"/>
+          <a:ext cx="0" cy="0"/>
+          <a:chOff x="0" y="0"/>
+          <a:chExt cx="0" cy="0"/>
+        </a:xfrm>
+      </p:grpSpPr>
+      <p:sp>
+        <p:nvSpPr>
+          <p:cNvPr id="2" name="Slide Image Placeholder 1"/>
+          <p:cNvSpPr>
+            <a:spLocks noGrp="1"/>
+          </p:cNvSpPr>
+          <p:nvPr>
+            <p:ph type="sldImg"/>
+          </p:nvPr>
+        </p:nvSpPr>
+        <p:spPr/>
+      </p:sp>
+      <p:sp>
+        <p:nvSpPr>
+          <p:cNvPr id="3" name="Notes Placeholder 2"/>
+          <p:cNvSpPr>
+            <a:spLocks noGrp="1"/>
+          </p:cNvSpPr>
+          <p:nvPr>
+            <p:ph type="body"/>
+          </p:nvPr>
+        </p:nvSpPr>
+        <p:spPr/>
+        <p:txBody>
+          <a:bodyPr/>
+          <a:lstStyle/>
+          <a:p>
+            <a:r>
+              <a:t>[12/23 · 0:41] 온프레미스 보안 ①</a:t>
+            </a:r>
+          </a:p>
+          <a:p/>
+          <a:p>
+            <a:r>
+              <a:t>그 위에 올린 도구입니다. 먼저 접근 쪽인데요.</a:t>
+            </a:r>
+          </a:p>
+          <a:p>
+            <a:r>
+              <a:t>바깥 경계는 OPNsense가 1차로 막습니다.</a:t>
+            </a:r>
+          </a:p>
+          <a:p>
+            <a:r>
+              <a:t>방화벽과 NAT, VLAN 분리, 내부 DNS가 여기 있고 Suricata도 붙어 있습니다.</a:t>
+            </a:r>
+          </a:p>
+          <a:p>
+            <a:r>
+              <a:t>원격 접속은 NetBird로, 승인된 사용자와 기기만 암호화된 터널로 붙습니다.</a:t>
+            </a:r>
+          </a:p>
+          <a:p>
+            <a:r>
+              <a:t>인증은 SSO를 Keycloak이 맡고, Pomerium이 서비스 앞단에서 매번 권한을 다시 확인합니다.</a:t>
+            </a:r>
+          </a:p>
+          <a:p>
+            <a:r>
+              <a:t>한 번 로그인했다고 계속 통과시키지 않습니다.</a:t>
+            </a:r>
+          </a:p>
+          <a:p/>
+          <a:p>
+            <a:r>
+              <a:t>※ 시간이 밀리면 12·13장을 각각 10초씩 줄인다. 14·15장은 줄이지 않는다.</a:t>
+            </a:r>
+          </a:p>
+        </p:txBody>
+      </p:sp>
+      <p:sp>
+        <p:nvSpPr>
+          <p:cNvPr id="4" name="Slide Number Placeholder 3"/>
+          <p:cNvSpPr>
+            <a:spLocks noGrp="1"/>
+          </p:cNvSpPr>
+          <p:nvPr>
+            <p:ph type="sldNum" idx="3"/>
+          </p:nvPr>
+        </p:nvSpPr>
+        <p:spPr/>
+      </p:sp>
+    </p:spTree>
+  </p:cSld>
+  <p:clrMapOvr>
+    <a:masterClrMapping/>
+  </p:clrMapOvr>
+</p:notes>
+</file>
+
+<file path=ppt/notesSlides/notesSlide13.xml><?xml version="1.0" encoding="utf-8"?>
+<p:notes xmlns:a="http://schemas.openxmlformats.org/drawingml/2006/main" xmlns:p="http://schemas.openxmlformats.org/presentationml/2006/main" xmlns:r="http://schemas.openxmlformats.org/officeDocument/2006/relationships">
+  <p:cSld>
+    <p:spTree>
+      <p:nvGrpSpPr>
+        <p:cNvPr id="1" name=""/>
+        <p:cNvGrpSpPr/>
+        <p:nvPr/>
+      </p:nvGrpSpPr>
+      <p:grpSpPr>
+        <a:xfrm>
+          <a:off x="0" y="0"/>
+          <a:ext cx="0" cy="0"/>
+          <a:chOff x="0" y="0"/>
+          <a:chExt cx="0" cy="0"/>
+        </a:xfrm>
+      </p:grpSpPr>
+      <p:sp>
+        <p:nvSpPr>
+          <p:cNvPr id="2" name="Slide Image Placeholder 1"/>
+          <p:cNvSpPr>
+            <a:spLocks noGrp="1"/>
+          </p:cNvSpPr>
+          <p:nvPr>
+            <p:ph type="sldImg"/>
+          </p:nvPr>
+        </p:nvSpPr>
+        <p:spPr/>
+      </p:sp>
+      <p:sp>
+        <p:nvSpPr>
+          <p:cNvPr id="3" name="Notes Placeholder 2"/>
+          <p:cNvSpPr>
+            <a:spLocks noGrp="1"/>
+          </p:cNvSpPr>
+          <p:nvPr>
+            <p:ph type="body"/>
+          </p:nvPr>
+        </p:nvSpPr>
+        <p:spPr/>
+        <p:txBody>
+          <a:bodyPr/>
+          <a:lstStyle/>
+          <a:p>
+            <a:r>
+              <a:t>[11/23 · 0:28] AWS 보안·관측</a:t>
+            </a:r>
+          </a:p>
+          <a:p/>
+          <a:p>
+            <a:r>
+              <a:t>AWS 안쪽 보안과 관측은 이 아래 블록입니다.</a:t>
+            </a:r>
+          </a:p>
+          <a:p>
+            <a:r>
+              <a:t>GuardDuty가 위협을 잡고 Security Hub가 findings를 모읍니다.</a:t>
+            </a:r>
+          </a:p>
+          <a:p>
+            <a:r>
+              <a:t>Config와 Access Analyzer가 구성과 권한을 계속 훑고요.</a:t>
+            </a:r>
+          </a:p>
+          <a:p>
+            <a:r>
+              <a:t>로그는 CloudWatch와 Security Lake로 모여 Athena로 조회합니다.</a:t>
+            </a:r>
+          </a:p>
+          <a:p/>
+          <a:p>
+            <a:r>
+              <a:t>※ 11장(사람 승인)과 18장(자동 차단)의 범위 차이는 18장 마지막 두 줄이 설명한다.</a:t>
+            </a:r>
+          </a:p>
+        </p:txBody>
+      </p:sp>
+      <p:sp>
+        <p:nvSpPr>
+          <p:cNvPr id="4" name="Slide Number Placeholder 3"/>
+          <p:cNvSpPr>
+            <a:spLocks noGrp="1"/>
+          </p:cNvSpPr>
+          <p:nvPr>
+            <p:ph type="sldNum" idx="3"/>
+          </p:nvPr>
+        </p:nvSpPr>
+        <p:spPr/>
+      </p:sp>
+    </p:spTree>
+  </p:cSld>
+  <p:clrMapOvr>
+    <a:masterClrMapping/>
+  </p:clrMapOvr>
 </p:notes>
 </file>
 
@@ -1753,26 +1224,7 @@
               </a:tabLst>
             </a:pPr>
             <a:r>
-              <a:rPr lang="en-US" sz="2000" b="0" u="none" strike="noStrike">
-                <a:solidFill>
-                  <a:srgbClr val="000000"/>
-                </a:solidFill>
-                <a:effectLst/>
-                <a:uFillTx/>
-                <a:latin typeface="Noto Sans CJK KR"/>
-              </a:rPr>
-              <a:t>[12/22 · 00:50] </a:t>
-            </a:r>
-            <a:r>
-              <a:rPr lang="ko-KR" sz="2000" b="0" u="none" strike="noStrike">
-                <a:solidFill>
-                  <a:srgbClr val="000000"/>
-                </a:solidFill>
-                <a:effectLst/>
-                <a:uFillTx/>
-                <a:latin typeface="Noto Sans CJK KR"/>
-              </a:rPr>
-              <a:t>접근 통제</a:t>
+              <a:t>[14/23 · 0:47] 접근 통제</a:t>
             </a:r>
             <a:endParaRPr lang="en-US" sz="2000" b="0" u="none" strike="noStrike">
               <a:solidFill>
@@ -1783,391 +1235,36 @@
               <a:latin typeface="Noto Sans CJK KR"/>
             </a:endParaRPr>
           </a:p>
-          <a:p>
-            <a:pPr indent="0" algn="l">
-              <a:lnSpc>
-                <a:spcPct val="100000"/>
-              </a:lnSpc>
-              <a:buNone/>
-              <a:tabLst>
-                <a:tab pos="0" algn="l"/>
-              </a:tabLst>
-            </a:pPr>
-            <a:endParaRPr lang="en-US" sz="2000" b="0" u="none" strike="noStrike">
-              <a:solidFill>
-                <a:srgbClr val="000000"/>
-              </a:solidFill>
-              <a:effectLst/>
-              <a:uFillTx/>
-              <a:latin typeface="Noto Sans CJK KR"/>
-            </a:endParaRPr>
-          </a:p>
-          <a:p>
-            <a:pPr indent="0" algn="l">
-              <a:lnSpc>
-                <a:spcPct val="100000"/>
-              </a:lnSpc>
-              <a:buNone/>
-              <a:tabLst>
-                <a:tab pos="0" algn="l"/>
-              </a:tabLst>
-            </a:pPr>
-            <a:r>
-              <a:rPr lang="en-US" sz="2000" b="0" u="none" strike="noStrike">
-                <a:solidFill>
-                  <a:srgbClr val="000000"/>
-                </a:solidFill>
-                <a:effectLst/>
-                <a:uFillTx/>
-                <a:latin typeface="Noto Sans CJK KR"/>
-              </a:rPr>
-              <a:t>PURPOSE: </a:t>
-            </a:r>
-            <a:r>
-              <a:rPr lang="ko-KR" sz="2000" b="0" u="none" strike="noStrike">
-                <a:solidFill>
-                  <a:srgbClr val="000000"/>
-                </a:solidFill>
-                <a:effectLst/>
-                <a:uFillTx/>
-                <a:latin typeface="Noto Sans CJK KR"/>
-              </a:rPr>
-              <a:t>누가</a:t>
-            </a:r>
-            <a:r>
-              <a:rPr lang="en-US" sz="2000" b="0" u="none" strike="noStrike">
-                <a:solidFill>
-                  <a:srgbClr val="000000"/>
-                </a:solidFill>
-                <a:effectLst/>
-                <a:uFillTx/>
-                <a:latin typeface="Noto Sans CJK KR"/>
-              </a:rPr>
-              <a:t>·</a:t>
-            </a:r>
-            <a:r>
-              <a:rPr lang="ko-KR" sz="2000" b="0" u="none" strike="noStrike">
-                <a:solidFill>
-                  <a:srgbClr val="000000"/>
-                </a:solidFill>
-                <a:effectLst/>
-                <a:uFillTx/>
-                <a:latin typeface="Noto Sans CJK KR"/>
-              </a:rPr>
-              <a:t>어디로</a:t>
-            </a:r>
-            <a:r>
-              <a:rPr lang="en-US" sz="2000" b="0" u="none" strike="noStrike">
-                <a:solidFill>
-                  <a:srgbClr val="000000"/>
-                </a:solidFill>
-                <a:effectLst/>
-                <a:uFillTx/>
-                <a:latin typeface="Noto Sans CJK KR"/>
-              </a:rPr>
-              <a:t>·</a:t>
-            </a:r>
-            <a:r>
-              <a:rPr lang="ko-KR" sz="2000" b="0" u="none" strike="noStrike">
-                <a:solidFill>
-                  <a:srgbClr val="000000"/>
-                </a:solidFill>
-                <a:effectLst/>
-                <a:uFillTx/>
-                <a:latin typeface="Noto Sans CJK KR"/>
-              </a:rPr>
-              <a:t>무엇을 할 수 있는지 결정하는 지점을 분리해 설명한다</a:t>
-            </a:r>
-            <a:r>
-              <a:rPr lang="en-US" sz="2000" b="0" u="none" strike="noStrike">
-                <a:solidFill>
-                  <a:srgbClr val="000000"/>
-                </a:solidFill>
-                <a:effectLst/>
-                <a:uFillTx/>
-                <a:latin typeface="Noto Sans CJK KR"/>
-              </a:rPr>
-              <a:t>.</a:t>
-            </a:r>
-            <a:endParaRPr lang="en-US" sz="2000" b="0" u="none" strike="noStrike">
-              <a:solidFill>
-                <a:srgbClr val="000000"/>
-              </a:solidFill>
-              <a:effectLst/>
-              <a:uFillTx/>
-              <a:latin typeface="Noto Sans CJK KR"/>
-            </a:endParaRPr>
-          </a:p>
-          <a:p>
-            <a:pPr indent="0" algn="l">
-              <a:lnSpc>
-                <a:spcPct val="100000"/>
-              </a:lnSpc>
-              <a:buNone/>
-              <a:tabLst>
-                <a:tab pos="0" algn="l"/>
-              </a:tabLst>
-            </a:pPr>
-            <a:r>
-              <a:rPr lang="en-US" sz="2000" b="0" u="none" strike="noStrike">
-                <a:solidFill>
-                  <a:srgbClr val="000000"/>
-                </a:solidFill>
-                <a:effectLst/>
-                <a:uFillTx/>
-                <a:latin typeface="Noto Sans CJK KR"/>
-              </a:rPr>
-              <a:t>MESSAGE: Dashy </a:t>
-            </a:r>
-            <a:r>
-              <a:rPr lang="ko-KR" sz="2000" b="0" u="none" strike="noStrike">
-                <a:solidFill>
-                  <a:srgbClr val="000000"/>
-                </a:solidFill>
-                <a:effectLst/>
-                <a:uFillTx/>
-                <a:latin typeface="Noto Sans CJK KR"/>
-              </a:rPr>
-              <a:t>타일 숨김은 편의일 뿐이고 실제 판정은 </a:t>
-            </a:r>
-            <a:r>
-              <a:rPr lang="en-US" sz="2000" b="0" u="none" strike="noStrike">
-                <a:solidFill>
-                  <a:srgbClr val="000000"/>
-                </a:solidFill>
-                <a:effectLst/>
-                <a:uFillTx/>
-                <a:latin typeface="Noto Sans CJK KR"/>
-              </a:rPr>
-              <a:t>Route</a:t>
-            </a:r>
-            <a:r>
-              <a:rPr lang="ko-KR" sz="2000" b="0" u="none" strike="noStrike">
-                <a:solidFill>
-                  <a:srgbClr val="000000"/>
-                </a:solidFill>
-                <a:effectLst/>
-                <a:uFillTx/>
-                <a:latin typeface="Noto Sans CJK KR"/>
-              </a:rPr>
-              <a:t>와 애플리케이션 </a:t>
-            </a:r>
-            <a:r>
-              <a:rPr lang="en-US" sz="2000" b="0" u="none" strike="noStrike">
-                <a:solidFill>
-                  <a:srgbClr val="000000"/>
-                </a:solidFill>
-                <a:effectLst/>
-                <a:uFillTx/>
-                <a:latin typeface="Noto Sans CJK KR"/>
-              </a:rPr>
-              <a:t>RBAC</a:t>
-            </a:r>
-            <a:r>
-              <a:rPr lang="ko-KR" sz="2000" b="0" u="none" strike="noStrike">
-                <a:solidFill>
-                  <a:srgbClr val="000000"/>
-                </a:solidFill>
-                <a:effectLst/>
-                <a:uFillTx/>
-                <a:latin typeface="Noto Sans CJK KR"/>
-              </a:rPr>
-              <a:t>가 한다</a:t>
-            </a:r>
-            <a:r>
-              <a:rPr lang="en-US" sz="2000" b="0" u="none" strike="noStrike">
-                <a:solidFill>
-                  <a:srgbClr val="000000"/>
-                </a:solidFill>
-                <a:effectLst/>
-                <a:uFillTx/>
-                <a:latin typeface="Noto Sans CJK KR"/>
-              </a:rPr>
-              <a:t>.</a:t>
-            </a:r>
-            <a:endParaRPr lang="en-US" sz="2000" b="0" u="none" strike="noStrike">
-              <a:solidFill>
-                <a:srgbClr val="000000"/>
-              </a:solidFill>
-              <a:effectLst/>
-              <a:uFillTx/>
-              <a:latin typeface="Noto Sans CJK KR"/>
-            </a:endParaRPr>
-          </a:p>
-          <a:p>
-            <a:pPr indent="0" algn="l">
-              <a:lnSpc>
-                <a:spcPct val="100000"/>
-              </a:lnSpc>
-              <a:buNone/>
-              <a:tabLst>
-                <a:tab pos="0" algn="l"/>
-              </a:tabLst>
-            </a:pPr>
-            <a:r>
-              <a:rPr lang="en-US" sz="2000" b="0" u="none" strike="noStrike">
-                <a:solidFill>
-                  <a:srgbClr val="000000"/>
-                </a:solidFill>
-                <a:effectLst/>
-                <a:uFillTx/>
-                <a:latin typeface="Noto Sans CJK KR"/>
-              </a:rPr>
-              <a:t>ASSET: native </a:t>
-            </a:r>
-            <a:r>
-              <a:rPr lang="ko-KR" sz="2000" b="0" u="none" strike="noStrike">
-                <a:solidFill>
-                  <a:srgbClr val="000000"/>
-                </a:solidFill>
-                <a:effectLst/>
-                <a:uFillTx/>
-                <a:latin typeface="Noto Sans CJK KR"/>
-              </a:rPr>
-              <a:t>도형</a:t>
-            </a:r>
-            <a:endParaRPr lang="en-US" sz="2000" b="0" u="none" strike="noStrike">
-              <a:solidFill>
-                <a:srgbClr val="000000"/>
-              </a:solidFill>
-              <a:effectLst/>
-              <a:uFillTx/>
-              <a:latin typeface="Noto Sans CJK KR"/>
-            </a:endParaRPr>
-          </a:p>
-          <a:p>
-            <a:pPr indent="0" algn="l">
-              <a:lnSpc>
-                <a:spcPct val="100000"/>
-              </a:lnSpc>
-              <a:buNone/>
-              <a:tabLst>
-                <a:tab pos="0" algn="l"/>
-              </a:tabLst>
-            </a:pPr>
-            <a:r>
-              <a:rPr lang="en-US" sz="2000" b="0" u="none" strike="noStrike">
-                <a:solidFill>
-                  <a:srgbClr val="000000"/>
-                </a:solidFill>
-                <a:effectLst/>
-                <a:uFillTx/>
-                <a:latin typeface="Noto Sans CJK KR"/>
-              </a:rPr>
-              <a:t>EVIDENCE: KC-01 · IAM-01 · IAM-ENROLL-01 · POM-01 · NB-ENROLL-01 · WG-03</a:t>
-            </a:r>
-            <a:endParaRPr lang="en-US" sz="2000" b="0" u="none" strike="noStrike">
-              <a:solidFill>
-                <a:srgbClr val="000000"/>
-              </a:solidFill>
-              <a:effectLst/>
-              <a:uFillTx/>
-              <a:latin typeface="Noto Sans CJK KR"/>
-            </a:endParaRPr>
-          </a:p>
-          <a:p>
-            <a:pPr indent="0" algn="l">
-              <a:lnSpc>
-                <a:spcPct val="100000"/>
-              </a:lnSpc>
-              <a:buNone/>
-              <a:tabLst>
-                <a:tab pos="0" algn="l"/>
-              </a:tabLst>
-            </a:pPr>
-            <a:endParaRPr lang="en-US" sz="2000" b="0" u="none" strike="noStrike">
-              <a:solidFill>
-                <a:srgbClr val="000000"/>
-              </a:solidFill>
-              <a:effectLst/>
-              <a:uFillTx/>
-              <a:latin typeface="Noto Sans CJK KR"/>
-            </a:endParaRPr>
-          </a:p>
-          <a:p>
-            <a:pPr indent="0" algn="l">
-              <a:lnSpc>
-                <a:spcPct val="100000"/>
-              </a:lnSpc>
-              <a:buNone/>
-              <a:tabLst>
-                <a:tab pos="0" algn="l"/>
-              </a:tabLst>
-            </a:pPr>
-            <a:r>
-              <a:rPr lang="en-US" sz="2000" b="0" u="none" strike="noStrike">
-                <a:solidFill>
-                  <a:srgbClr val="000000"/>
-                </a:solidFill>
-                <a:effectLst/>
-                <a:uFillTx/>
-                <a:latin typeface="Noto Sans CJK KR"/>
-              </a:rPr>
-              <a:t>※ 발표 대본은 </a:t>
-            </a:r>
-            <a:r>
-              <a:rPr lang="en-US" sz="2000" b="0" u="none" strike="noStrike">
-                <a:solidFill>
-                  <a:srgbClr val="000000"/>
-                </a:solidFill>
-                <a:effectLst/>
-                <a:uFillTx/>
-                <a:latin typeface="Noto Sans CJK KR"/>
-              </a:rPr>
-              <a:t>PRESENT-SCRIPT-01</a:t>
-            </a:r>
-            <a:r>
-              <a:rPr lang="ko-KR" sz="2000" b="0" u="none" strike="noStrike">
-                <a:solidFill>
-                  <a:srgbClr val="000000"/>
-                </a:solidFill>
-                <a:effectLst/>
-                <a:uFillTx/>
-                <a:latin typeface="Noto Sans CJK KR"/>
-              </a:rPr>
-              <a:t>이 이 </a:t>
-            </a:r>
-            <a:r>
-              <a:rPr lang="en-US" sz="2000" b="0" u="none" strike="noStrike">
-                <a:solidFill>
-                  <a:srgbClr val="000000"/>
-                </a:solidFill>
-                <a:effectLst/>
-                <a:uFillTx/>
-                <a:latin typeface="Noto Sans CJK KR"/>
-              </a:rPr>
-              <a:t>notes</a:t>
-            </a:r>
-            <a:r>
-              <a:rPr lang="ko-KR" sz="2000" b="0" u="none" strike="noStrike">
-                <a:solidFill>
-                  <a:srgbClr val="000000"/>
-                </a:solidFill>
-                <a:effectLst/>
-                <a:uFillTx/>
-                <a:latin typeface="Noto Sans CJK KR"/>
-              </a:rPr>
-              <a:t>를 대체한다</a:t>
-            </a:r>
-            <a:r>
-              <a:rPr lang="en-US" sz="2000" b="0" u="none" strike="noStrike">
-                <a:solidFill>
-                  <a:srgbClr val="000000"/>
-                </a:solidFill>
-                <a:effectLst/>
-                <a:uFillTx/>
-                <a:latin typeface="Noto Sans CJK KR"/>
-              </a:rPr>
-              <a:t>.</a:t>
-            </a:r>
-            <a:endParaRPr lang="en-US" sz="2000" b="0" u="none" strike="noStrike">
-              <a:solidFill>
-                <a:srgbClr val="000000"/>
-              </a:solidFill>
-              <a:effectLst/>
-              <a:uFillTx/>
-              <a:latin typeface="Noto Sans CJK KR"/>
-            </a:endParaRPr>
+          <a:p/>
+          <a:p>
+            <a:r>
+              <a:t>접근 통제는 셋으로 쪼갰습니다. 누가 들어오는지, 어디까지 가는지, 무엇을 만지는지입니다.</a:t>
+            </a:r>
+          </a:p>
+          <a:p>
+            <a:r>
+              <a:t>신원은 Keycloak 한 곳에서만 만듭니다. 일상 ID 다섯 개와 특권 ID 하나,</a:t>
+            </a:r>
+          </a:p>
+          <a:p>
+            <a:r>
+              <a:t>여섯 개 전부 MFA를 걸었고 서비스마다 로컬 계정을 따로 만들지 않습니다.</a:t>
+            </a:r>
+          </a:p>
+          <a:p>
+            <a:r>
+              <a:t>경로는 Pomerium입니다. Route마다 그룹을 다시 확인하고 Host와 Path 단위로 막습니다.</a:t>
+            </a:r>
+          </a:p>
+          <a:p>
+            <a:r>
+              <a:t>마지막이 중요한데, Pomerium을 통과했다고 관리자 권한이 생기지는 않습니다.</a:t>
+            </a:r>
+          </a:p>
+          <a:p>
+            <a:r>
+              <a:t>실제 권한은 애플리케이션이 다시 판단합니다.</a:t>
+            </a:r>
           </a:p>
         </p:txBody>
       </p:sp>
@@ -2334,48 +1431,7 @@
               </a:tabLst>
             </a:pPr>
             <a:r>
-              <a:rPr lang="en-US" sz="2000" b="0" u="none" strike="noStrike">
-                <a:solidFill>
-                  <a:srgbClr val="000000"/>
-                </a:solidFill>
-                <a:effectLst/>
-                <a:uFillTx/>
-                <a:latin typeface="Noto Sans CJK KR"/>
-              </a:rPr>
-              <a:t>[13/22 · 00:55] HR </a:t>
-            </a:r>
-            <a:r>
-              <a:rPr lang="ko-KR" sz="2000" b="0" u="none" strike="noStrike">
-                <a:solidFill>
-                  <a:srgbClr val="000000"/>
-                </a:solidFill>
-                <a:effectLst/>
-                <a:uFillTx/>
-                <a:latin typeface="Noto Sans CJK KR"/>
-              </a:rPr>
-              <a:t>품질</a:t>
-            </a:r>
-            <a:r>
-              <a:rPr lang="en-US" sz="2000" b="0" u="none" strike="noStrike">
-                <a:solidFill>
-                  <a:srgbClr val="000000"/>
-                </a:solidFill>
-                <a:effectLst/>
-                <a:uFillTx/>
-                <a:latin typeface="Noto Sans CJK KR"/>
-              </a:rPr>
-              <a:t>·</a:t>
-            </a:r>
-            <a:r>
-              <a:rPr lang="ko-KR" sz="2000" b="0" u="none" strike="noStrike">
-                <a:solidFill>
-                  <a:srgbClr val="000000"/>
-                </a:solidFill>
-                <a:effectLst/>
-                <a:uFillTx/>
-                <a:latin typeface="Noto Sans CJK KR"/>
-              </a:rPr>
-              <a:t>공급망</a:t>
+              <a:t>[15/23 · 0:58] HR 품질·공급망</a:t>
             </a:r>
             <a:endParaRPr lang="en-US" sz="2000" b="0" u="none" strike="noStrike">
               <a:solidFill>
@@ -2386,391 +1442,46 @@
               <a:latin typeface="Noto Sans CJK KR"/>
             </a:endParaRPr>
           </a:p>
-          <a:p>
-            <a:pPr indent="0" algn="l">
-              <a:lnSpc>
-                <a:spcPct val="100000"/>
-              </a:lnSpc>
-              <a:buNone/>
-              <a:tabLst>
-                <a:tab pos="0" algn="l"/>
-              </a:tabLst>
-            </a:pPr>
-            <a:endParaRPr lang="en-US" sz="2000" b="0" u="none" strike="noStrike">
-              <a:solidFill>
-                <a:srgbClr val="000000"/>
-              </a:solidFill>
-              <a:effectLst/>
-              <a:uFillTx/>
-              <a:latin typeface="Noto Sans CJK KR"/>
-            </a:endParaRPr>
-          </a:p>
-          <a:p>
-            <a:pPr indent="0" algn="l">
-              <a:lnSpc>
-                <a:spcPct val="100000"/>
-              </a:lnSpc>
-              <a:buNone/>
-              <a:tabLst>
-                <a:tab pos="0" algn="l"/>
-              </a:tabLst>
-            </a:pPr>
-            <a:r>
-              <a:rPr lang="en-US" sz="2000" b="0" u="none" strike="noStrike">
-                <a:solidFill>
-                  <a:srgbClr val="000000"/>
-                </a:solidFill>
-                <a:effectLst/>
-                <a:uFillTx/>
-                <a:latin typeface="Noto Sans CJK KR"/>
-              </a:rPr>
-              <a:t>PURPOSE: </a:t>
-            </a:r>
-            <a:r>
-              <a:rPr lang="ko-KR" sz="2000" b="0" u="none" strike="noStrike">
-                <a:solidFill>
-                  <a:srgbClr val="000000"/>
-                </a:solidFill>
-                <a:effectLst/>
-                <a:uFillTx/>
-                <a:latin typeface="Noto Sans CJK KR"/>
-              </a:rPr>
-              <a:t>코드가 배포되기까지 통과해야 하는 관문을 보여준다</a:t>
-            </a:r>
-            <a:r>
-              <a:rPr lang="en-US" sz="2000" b="0" u="none" strike="noStrike">
-                <a:solidFill>
-                  <a:srgbClr val="000000"/>
-                </a:solidFill>
-                <a:effectLst/>
-                <a:uFillTx/>
-                <a:latin typeface="Noto Sans CJK KR"/>
-              </a:rPr>
-              <a:t>.</a:t>
-            </a:r>
-            <a:endParaRPr lang="en-US" sz="2000" b="0" u="none" strike="noStrike">
-              <a:solidFill>
-                <a:srgbClr val="000000"/>
-              </a:solidFill>
-              <a:effectLst/>
-              <a:uFillTx/>
-              <a:latin typeface="Noto Sans CJK KR"/>
-            </a:endParaRPr>
-          </a:p>
-          <a:p>
-            <a:pPr indent="0" algn="l">
-              <a:lnSpc>
-                <a:spcPct val="100000"/>
-              </a:lnSpc>
-              <a:buNone/>
-              <a:tabLst>
-                <a:tab pos="0" algn="l"/>
-              </a:tabLst>
-            </a:pPr>
-            <a:r>
-              <a:rPr lang="en-US" sz="2000" b="0" u="none" strike="noStrike">
-                <a:solidFill>
-                  <a:srgbClr val="000000"/>
-                </a:solidFill>
-                <a:effectLst/>
-                <a:uFillTx/>
-                <a:latin typeface="Noto Sans CJK KR"/>
-              </a:rPr>
-              <a:t>MESSAGE: Harbor</a:t>
-            </a:r>
-            <a:r>
-              <a:rPr lang="ko-KR" sz="2000" b="0" u="none" strike="noStrike">
-                <a:solidFill>
-                  <a:srgbClr val="000000"/>
-                </a:solidFill>
-                <a:effectLst/>
-                <a:uFillTx/>
-                <a:latin typeface="Noto Sans CJK KR"/>
-              </a:rPr>
-              <a:t>가 단일 승격 원본이고 </a:t>
-            </a:r>
-            <a:r>
-              <a:rPr lang="en-US" sz="2000" b="0" u="none" strike="noStrike">
-                <a:solidFill>
-                  <a:srgbClr val="000000"/>
-                </a:solidFill>
-                <a:effectLst/>
-                <a:uFillTx/>
-                <a:latin typeface="Noto Sans CJK KR"/>
-              </a:rPr>
-              <a:t>ECR</a:t>
-            </a:r>
-            <a:r>
-              <a:rPr lang="ko-KR" sz="2000" b="0" u="none" strike="noStrike">
-                <a:solidFill>
-                  <a:srgbClr val="000000"/>
-                </a:solidFill>
-                <a:effectLst/>
-                <a:uFillTx/>
-                <a:latin typeface="Noto Sans CJK KR"/>
-              </a:rPr>
-              <a:t>은 읽기 복제본이며 </a:t>
-            </a:r>
-            <a:r>
-              <a:rPr lang="en-US" sz="2000" b="0" u="none" strike="noStrike">
-                <a:solidFill>
-                  <a:srgbClr val="000000"/>
-                </a:solidFill>
-                <a:effectLst/>
-                <a:uFillTx/>
-                <a:latin typeface="Noto Sans CJK KR"/>
-              </a:rPr>
-              <a:t>Kyverno</a:t>
-            </a:r>
-            <a:r>
-              <a:rPr lang="ko-KR" sz="2000" b="0" u="none" strike="noStrike">
-                <a:solidFill>
-                  <a:srgbClr val="000000"/>
-                </a:solidFill>
-                <a:effectLst/>
-                <a:uFillTx/>
-                <a:latin typeface="Noto Sans CJK KR"/>
-              </a:rPr>
-              <a:t>가 마지막에 다시 판정한다</a:t>
-            </a:r>
-            <a:r>
-              <a:rPr lang="en-US" sz="2000" b="0" u="none" strike="noStrike">
-                <a:solidFill>
-                  <a:srgbClr val="000000"/>
-                </a:solidFill>
-                <a:effectLst/>
-                <a:uFillTx/>
-                <a:latin typeface="Noto Sans CJK KR"/>
-              </a:rPr>
-              <a:t>.</a:t>
-            </a:r>
-            <a:endParaRPr lang="en-US" sz="2000" b="0" u="none" strike="noStrike">
-              <a:solidFill>
-                <a:srgbClr val="000000"/>
-              </a:solidFill>
-              <a:effectLst/>
-              <a:uFillTx/>
-              <a:latin typeface="Noto Sans CJK KR"/>
-            </a:endParaRPr>
-          </a:p>
-          <a:p>
-            <a:pPr indent="0" algn="l">
-              <a:lnSpc>
-                <a:spcPct val="100000"/>
-              </a:lnSpc>
-              <a:buNone/>
-              <a:tabLst>
-                <a:tab pos="0" algn="l"/>
-              </a:tabLst>
-            </a:pPr>
-            <a:r>
-              <a:rPr lang="en-US" sz="2000" b="0" u="none" strike="noStrike">
-                <a:solidFill>
-                  <a:srgbClr val="000000"/>
-                </a:solidFill>
-                <a:effectLst/>
-                <a:uFillTx/>
-                <a:latin typeface="Noto Sans CJK KR"/>
-              </a:rPr>
-              <a:t>ASSET: native </a:t>
-            </a:r>
-            <a:r>
-              <a:rPr lang="ko-KR" sz="2000" b="0" u="none" strike="noStrike">
-                <a:solidFill>
-                  <a:srgbClr val="000000"/>
-                </a:solidFill>
-                <a:effectLst/>
-                <a:uFillTx/>
-                <a:latin typeface="Noto Sans CJK KR"/>
-              </a:rPr>
-              <a:t>도형 </a:t>
-            </a:r>
-            <a:r>
-              <a:rPr lang="en-US" sz="2000" b="0" u="none" strike="noStrike">
-                <a:solidFill>
-                  <a:srgbClr val="000000"/>
-                </a:solidFill>
-                <a:effectLst/>
-                <a:uFillTx/>
-                <a:latin typeface="Noto Sans CJK KR"/>
-              </a:rPr>
-              <a:t>+ Jenkins </a:t>
-            </a:r>
-            <a:r>
-              <a:rPr lang="ko-KR" sz="2000" b="0" u="none" strike="noStrike">
-                <a:solidFill>
-                  <a:srgbClr val="000000"/>
-                </a:solidFill>
-                <a:effectLst/>
-                <a:uFillTx/>
-                <a:latin typeface="Noto Sans CJK KR"/>
-              </a:rPr>
-              <a:t>음성 </a:t>
-            </a:r>
-            <a:r>
-              <a:rPr lang="en-US" sz="2000" b="0" u="none" strike="noStrike">
-                <a:solidFill>
-                  <a:srgbClr val="000000"/>
-                </a:solidFill>
-                <a:effectLst/>
-                <a:uFillTx/>
-                <a:latin typeface="Noto Sans CJK KR"/>
-              </a:rPr>
-              <a:t>fixture </a:t>
-            </a:r>
-            <a:r>
-              <a:rPr lang="ko-KR" sz="2000" b="0" u="none" strike="noStrike">
-                <a:solidFill>
-                  <a:srgbClr val="000000"/>
-                </a:solidFill>
-                <a:effectLst/>
-                <a:uFillTx/>
-                <a:latin typeface="Noto Sans CJK KR"/>
-              </a:rPr>
-              <a:t>실제 화면</a:t>
-            </a:r>
-            <a:endParaRPr lang="en-US" sz="2000" b="0" u="none" strike="noStrike">
-              <a:solidFill>
-                <a:srgbClr val="000000"/>
-              </a:solidFill>
-              <a:effectLst/>
-              <a:uFillTx/>
-              <a:latin typeface="Noto Sans CJK KR"/>
-            </a:endParaRPr>
-          </a:p>
-          <a:p>
-            <a:pPr indent="0" algn="l">
-              <a:lnSpc>
-                <a:spcPct val="100000"/>
-              </a:lnSpc>
-              <a:buNone/>
-              <a:tabLst>
-                <a:tab pos="0" algn="l"/>
-              </a:tabLst>
-            </a:pPr>
-            <a:r>
-              <a:rPr lang="en-US" sz="2000" b="0" u="none" strike="noStrike">
-                <a:solidFill>
-                  <a:srgbClr val="000000"/>
-                </a:solidFill>
-                <a:effectLst/>
-                <a:uFillTx/>
-                <a:latin typeface="Noto Sans CJK KR"/>
-              </a:rPr>
-              <a:t>EVIDENCE: CI-01 · QUALITY-03 · QUALITY-05 · SCAN-01 · SIGN-01 · SUPPLY-04 · SUPPLY-06 · SUPPLY-07 · SUPPLY-01-FIX-02</a:t>
-            </a:r>
-            <a:endParaRPr lang="en-US" sz="2000" b="0" u="none" strike="noStrike">
-              <a:solidFill>
-                <a:srgbClr val="000000"/>
-              </a:solidFill>
-              <a:effectLst/>
-              <a:uFillTx/>
-              <a:latin typeface="Noto Sans CJK KR"/>
-            </a:endParaRPr>
-          </a:p>
-          <a:p>
-            <a:pPr indent="0" algn="l">
-              <a:lnSpc>
-                <a:spcPct val="100000"/>
-              </a:lnSpc>
-              <a:buNone/>
-              <a:tabLst>
-                <a:tab pos="0" algn="l"/>
-              </a:tabLst>
-            </a:pPr>
-            <a:endParaRPr lang="en-US" sz="2000" b="0" u="none" strike="noStrike">
-              <a:solidFill>
-                <a:srgbClr val="000000"/>
-              </a:solidFill>
-              <a:effectLst/>
-              <a:uFillTx/>
-              <a:latin typeface="Noto Sans CJK KR"/>
-            </a:endParaRPr>
-          </a:p>
-          <a:p>
-            <a:pPr indent="0" algn="l">
-              <a:lnSpc>
-                <a:spcPct val="100000"/>
-              </a:lnSpc>
-              <a:buNone/>
-              <a:tabLst>
-                <a:tab pos="0" algn="l"/>
-              </a:tabLst>
-            </a:pPr>
-            <a:r>
-              <a:rPr lang="en-US" sz="2000" b="0" u="none" strike="noStrike">
-                <a:solidFill>
-                  <a:srgbClr val="000000"/>
-                </a:solidFill>
-                <a:effectLst/>
-                <a:uFillTx/>
-                <a:latin typeface="Noto Sans CJK KR"/>
-              </a:rPr>
-              <a:t>※ 발표 대본은 </a:t>
-            </a:r>
-            <a:r>
-              <a:rPr lang="en-US" sz="2000" b="0" u="none" strike="noStrike">
-                <a:solidFill>
-                  <a:srgbClr val="000000"/>
-                </a:solidFill>
-                <a:effectLst/>
-                <a:uFillTx/>
-                <a:latin typeface="Noto Sans CJK KR"/>
-              </a:rPr>
-              <a:t>PRESENT-SCRIPT-01</a:t>
-            </a:r>
-            <a:r>
-              <a:rPr lang="ko-KR" sz="2000" b="0" u="none" strike="noStrike">
-                <a:solidFill>
-                  <a:srgbClr val="000000"/>
-                </a:solidFill>
-                <a:effectLst/>
-                <a:uFillTx/>
-                <a:latin typeface="Noto Sans CJK KR"/>
-              </a:rPr>
-              <a:t>이 이 </a:t>
-            </a:r>
-            <a:r>
-              <a:rPr lang="en-US" sz="2000" b="0" u="none" strike="noStrike">
-                <a:solidFill>
-                  <a:srgbClr val="000000"/>
-                </a:solidFill>
-                <a:effectLst/>
-                <a:uFillTx/>
-                <a:latin typeface="Noto Sans CJK KR"/>
-              </a:rPr>
-              <a:t>notes</a:t>
-            </a:r>
-            <a:r>
-              <a:rPr lang="ko-KR" sz="2000" b="0" u="none" strike="noStrike">
-                <a:solidFill>
-                  <a:srgbClr val="000000"/>
-                </a:solidFill>
-                <a:effectLst/>
-                <a:uFillTx/>
-                <a:latin typeface="Noto Sans CJK KR"/>
-              </a:rPr>
-              <a:t>를 대체한다</a:t>
-            </a:r>
-            <a:r>
-              <a:rPr lang="en-US" sz="2000" b="0" u="none" strike="noStrike">
-                <a:solidFill>
-                  <a:srgbClr val="000000"/>
-                </a:solidFill>
-                <a:effectLst/>
-                <a:uFillTx/>
-                <a:latin typeface="Noto Sans CJK KR"/>
-              </a:rPr>
-              <a:t>.</a:t>
-            </a:r>
-            <a:endParaRPr lang="en-US" sz="2000" b="0" u="none" strike="noStrike">
-              <a:solidFill>
-                <a:srgbClr val="000000"/>
-              </a:solidFill>
-              <a:effectLst/>
-              <a:uFillTx/>
-              <a:latin typeface="Noto Sans CJK KR"/>
-            </a:endParaRPr>
+          <a:p/>
+          <a:p>
+            <a:r>
+              <a:t>공급망이 가장 공을 들인 부분입니다. 코드가 뜨기까지 관문 여섯 개를 지납니다.</a:t>
+            </a:r>
+          </a:p>
+          <a:p>
+            <a:r>
+              <a:t>Jenkins에서 테스트와 커버리지를 돌리고 SonarQube 게이트를 넘습니다.</a:t>
+            </a:r>
+          </a:p>
+          <a:p>
+            <a:r>
+              <a:t>Trivy로 스캔해 SBOM을 뽑고 Cosign으로 서명합니다.</a:t>
+            </a:r>
+          </a:p>
+          <a:p>
+            <a:r>
+              <a:t>통과한 이미지만 Harbor에 올라가고, 올라간 digest만 ECR로 복제됩니다.</a:t>
+            </a:r>
+          </a:p>
+          <a:p>
+            <a:r>
+              <a:t>마지막에 EKS의 Kyverno가 서명을 다시 확인합니다.</a:t>
+            </a:r>
+          </a:p>
+          <a:p>
+            <a:r>
+              <a:t>왼쪽이 실제로 끊긴 빌드입니다. 42번이 test and coverage gates에서 멈췄는데,</a:t>
+            </a:r>
+          </a:p>
+          <a:p>
+            <a:r>
+              <a:t>뒤 단계가 그려지지도 않았습니다. 이미지 자체가 안 만들어진 겁니다.</a:t>
+            </a:r>
+          </a:p>
+          <a:p>
+            <a:r>
+              <a:t>Argo CD는 이 관문을 다 통과한 digest만 선언에 씁니다.</a:t>
+            </a:r>
           </a:p>
         </p:txBody>
       </p:sp>
@@ -2937,70 +1648,7 @@
               </a:tabLst>
             </a:pPr>
             <a:r>
-              <a:rPr lang="en-US" sz="2000" b="0" u="none" strike="noStrike">
-                <a:solidFill>
-                  <a:srgbClr val="000000"/>
-                </a:solidFill>
-                <a:effectLst/>
-                <a:uFillTx/>
-                <a:latin typeface="Noto Sans CJK KR"/>
-              </a:rPr>
-              <a:t>[14/22 · 00:45] </a:t>
-            </a:r>
-            <a:r>
-              <a:rPr lang="ko-KR" sz="2000" b="0" u="none" strike="noStrike">
-                <a:solidFill>
-                  <a:srgbClr val="000000"/>
-                </a:solidFill>
-                <a:effectLst/>
-                <a:uFillTx/>
-                <a:latin typeface="Noto Sans CJK KR"/>
-              </a:rPr>
-              <a:t>관측</a:t>
-            </a:r>
-            <a:r>
-              <a:rPr lang="en-US" sz="2000" b="0" u="none" strike="noStrike">
-                <a:solidFill>
-                  <a:srgbClr val="000000"/>
-                </a:solidFill>
-                <a:effectLst/>
-                <a:uFillTx/>
-                <a:latin typeface="Noto Sans CJK KR"/>
-              </a:rPr>
-              <a:t>·</a:t>
-            </a:r>
-            <a:r>
-              <a:rPr lang="ko-KR" sz="2000" b="0" u="none" strike="noStrike">
-                <a:solidFill>
-                  <a:srgbClr val="000000"/>
-                </a:solidFill>
-                <a:effectLst/>
-                <a:uFillTx/>
-                <a:latin typeface="Noto Sans CJK KR"/>
-              </a:rPr>
-              <a:t>탐지</a:t>
-            </a:r>
-            <a:r>
-              <a:rPr lang="en-US" sz="2000" b="0" u="none" strike="noStrike">
-                <a:solidFill>
-                  <a:srgbClr val="000000"/>
-                </a:solidFill>
-                <a:effectLst/>
-                <a:uFillTx/>
-                <a:latin typeface="Noto Sans CJK KR"/>
-              </a:rPr>
-              <a:t>·</a:t>
-            </a:r>
-            <a:r>
-              <a:rPr lang="ko-KR" sz="2000" b="0" u="none" strike="noStrike">
-                <a:solidFill>
-                  <a:srgbClr val="000000"/>
-                </a:solidFill>
-                <a:effectLst/>
-                <a:uFillTx/>
-                <a:latin typeface="Noto Sans CJK KR"/>
-              </a:rPr>
-              <a:t>사람 승인</a:t>
+              <a:t>[16/23 · 0:34] AWS 보안</a:t>
             </a:r>
             <a:endParaRPr lang="en-US" sz="2000" b="0" u="none" strike="noStrike">
               <a:solidFill>
@@ -3011,391 +1659,31 @@
               <a:latin typeface="Noto Sans CJK KR"/>
             </a:endParaRPr>
           </a:p>
-          <a:p>
-            <a:pPr indent="0" algn="l">
-              <a:lnSpc>
-                <a:spcPct val="100000"/>
-              </a:lnSpc>
-              <a:buNone/>
-              <a:tabLst>
-                <a:tab pos="0" algn="l"/>
-              </a:tabLst>
-            </a:pPr>
-            <a:endParaRPr lang="en-US" sz="2000" b="0" u="none" strike="noStrike">
-              <a:solidFill>
-                <a:srgbClr val="000000"/>
-              </a:solidFill>
-              <a:effectLst/>
-              <a:uFillTx/>
-              <a:latin typeface="Noto Sans CJK KR"/>
-            </a:endParaRPr>
-          </a:p>
-          <a:p>
-            <a:pPr indent="0" algn="l">
-              <a:lnSpc>
-                <a:spcPct val="100000"/>
-              </a:lnSpc>
-              <a:buNone/>
-              <a:tabLst>
-                <a:tab pos="0" algn="l"/>
-              </a:tabLst>
-            </a:pPr>
-            <a:r>
-              <a:rPr lang="en-US" sz="2000" b="0" u="none" strike="noStrike">
-                <a:solidFill>
-                  <a:srgbClr val="000000"/>
-                </a:solidFill>
-                <a:effectLst/>
-                <a:uFillTx/>
-                <a:latin typeface="Noto Sans CJK KR"/>
-              </a:rPr>
-              <a:t>PURPOSE: </a:t>
-            </a:r>
-            <a:r>
-              <a:rPr lang="ko-KR" sz="2000" b="0" u="none" strike="noStrike">
-                <a:solidFill>
-                  <a:srgbClr val="000000"/>
-                </a:solidFill>
-                <a:effectLst/>
-                <a:uFillTx/>
-                <a:latin typeface="Noto Sans CJK KR"/>
-              </a:rPr>
-              <a:t>경보가 사람의 판단으로 이어지는 경로를 보여준다</a:t>
-            </a:r>
-            <a:r>
-              <a:rPr lang="en-US" sz="2000" b="0" u="none" strike="noStrike">
-                <a:solidFill>
-                  <a:srgbClr val="000000"/>
-                </a:solidFill>
-                <a:effectLst/>
-                <a:uFillTx/>
-                <a:latin typeface="Noto Sans CJK KR"/>
-              </a:rPr>
-              <a:t>.</a:t>
-            </a:r>
-            <a:endParaRPr lang="en-US" sz="2000" b="0" u="none" strike="noStrike">
-              <a:solidFill>
-                <a:srgbClr val="000000"/>
-              </a:solidFill>
-              <a:effectLst/>
-              <a:uFillTx/>
-              <a:latin typeface="Noto Sans CJK KR"/>
-            </a:endParaRPr>
-          </a:p>
-          <a:p>
-            <a:pPr indent="0" algn="l">
-              <a:lnSpc>
-                <a:spcPct val="100000"/>
-              </a:lnSpc>
-              <a:buNone/>
-              <a:tabLst>
-                <a:tab pos="0" algn="l"/>
-              </a:tabLst>
-            </a:pPr>
-            <a:r>
-              <a:rPr lang="en-US" sz="2000" b="0" u="none" strike="noStrike">
-                <a:solidFill>
-                  <a:srgbClr val="000000"/>
-                </a:solidFill>
-                <a:effectLst/>
-                <a:uFillTx/>
-                <a:latin typeface="Noto Sans CJK KR"/>
-              </a:rPr>
-              <a:t>MESSAGE: Suricata</a:t>
-            </a:r>
-            <a:r>
-              <a:rPr lang="ko-KR" sz="2000" b="0" u="none" strike="noStrike">
-                <a:solidFill>
-                  <a:srgbClr val="000000"/>
-                </a:solidFill>
-                <a:effectLst/>
-                <a:uFillTx/>
-                <a:latin typeface="Noto Sans CJK KR"/>
-              </a:rPr>
-              <a:t>는 </a:t>
-            </a:r>
-            <a:r>
-              <a:rPr lang="en-US" sz="2000" b="0" u="none" strike="noStrike">
-                <a:solidFill>
-                  <a:srgbClr val="000000"/>
-                </a:solidFill>
-                <a:effectLst/>
-                <a:uFillTx/>
-                <a:latin typeface="Noto Sans CJK KR"/>
-              </a:rPr>
-              <a:t>alert-only</a:t>
-            </a:r>
-            <a:r>
-              <a:rPr lang="ko-KR" sz="2000" b="0" u="none" strike="noStrike">
-                <a:solidFill>
-                  <a:srgbClr val="000000"/>
-                </a:solidFill>
-                <a:effectLst/>
-                <a:uFillTx/>
-                <a:latin typeface="Noto Sans CJK KR"/>
-              </a:rPr>
-              <a:t>이고 </a:t>
-            </a:r>
-            <a:r>
-              <a:rPr lang="en-US" sz="2000" b="0" u="none" strike="noStrike">
-                <a:solidFill>
-                  <a:srgbClr val="000000"/>
-                </a:solidFill>
-                <a:effectLst/>
-                <a:uFillTx/>
-                <a:latin typeface="Noto Sans CJK KR"/>
-              </a:rPr>
-              <a:t>Shuffle</a:t>
-            </a:r>
-            <a:r>
-              <a:rPr lang="ko-KR" sz="2000" b="0" u="none" strike="noStrike">
-                <a:solidFill>
-                  <a:srgbClr val="000000"/>
-                </a:solidFill>
-                <a:effectLst/>
-                <a:uFillTx/>
-                <a:latin typeface="Noto Sans CJK KR"/>
-              </a:rPr>
-              <a:t>은 </a:t>
-            </a:r>
-            <a:r>
-              <a:rPr lang="en-US" sz="2000" b="0" u="none" strike="noStrike">
-                <a:solidFill>
-                  <a:srgbClr val="000000"/>
-                </a:solidFill>
-                <a:effectLst/>
-                <a:uFillTx/>
-                <a:latin typeface="Noto Sans CJK KR"/>
-              </a:rPr>
-              <a:t>read-only </a:t>
-            </a:r>
-            <a:r>
-              <a:rPr lang="ko-KR" sz="2000" b="0" u="none" strike="noStrike">
-                <a:solidFill>
-                  <a:srgbClr val="000000"/>
-                </a:solidFill>
-                <a:effectLst/>
-                <a:uFillTx/>
-                <a:latin typeface="Noto Sans CJK KR"/>
-              </a:rPr>
-              <a:t>보강까지다</a:t>
-            </a:r>
-            <a:r>
-              <a:rPr lang="en-US" sz="2000" b="0" u="none" strike="noStrike">
-                <a:solidFill>
-                  <a:srgbClr val="000000"/>
-                </a:solidFill>
-                <a:effectLst/>
-                <a:uFillTx/>
-                <a:latin typeface="Noto Sans CJK KR"/>
-              </a:rPr>
-              <a:t>. </a:t>
-            </a:r>
-            <a:r>
-              <a:rPr lang="ko-KR" sz="2000" b="0" u="none" strike="noStrike">
-                <a:solidFill>
-                  <a:srgbClr val="000000"/>
-                </a:solidFill>
-                <a:effectLst/>
-                <a:uFillTx/>
-                <a:latin typeface="Noto Sans CJK KR"/>
-              </a:rPr>
-              <a:t>차단과 대응은 사람이 결정한다</a:t>
-            </a:r>
-            <a:r>
-              <a:rPr lang="en-US" sz="2000" b="0" u="none" strike="noStrike">
-                <a:solidFill>
-                  <a:srgbClr val="000000"/>
-                </a:solidFill>
-                <a:effectLst/>
-                <a:uFillTx/>
-                <a:latin typeface="Noto Sans CJK KR"/>
-              </a:rPr>
-              <a:t>.</a:t>
-            </a:r>
-            <a:endParaRPr lang="en-US" sz="2000" b="0" u="none" strike="noStrike">
-              <a:solidFill>
-                <a:srgbClr val="000000"/>
-              </a:solidFill>
-              <a:effectLst/>
-              <a:uFillTx/>
-              <a:latin typeface="Noto Sans CJK KR"/>
-            </a:endParaRPr>
-          </a:p>
-          <a:p>
-            <a:pPr indent="0" algn="l">
-              <a:lnSpc>
-                <a:spcPct val="100000"/>
-              </a:lnSpc>
-              <a:buNone/>
-              <a:tabLst>
-                <a:tab pos="0" algn="l"/>
-              </a:tabLst>
-            </a:pPr>
-            <a:r>
-              <a:rPr lang="en-US" sz="2000" b="0" u="none" strike="noStrike">
-                <a:solidFill>
-                  <a:srgbClr val="000000"/>
-                </a:solidFill>
-                <a:effectLst/>
-                <a:uFillTx/>
-                <a:latin typeface="Noto Sans CJK KR"/>
-              </a:rPr>
-              <a:t>ASSET: native </a:t>
-            </a:r>
-            <a:r>
-              <a:rPr lang="ko-KR" sz="2000" b="0" u="none" strike="noStrike">
-                <a:solidFill>
-                  <a:srgbClr val="000000"/>
-                </a:solidFill>
-                <a:effectLst/>
-                <a:uFillTx/>
-                <a:latin typeface="Noto Sans CJK KR"/>
-              </a:rPr>
-              <a:t>도형</a:t>
-            </a:r>
-            <a:endParaRPr lang="en-US" sz="2000" b="0" u="none" strike="noStrike">
-              <a:solidFill>
-                <a:srgbClr val="000000"/>
-              </a:solidFill>
-              <a:effectLst/>
-              <a:uFillTx/>
-              <a:latin typeface="Noto Sans CJK KR"/>
-            </a:endParaRPr>
-          </a:p>
-          <a:p>
-            <a:pPr indent="0" algn="l">
-              <a:lnSpc>
-                <a:spcPct val="100000"/>
-              </a:lnSpc>
-              <a:buNone/>
-              <a:tabLst>
-                <a:tab pos="0" algn="l"/>
-              </a:tabLst>
-            </a:pPr>
-            <a:r>
-              <a:rPr lang="en-US" sz="2000" b="0" u="none" strike="noStrike">
-                <a:solidFill>
-                  <a:srgbClr val="000000"/>
-                </a:solidFill>
-                <a:effectLst/>
-                <a:uFillTx/>
-                <a:latin typeface="Noto Sans CJK KR"/>
-              </a:rPr>
-              <a:t>EVIDENCE: NIDS-01 · FALCO-01 · WAZUH-01 · SOAR-01 · OBS-01 · LOKI-01</a:t>
-            </a:r>
-            <a:endParaRPr lang="en-US" sz="2000" b="0" u="none" strike="noStrike">
-              <a:solidFill>
-                <a:srgbClr val="000000"/>
-              </a:solidFill>
-              <a:effectLst/>
-              <a:uFillTx/>
-              <a:latin typeface="Noto Sans CJK KR"/>
-            </a:endParaRPr>
-          </a:p>
-          <a:p>
-            <a:pPr indent="0" algn="l">
-              <a:lnSpc>
-                <a:spcPct val="100000"/>
-              </a:lnSpc>
-              <a:buNone/>
-              <a:tabLst>
-                <a:tab pos="0" algn="l"/>
-              </a:tabLst>
-            </a:pPr>
-            <a:endParaRPr lang="en-US" sz="2000" b="0" u="none" strike="noStrike">
-              <a:solidFill>
-                <a:srgbClr val="000000"/>
-              </a:solidFill>
-              <a:effectLst/>
-              <a:uFillTx/>
-              <a:latin typeface="Noto Sans CJK KR"/>
-            </a:endParaRPr>
-          </a:p>
-          <a:p>
-            <a:pPr indent="0" algn="l">
-              <a:lnSpc>
-                <a:spcPct val="100000"/>
-              </a:lnSpc>
-              <a:buNone/>
-              <a:tabLst>
-                <a:tab pos="0" algn="l"/>
-              </a:tabLst>
-            </a:pPr>
-            <a:r>
-              <a:rPr lang="en-US" sz="2000" b="0" u="none" strike="noStrike">
-                <a:solidFill>
-                  <a:srgbClr val="000000"/>
-                </a:solidFill>
-                <a:effectLst/>
-                <a:uFillTx/>
-                <a:latin typeface="Noto Sans CJK KR"/>
-              </a:rPr>
-              <a:t>※ 발표 대본은 </a:t>
-            </a:r>
-            <a:r>
-              <a:rPr lang="en-US" sz="2000" b="0" u="none" strike="noStrike">
-                <a:solidFill>
-                  <a:srgbClr val="000000"/>
-                </a:solidFill>
-                <a:effectLst/>
-                <a:uFillTx/>
-                <a:latin typeface="Noto Sans CJK KR"/>
-              </a:rPr>
-              <a:t>PRESENT-SCRIPT-01</a:t>
-            </a:r>
-            <a:r>
-              <a:rPr lang="ko-KR" sz="2000" b="0" u="none" strike="noStrike">
-                <a:solidFill>
-                  <a:srgbClr val="000000"/>
-                </a:solidFill>
-                <a:effectLst/>
-                <a:uFillTx/>
-                <a:latin typeface="Noto Sans CJK KR"/>
-              </a:rPr>
-              <a:t>이 이 </a:t>
-            </a:r>
-            <a:r>
-              <a:rPr lang="en-US" sz="2000" b="0" u="none" strike="noStrike">
-                <a:solidFill>
-                  <a:srgbClr val="000000"/>
-                </a:solidFill>
-                <a:effectLst/>
-                <a:uFillTx/>
-                <a:latin typeface="Noto Sans CJK KR"/>
-              </a:rPr>
-              <a:t>notes</a:t>
-            </a:r>
-            <a:r>
-              <a:rPr lang="ko-KR" sz="2000" b="0" u="none" strike="noStrike">
-                <a:solidFill>
-                  <a:srgbClr val="000000"/>
-                </a:solidFill>
-                <a:effectLst/>
-                <a:uFillTx/>
-                <a:latin typeface="Noto Sans CJK KR"/>
-              </a:rPr>
-              <a:t>를 대체한다</a:t>
-            </a:r>
-            <a:r>
-              <a:rPr lang="en-US" sz="2000" b="0" u="none" strike="noStrike">
-                <a:solidFill>
-                  <a:srgbClr val="000000"/>
-                </a:solidFill>
-                <a:effectLst/>
-                <a:uFillTx/>
-                <a:latin typeface="Noto Sans CJK KR"/>
-              </a:rPr>
-              <a:t>.</a:t>
-            </a:r>
-            <a:endParaRPr lang="en-US" sz="2000" b="0" u="none" strike="noStrike">
-              <a:solidFill>
-                <a:srgbClr val="000000"/>
-              </a:solidFill>
-              <a:effectLst/>
-              <a:uFillTx/>
-              <a:latin typeface="Noto Sans CJK KR"/>
-            </a:endParaRPr>
+          <a:p/>
+          <a:p>
+            <a:r>
+              <a:t>AWS는 세 축입니다.</a:t>
+            </a:r>
+          </a:p>
+          <a:p>
+            <a:r>
+              <a:t>네트워크는 인터넷과 맞닿는 자리에 ALB만 두고 NAT와 EKS 노드, RDS는 private 서브넷에 넣었습니다.</a:t>
+            </a:r>
+          </a:p>
+          <a:p>
+            <a:r>
+              <a:t>밖에서 직접 부를 수 있는 게 없습니다.</a:t>
+            </a:r>
+          </a:p>
+          <a:p>
+            <a:r>
+              <a:t>자격 증명은 영구 키를 만들지 않고, Keycloak OIDC를 연동해 STS 임시 토큰을 받아 씁니다.</a:t>
+            </a:r>
+          </a:p>
+          <a:p>
+            <a:r>
+              <a:t>이어서 IRSA, CIEM, CSPM 순서로 보여드리겠습니다.</a:t>
+            </a:r>
           </a:p>
         </p:txBody>
       </p:sp>
@@ -3562,70 +1850,7 @@
               </a:tabLst>
             </a:pPr>
             <a:r>
-              <a:rPr lang="en-US" sz="2000" b="0" u="none" strike="noStrike">
-                <a:solidFill>
-                  <a:srgbClr val="000000"/>
-                </a:solidFill>
-                <a:effectLst/>
-                <a:uFillTx/>
-                <a:latin typeface="Noto Sans CJK KR"/>
-              </a:rPr>
-              <a:t>[14/22 · 00:45] </a:t>
-            </a:r>
-            <a:r>
-              <a:rPr lang="ko-KR" sz="2000" b="0" u="none" strike="noStrike">
-                <a:solidFill>
-                  <a:srgbClr val="000000"/>
-                </a:solidFill>
-                <a:effectLst/>
-                <a:uFillTx/>
-                <a:latin typeface="Noto Sans CJK KR"/>
-              </a:rPr>
-              <a:t>관측</a:t>
-            </a:r>
-            <a:r>
-              <a:rPr lang="en-US" sz="2000" b="0" u="none" strike="noStrike">
-                <a:solidFill>
-                  <a:srgbClr val="000000"/>
-                </a:solidFill>
-                <a:effectLst/>
-                <a:uFillTx/>
-                <a:latin typeface="Noto Sans CJK KR"/>
-              </a:rPr>
-              <a:t>·</a:t>
-            </a:r>
-            <a:r>
-              <a:rPr lang="ko-KR" sz="2000" b="0" u="none" strike="noStrike">
-                <a:solidFill>
-                  <a:srgbClr val="000000"/>
-                </a:solidFill>
-                <a:effectLst/>
-                <a:uFillTx/>
-                <a:latin typeface="Noto Sans CJK KR"/>
-              </a:rPr>
-              <a:t>탐지</a:t>
-            </a:r>
-            <a:r>
-              <a:rPr lang="en-US" sz="2000" b="0" u="none" strike="noStrike">
-                <a:solidFill>
-                  <a:srgbClr val="000000"/>
-                </a:solidFill>
-                <a:effectLst/>
-                <a:uFillTx/>
-                <a:latin typeface="Noto Sans CJK KR"/>
-              </a:rPr>
-              <a:t>·</a:t>
-            </a:r>
-            <a:r>
-              <a:rPr lang="ko-KR" sz="2000" b="0" u="none" strike="noStrike">
-                <a:solidFill>
-                  <a:srgbClr val="000000"/>
-                </a:solidFill>
-                <a:effectLst/>
-                <a:uFillTx/>
-                <a:latin typeface="Noto Sans CJK KR"/>
-              </a:rPr>
-              <a:t>사람 승인</a:t>
+              <a:t>[17/23 · 0:43] IRSA</a:t>
             </a:r>
             <a:endParaRPr lang="en-US" sz="2000" b="0" u="none" strike="noStrike">
               <a:solidFill>
@@ -3636,391 +1861,36 @@
               <a:latin typeface="Noto Sans CJK KR"/>
             </a:endParaRPr>
           </a:p>
-          <a:p>
-            <a:pPr indent="0" algn="l">
-              <a:lnSpc>
-                <a:spcPct val="100000"/>
-              </a:lnSpc>
-              <a:buNone/>
-              <a:tabLst>
-                <a:tab pos="0" algn="l"/>
-              </a:tabLst>
-            </a:pPr>
-            <a:endParaRPr lang="en-US" sz="2000" b="0" u="none" strike="noStrike">
-              <a:solidFill>
-                <a:srgbClr val="000000"/>
-              </a:solidFill>
-              <a:effectLst/>
-              <a:uFillTx/>
-              <a:latin typeface="Noto Sans CJK KR"/>
-            </a:endParaRPr>
-          </a:p>
-          <a:p>
-            <a:pPr indent="0" algn="l">
-              <a:lnSpc>
-                <a:spcPct val="100000"/>
-              </a:lnSpc>
-              <a:buNone/>
-              <a:tabLst>
-                <a:tab pos="0" algn="l"/>
-              </a:tabLst>
-            </a:pPr>
-            <a:r>
-              <a:rPr lang="en-US" sz="2000" b="0" u="none" strike="noStrike">
-                <a:solidFill>
-                  <a:srgbClr val="000000"/>
-                </a:solidFill>
-                <a:effectLst/>
-                <a:uFillTx/>
-                <a:latin typeface="Noto Sans CJK KR"/>
-              </a:rPr>
-              <a:t>PURPOSE: </a:t>
-            </a:r>
-            <a:r>
-              <a:rPr lang="ko-KR" sz="2000" b="0" u="none" strike="noStrike">
-                <a:solidFill>
-                  <a:srgbClr val="000000"/>
-                </a:solidFill>
-                <a:effectLst/>
-                <a:uFillTx/>
-                <a:latin typeface="Noto Sans CJK KR"/>
-              </a:rPr>
-              <a:t>경보가 사람의 판단으로 이어지는 경로를 보여준다</a:t>
-            </a:r>
-            <a:r>
-              <a:rPr lang="en-US" sz="2000" b="0" u="none" strike="noStrike">
-                <a:solidFill>
-                  <a:srgbClr val="000000"/>
-                </a:solidFill>
-                <a:effectLst/>
-                <a:uFillTx/>
-                <a:latin typeface="Noto Sans CJK KR"/>
-              </a:rPr>
-              <a:t>.</a:t>
-            </a:r>
-            <a:endParaRPr lang="en-US" sz="2000" b="0" u="none" strike="noStrike">
-              <a:solidFill>
-                <a:srgbClr val="000000"/>
-              </a:solidFill>
-              <a:effectLst/>
-              <a:uFillTx/>
-              <a:latin typeface="Noto Sans CJK KR"/>
-            </a:endParaRPr>
-          </a:p>
-          <a:p>
-            <a:pPr indent="0" algn="l">
-              <a:lnSpc>
-                <a:spcPct val="100000"/>
-              </a:lnSpc>
-              <a:buNone/>
-              <a:tabLst>
-                <a:tab pos="0" algn="l"/>
-              </a:tabLst>
-            </a:pPr>
-            <a:r>
-              <a:rPr lang="en-US" sz="2000" b="0" u="none" strike="noStrike">
-                <a:solidFill>
-                  <a:srgbClr val="000000"/>
-                </a:solidFill>
-                <a:effectLst/>
-                <a:uFillTx/>
-                <a:latin typeface="Noto Sans CJK KR"/>
-              </a:rPr>
-              <a:t>MESSAGE: Suricata</a:t>
-            </a:r>
-            <a:r>
-              <a:rPr lang="ko-KR" sz="2000" b="0" u="none" strike="noStrike">
-                <a:solidFill>
-                  <a:srgbClr val="000000"/>
-                </a:solidFill>
-                <a:effectLst/>
-                <a:uFillTx/>
-                <a:latin typeface="Noto Sans CJK KR"/>
-              </a:rPr>
-              <a:t>는 </a:t>
-            </a:r>
-            <a:r>
-              <a:rPr lang="en-US" sz="2000" b="0" u="none" strike="noStrike">
-                <a:solidFill>
-                  <a:srgbClr val="000000"/>
-                </a:solidFill>
-                <a:effectLst/>
-                <a:uFillTx/>
-                <a:latin typeface="Noto Sans CJK KR"/>
-              </a:rPr>
-              <a:t>alert-only</a:t>
-            </a:r>
-            <a:r>
-              <a:rPr lang="ko-KR" sz="2000" b="0" u="none" strike="noStrike">
-                <a:solidFill>
-                  <a:srgbClr val="000000"/>
-                </a:solidFill>
-                <a:effectLst/>
-                <a:uFillTx/>
-                <a:latin typeface="Noto Sans CJK KR"/>
-              </a:rPr>
-              <a:t>이고 </a:t>
-            </a:r>
-            <a:r>
-              <a:rPr lang="en-US" sz="2000" b="0" u="none" strike="noStrike">
-                <a:solidFill>
-                  <a:srgbClr val="000000"/>
-                </a:solidFill>
-                <a:effectLst/>
-                <a:uFillTx/>
-                <a:latin typeface="Noto Sans CJK KR"/>
-              </a:rPr>
-              <a:t>Shuffle</a:t>
-            </a:r>
-            <a:r>
-              <a:rPr lang="ko-KR" sz="2000" b="0" u="none" strike="noStrike">
-                <a:solidFill>
-                  <a:srgbClr val="000000"/>
-                </a:solidFill>
-                <a:effectLst/>
-                <a:uFillTx/>
-                <a:latin typeface="Noto Sans CJK KR"/>
-              </a:rPr>
-              <a:t>은 </a:t>
-            </a:r>
-            <a:r>
-              <a:rPr lang="en-US" sz="2000" b="0" u="none" strike="noStrike">
-                <a:solidFill>
-                  <a:srgbClr val="000000"/>
-                </a:solidFill>
-                <a:effectLst/>
-                <a:uFillTx/>
-                <a:latin typeface="Noto Sans CJK KR"/>
-              </a:rPr>
-              <a:t>read-only </a:t>
-            </a:r>
-            <a:r>
-              <a:rPr lang="ko-KR" sz="2000" b="0" u="none" strike="noStrike">
-                <a:solidFill>
-                  <a:srgbClr val="000000"/>
-                </a:solidFill>
-                <a:effectLst/>
-                <a:uFillTx/>
-                <a:latin typeface="Noto Sans CJK KR"/>
-              </a:rPr>
-              <a:t>보강까지다</a:t>
-            </a:r>
-            <a:r>
-              <a:rPr lang="en-US" sz="2000" b="0" u="none" strike="noStrike">
-                <a:solidFill>
-                  <a:srgbClr val="000000"/>
-                </a:solidFill>
-                <a:effectLst/>
-                <a:uFillTx/>
-                <a:latin typeface="Noto Sans CJK KR"/>
-              </a:rPr>
-              <a:t>. </a:t>
-            </a:r>
-            <a:r>
-              <a:rPr lang="ko-KR" sz="2000" b="0" u="none" strike="noStrike">
-                <a:solidFill>
-                  <a:srgbClr val="000000"/>
-                </a:solidFill>
-                <a:effectLst/>
-                <a:uFillTx/>
-                <a:latin typeface="Noto Sans CJK KR"/>
-              </a:rPr>
-              <a:t>차단과 대응은 사람이 결정한다</a:t>
-            </a:r>
-            <a:r>
-              <a:rPr lang="en-US" sz="2000" b="0" u="none" strike="noStrike">
-                <a:solidFill>
-                  <a:srgbClr val="000000"/>
-                </a:solidFill>
-                <a:effectLst/>
-                <a:uFillTx/>
-                <a:latin typeface="Noto Sans CJK KR"/>
-              </a:rPr>
-              <a:t>.</a:t>
-            </a:r>
-            <a:endParaRPr lang="en-US" sz="2000" b="0" u="none" strike="noStrike">
-              <a:solidFill>
-                <a:srgbClr val="000000"/>
-              </a:solidFill>
-              <a:effectLst/>
-              <a:uFillTx/>
-              <a:latin typeface="Noto Sans CJK KR"/>
-            </a:endParaRPr>
-          </a:p>
-          <a:p>
-            <a:pPr indent="0" algn="l">
-              <a:lnSpc>
-                <a:spcPct val="100000"/>
-              </a:lnSpc>
-              <a:buNone/>
-              <a:tabLst>
-                <a:tab pos="0" algn="l"/>
-              </a:tabLst>
-            </a:pPr>
-            <a:r>
-              <a:rPr lang="en-US" sz="2000" b="0" u="none" strike="noStrike">
-                <a:solidFill>
-                  <a:srgbClr val="000000"/>
-                </a:solidFill>
-                <a:effectLst/>
-                <a:uFillTx/>
-                <a:latin typeface="Noto Sans CJK KR"/>
-              </a:rPr>
-              <a:t>ASSET: native </a:t>
-            </a:r>
-            <a:r>
-              <a:rPr lang="ko-KR" sz="2000" b="0" u="none" strike="noStrike">
-                <a:solidFill>
-                  <a:srgbClr val="000000"/>
-                </a:solidFill>
-                <a:effectLst/>
-                <a:uFillTx/>
-                <a:latin typeface="Noto Sans CJK KR"/>
-              </a:rPr>
-              <a:t>도형</a:t>
-            </a:r>
-            <a:endParaRPr lang="en-US" sz="2000" b="0" u="none" strike="noStrike">
-              <a:solidFill>
-                <a:srgbClr val="000000"/>
-              </a:solidFill>
-              <a:effectLst/>
-              <a:uFillTx/>
-              <a:latin typeface="Noto Sans CJK KR"/>
-            </a:endParaRPr>
-          </a:p>
-          <a:p>
-            <a:pPr indent="0" algn="l">
-              <a:lnSpc>
-                <a:spcPct val="100000"/>
-              </a:lnSpc>
-              <a:buNone/>
-              <a:tabLst>
-                <a:tab pos="0" algn="l"/>
-              </a:tabLst>
-            </a:pPr>
-            <a:r>
-              <a:rPr lang="en-US" sz="2000" b="0" u="none" strike="noStrike">
-                <a:solidFill>
-                  <a:srgbClr val="000000"/>
-                </a:solidFill>
-                <a:effectLst/>
-                <a:uFillTx/>
-                <a:latin typeface="Noto Sans CJK KR"/>
-              </a:rPr>
-              <a:t>EVIDENCE: NIDS-01 · FALCO-01 · WAZUH-01 · SOAR-01 · OBS-01 · LOKI-01</a:t>
-            </a:r>
-            <a:endParaRPr lang="en-US" sz="2000" b="0" u="none" strike="noStrike">
-              <a:solidFill>
-                <a:srgbClr val="000000"/>
-              </a:solidFill>
-              <a:effectLst/>
-              <a:uFillTx/>
-              <a:latin typeface="Noto Sans CJK KR"/>
-            </a:endParaRPr>
-          </a:p>
-          <a:p>
-            <a:pPr indent="0" algn="l">
-              <a:lnSpc>
-                <a:spcPct val="100000"/>
-              </a:lnSpc>
-              <a:buNone/>
-              <a:tabLst>
-                <a:tab pos="0" algn="l"/>
-              </a:tabLst>
-            </a:pPr>
-            <a:endParaRPr lang="en-US" sz="2000" b="0" u="none" strike="noStrike">
-              <a:solidFill>
-                <a:srgbClr val="000000"/>
-              </a:solidFill>
-              <a:effectLst/>
-              <a:uFillTx/>
-              <a:latin typeface="Noto Sans CJK KR"/>
-            </a:endParaRPr>
-          </a:p>
-          <a:p>
-            <a:pPr indent="0" algn="l">
-              <a:lnSpc>
-                <a:spcPct val="100000"/>
-              </a:lnSpc>
-              <a:buNone/>
-              <a:tabLst>
-                <a:tab pos="0" algn="l"/>
-              </a:tabLst>
-            </a:pPr>
-            <a:r>
-              <a:rPr lang="en-US" sz="2000" b="0" u="none" strike="noStrike">
-                <a:solidFill>
-                  <a:srgbClr val="000000"/>
-                </a:solidFill>
-                <a:effectLst/>
-                <a:uFillTx/>
-                <a:latin typeface="Noto Sans CJK KR"/>
-              </a:rPr>
-              <a:t>※ 발표 대본은 </a:t>
-            </a:r>
-            <a:r>
-              <a:rPr lang="en-US" sz="2000" b="0" u="none" strike="noStrike">
-                <a:solidFill>
-                  <a:srgbClr val="000000"/>
-                </a:solidFill>
-                <a:effectLst/>
-                <a:uFillTx/>
-                <a:latin typeface="Noto Sans CJK KR"/>
-              </a:rPr>
-              <a:t>PRESENT-SCRIPT-01</a:t>
-            </a:r>
-            <a:r>
-              <a:rPr lang="ko-KR" sz="2000" b="0" u="none" strike="noStrike">
-                <a:solidFill>
-                  <a:srgbClr val="000000"/>
-                </a:solidFill>
-                <a:effectLst/>
-                <a:uFillTx/>
-                <a:latin typeface="Noto Sans CJK KR"/>
-              </a:rPr>
-              <a:t>이 이 </a:t>
-            </a:r>
-            <a:r>
-              <a:rPr lang="en-US" sz="2000" b="0" u="none" strike="noStrike">
-                <a:solidFill>
-                  <a:srgbClr val="000000"/>
-                </a:solidFill>
-                <a:effectLst/>
-                <a:uFillTx/>
-                <a:latin typeface="Noto Sans CJK KR"/>
-              </a:rPr>
-              <a:t>notes</a:t>
-            </a:r>
-            <a:r>
-              <a:rPr lang="ko-KR" sz="2000" b="0" u="none" strike="noStrike">
-                <a:solidFill>
-                  <a:srgbClr val="000000"/>
-                </a:solidFill>
-                <a:effectLst/>
-                <a:uFillTx/>
-                <a:latin typeface="Noto Sans CJK KR"/>
-              </a:rPr>
-              <a:t>를 대체한다</a:t>
-            </a:r>
-            <a:r>
-              <a:rPr lang="en-US" sz="2000" b="0" u="none" strike="noStrike">
-                <a:solidFill>
-                  <a:srgbClr val="000000"/>
-                </a:solidFill>
-                <a:effectLst/>
-                <a:uFillTx/>
-                <a:latin typeface="Noto Sans CJK KR"/>
-              </a:rPr>
-              <a:t>.</a:t>
-            </a:r>
-            <a:endParaRPr lang="en-US" sz="2000" b="0" u="none" strike="noStrike">
-              <a:solidFill>
-                <a:srgbClr val="000000"/>
-              </a:solidFill>
-              <a:effectLst/>
-              <a:uFillTx/>
-              <a:latin typeface="Noto Sans CJK KR"/>
-            </a:endParaRPr>
+          <a:p/>
+          <a:p>
+            <a:r>
+              <a:t>먼저 Pod 권한입니다. EKS에서 흔한 실수가 노드 전체에 권한을 몰아주는 건데요.</a:t>
+            </a:r>
+          </a:p>
+          <a:p>
+            <a:r>
+              <a:t>그러면 그 노드 Pod가 전부 같은 권한을 갖습니다.</a:t>
+            </a:r>
+          </a:p>
+          <a:p>
+            <a:r>
+              <a:t>저희는 IRSA로 서비스 어카운트를 IAM OIDC에 연결해 Pod 단위로 역할을 붙였습니다.</a:t>
+            </a:r>
+          </a:p>
+          <a:p>
+            <a:r>
+              <a:t>employee-service와 hr-service가 쓰는 권한이 다릅니다.</a:t>
+            </a:r>
+          </a:p>
+          <a:p>
+            <a:r>
+              <a:t>Aurora나 Secrets Manager를 부를 때는 STS가 짧게 사는 임시 토큰을 내줍니다.</a:t>
+            </a:r>
+          </a:p>
+          <a:p>
+            <a:r>
+              <a:t>이미지에 키를 넣을 일이 없습니다.</a:t>
+            </a:r>
           </a:p>
         </p:txBody>
       </p:sp>
@@ -4187,70 +2057,7 @@
               </a:tabLst>
             </a:pPr>
             <a:r>
-              <a:rPr lang="en-US" sz="2000" b="0" u="none" strike="noStrike">
-                <a:solidFill>
-                  <a:srgbClr val="000000"/>
-                </a:solidFill>
-                <a:effectLst/>
-                <a:uFillTx/>
-                <a:latin typeface="Noto Sans CJK KR"/>
-              </a:rPr>
-              <a:t>[14/22 · 00:45] </a:t>
-            </a:r>
-            <a:r>
-              <a:rPr lang="ko-KR" sz="2000" b="0" u="none" strike="noStrike">
-                <a:solidFill>
-                  <a:srgbClr val="000000"/>
-                </a:solidFill>
-                <a:effectLst/>
-                <a:uFillTx/>
-                <a:latin typeface="Noto Sans CJK KR"/>
-              </a:rPr>
-              <a:t>관측</a:t>
-            </a:r>
-            <a:r>
-              <a:rPr lang="en-US" sz="2000" b="0" u="none" strike="noStrike">
-                <a:solidFill>
-                  <a:srgbClr val="000000"/>
-                </a:solidFill>
-                <a:effectLst/>
-                <a:uFillTx/>
-                <a:latin typeface="Noto Sans CJK KR"/>
-              </a:rPr>
-              <a:t>·</a:t>
-            </a:r>
-            <a:r>
-              <a:rPr lang="ko-KR" sz="2000" b="0" u="none" strike="noStrike">
-                <a:solidFill>
-                  <a:srgbClr val="000000"/>
-                </a:solidFill>
-                <a:effectLst/>
-                <a:uFillTx/>
-                <a:latin typeface="Noto Sans CJK KR"/>
-              </a:rPr>
-              <a:t>탐지</a:t>
-            </a:r>
-            <a:r>
-              <a:rPr lang="en-US" sz="2000" b="0" u="none" strike="noStrike">
-                <a:solidFill>
-                  <a:srgbClr val="000000"/>
-                </a:solidFill>
-                <a:effectLst/>
-                <a:uFillTx/>
-                <a:latin typeface="Noto Sans CJK KR"/>
-              </a:rPr>
-              <a:t>·</a:t>
-            </a:r>
-            <a:r>
-              <a:rPr lang="ko-KR" sz="2000" b="0" u="none" strike="noStrike">
-                <a:solidFill>
-                  <a:srgbClr val="000000"/>
-                </a:solidFill>
-                <a:effectLst/>
-                <a:uFillTx/>
-                <a:latin typeface="Noto Sans CJK KR"/>
-              </a:rPr>
-              <a:t>사람 승인</a:t>
+              <a:t>[18/23 · 0:43] CIEM</a:t>
             </a:r>
             <a:endParaRPr lang="en-US" sz="2000" b="0" u="none" strike="noStrike">
               <a:solidFill>
@@ -4261,391 +2068,37 @@
               <a:latin typeface="Noto Sans CJK KR"/>
             </a:endParaRPr>
           </a:p>
-          <a:p>
-            <a:pPr indent="0" algn="l">
-              <a:lnSpc>
-                <a:spcPct val="100000"/>
-              </a:lnSpc>
-              <a:buNone/>
-              <a:tabLst>
-                <a:tab pos="0" algn="l"/>
-              </a:tabLst>
-            </a:pPr>
-            <a:endParaRPr lang="en-US" sz="2000" b="0" u="none" strike="noStrike">
-              <a:solidFill>
-                <a:srgbClr val="000000"/>
-              </a:solidFill>
-              <a:effectLst/>
-              <a:uFillTx/>
-              <a:latin typeface="Noto Sans CJK KR"/>
-            </a:endParaRPr>
-          </a:p>
-          <a:p>
-            <a:pPr indent="0" algn="l">
-              <a:lnSpc>
-                <a:spcPct val="100000"/>
-              </a:lnSpc>
-              <a:buNone/>
-              <a:tabLst>
-                <a:tab pos="0" algn="l"/>
-              </a:tabLst>
-            </a:pPr>
-            <a:r>
-              <a:rPr lang="en-US" sz="2000" b="0" u="none" strike="noStrike">
-                <a:solidFill>
-                  <a:srgbClr val="000000"/>
-                </a:solidFill>
-                <a:effectLst/>
-                <a:uFillTx/>
-                <a:latin typeface="Noto Sans CJK KR"/>
-              </a:rPr>
-              <a:t>PURPOSE: </a:t>
-            </a:r>
-            <a:r>
-              <a:rPr lang="ko-KR" sz="2000" b="0" u="none" strike="noStrike">
-                <a:solidFill>
-                  <a:srgbClr val="000000"/>
-                </a:solidFill>
-                <a:effectLst/>
-                <a:uFillTx/>
-                <a:latin typeface="Noto Sans CJK KR"/>
-              </a:rPr>
-              <a:t>경보가 사람의 판단으로 이어지는 경로를 보여준다</a:t>
-            </a:r>
-            <a:r>
-              <a:rPr lang="en-US" sz="2000" b="0" u="none" strike="noStrike">
-                <a:solidFill>
-                  <a:srgbClr val="000000"/>
-                </a:solidFill>
-                <a:effectLst/>
-                <a:uFillTx/>
-                <a:latin typeface="Noto Sans CJK KR"/>
-              </a:rPr>
-              <a:t>.</a:t>
-            </a:r>
-            <a:endParaRPr lang="en-US" sz="2000" b="0" u="none" strike="noStrike">
-              <a:solidFill>
-                <a:srgbClr val="000000"/>
-              </a:solidFill>
-              <a:effectLst/>
-              <a:uFillTx/>
-              <a:latin typeface="Noto Sans CJK KR"/>
-            </a:endParaRPr>
-          </a:p>
-          <a:p>
-            <a:pPr indent="0" algn="l">
-              <a:lnSpc>
-                <a:spcPct val="100000"/>
-              </a:lnSpc>
-              <a:buNone/>
-              <a:tabLst>
-                <a:tab pos="0" algn="l"/>
-              </a:tabLst>
-            </a:pPr>
-            <a:r>
-              <a:rPr lang="en-US" sz="2000" b="0" u="none" strike="noStrike">
-                <a:solidFill>
-                  <a:srgbClr val="000000"/>
-                </a:solidFill>
-                <a:effectLst/>
-                <a:uFillTx/>
-                <a:latin typeface="Noto Sans CJK KR"/>
-              </a:rPr>
-              <a:t>MESSAGE: Suricata</a:t>
-            </a:r>
-            <a:r>
-              <a:rPr lang="ko-KR" sz="2000" b="0" u="none" strike="noStrike">
-                <a:solidFill>
-                  <a:srgbClr val="000000"/>
-                </a:solidFill>
-                <a:effectLst/>
-                <a:uFillTx/>
-                <a:latin typeface="Noto Sans CJK KR"/>
-              </a:rPr>
-              <a:t>는 </a:t>
-            </a:r>
-            <a:r>
-              <a:rPr lang="en-US" sz="2000" b="0" u="none" strike="noStrike">
-                <a:solidFill>
-                  <a:srgbClr val="000000"/>
-                </a:solidFill>
-                <a:effectLst/>
-                <a:uFillTx/>
-                <a:latin typeface="Noto Sans CJK KR"/>
-              </a:rPr>
-              <a:t>alert-only</a:t>
-            </a:r>
-            <a:r>
-              <a:rPr lang="ko-KR" sz="2000" b="0" u="none" strike="noStrike">
-                <a:solidFill>
-                  <a:srgbClr val="000000"/>
-                </a:solidFill>
-                <a:effectLst/>
-                <a:uFillTx/>
-                <a:latin typeface="Noto Sans CJK KR"/>
-              </a:rPr>
-              <a:t>이고 </a:t>
-            </a:r>
-            <a:r>
-              <a:rPr lang="en-US" sz="2000" b="0" u="none" strike="noStrike">
-                <a:solidFill>
-                  <a:srgbClr val="000000"/>
-                </a:solidFill>
-                <a:effectLst/>
-                <a:uFillTx/>
-                <a:latin typeface="Noto Sans CJK KR"/>
-              </a:rPr>
-              <a:t>Shuffle</a:t>
-            </a:r>
-            <a:r>
-              <a:rPr lang="ko-KR" sz="2000" b="0" u="none" strike="noStrike">
-                <a:solidFill>
-                  <a:srgbClr val="000000"/>
-                </a:solidFill>
-                <a:effectLst/>
-                <a:uFillTx/>
-                <a:latin typeface="Noto Sans CJK KR"/>
-              </a:rPr>
-              <a:t>은 </a:t>
-            </a:r>
-            <a:r>
-              <a:rPr lang="en-US" sz="2000" b="0" u="none" strike="noStrike">
-                <a:solidFill>
-                  <a:srgbClr val="000000"/>
-                </a:solidFill>
-                <a:effectLst/>
-                <a:uFillTx/>
-                <a:latin typeface="Noto Sans CJK KR"/>
-              </a:rPr>
-              <a:t>read-only </a:t>
-            </a:r>
-            <a:r>
-              <a:rPr lang="ko-KR" sz="2000" b="0" u="none" strike="noStrike">
-                <a:solidFill>
-                  <a:srgbClr val="000000"/>
-                </a:solidFill>
-                <a:effectLst/>
-                <a:uFillTx/>
-                <a:latin typeface="Noto Sans CJK KR"/>
-              </a:rPr>
-              <a:t>보강까지다</a:t>
-            </a:r>
-            <a:r>
-              <a:rPr lang="en-US" sz="2000" b="0" u="none" strike="noStrike">
-                <a:solidFill>
-                  <a:srgbClr val="000000"/>
-                </a:solidFill>
-                <a:effectLst/>
-                <a:uFillTx/>
-                <a:latin typeface="Noto Sans CJK KR"/>
-              </a:rPr>
-              <a:t>. </a:t>
-            </a:r>
-            <a:r>
-              <a:rPr lang="ko-KR" sz="2000" b="0" u="none" strike="noStrike">
-                <a:solidFill>
-                  <a:srgbClr val="000000"/>
-                </a:solidFill>
-                <a:effectLst/>
-                <a:uFillTx/>
-                <a:latin typeface="Noto Sans CJK KR"/>
-              </a:rPr>
-              <a:t>차단과 대응은 사람이 결정한다</a:t>
-            </a:r>
-            <a:r>
-              <a:rPr lang="en-US" sz="2000" b="0" u="none" strike="noStrike">
-                <a:solidFill>
-                  <a:srgbClr val="000000"/>
-                </a:solidFill>
-                <a:effectLst/>
-                <a:uFillTx/>
-                <a:latin typeface="Noto Sans CJK KR"/>
-              </a:rPr>
-              <a:t>.</a:t>
-            </a:r>
-            <a:endParaRPr lang="en-US" sz="2000" b="0" u="none" strike="noStrike">
-              <a:solidFill>
-                <a:srgbClr val="000000"/>
-              </a:solidFill>
-              <a:effectLst/>
-              <a:uFillTx/>
-              <a:latin typeface="Noto Sans CJK KR"/>
-            </a:endParaRPr>
-          </a:p>
-          <a:p>
-            <a:pPr indent="0" algn="l">
-              <a:lnSpc>
-                <a:spcPct val="100000"/>
-              </a:lnSpc>
-              <a:buNone/>
-              <a:tabLst>
-                <a:tab pos="0" algn="l"/>
-              </a:tabLst>
-            </a:pPr>
-            <a:r>
-              <a:rPr lang="en-US" sz="2000" b="0" u="none" strike="noStrike">
-                <a:solidFill>
-                  <a:srgbClr val="000000"/>
-                </a:solidFill>
-                <a:effectLst/>
-                <a:uFillTx/>
-                <a:latin typeface="Noto Sans CJK KR"/>
-              </a:rPr>
-              <a:t>ASSET: native </a:t>
-            </a:r>
-            <a:r>
-              <a:rPr lang="ko-KR" sz="2000" b="0" u="none" strike="noStrike">
-                <a:solidFill>
-                  <a:srgbClr val="000000"/>
-                </a:solidFill>
-                <a:effectLst/>
-                <a:uFillTx/>
-                <a:latin typeface="Noto Sans CJK KR"/>
-              </a:rPr>
-              <a:t>도형</a:t>
-            </a:r>
-            <a:endParaRPr lang="en-US" sz="2000" b="0" u="none" strike="noStrike">
-              <a:solidFill>
-                <a:srgbClr val="000000"/>
-              </a:solidFill>
-              <a:effectLst/>
-              <a:uFillTx/>
-              <a:latin typeface="Noto Sans CJK KR"/>
-            </a:endParaRPr>
-          </a:p>
-          <a:p>
-            <a:pPr indent="0" algn="l">
-              <a:lnSpc>
-                <a:spcPct val="100000"/>
-              </a:lnSpc>
-              <a:buNone/>
-              <a:tabLst>
-                <a:tab pos="0" algn="l"/>
-              </a:tabLst>
-            </a:pPr>
-            <a:r>
-              <a:rPr lang="en-US" sz="2000" b="0" u="none" strike="noStrike">
-                <a:solidFill>
-                  <a:srgbClr val="000000"/>
-                </a:solidFill>
-                <a:effectLst/>
-                <a:uFillTx/>
-                <a:latin typeface="Noto Sans CJK KR"/>
-              </a:rPr>
-              <a:t>EVIDENCE: NIDS-01 · FALCO-01 · WAZUH-01 · SOAR-01 · OBS-01 · LOKI-01</a:t>
-            </a:r>
-            <a:endParaRPr lang="en-US" sz="2000" b="0" u="none" strike="noStrike">
-              <a:solidFill>
-                <a:srgbClr val="000000"/>
-              </a:solidFill>
-              <a:effectLst/>
-              <a:uFillTx/>
-              <a:latin typeface="Noto Sans CJK KR"/>
-            </a:endParaRPr>
-          </a:p>
-          <a:p>
-            <a:pPr indent="0" algn="l">
-              <a:lnSpc>
-                <a:spcPct val="100000"/>
-              </a:lnSpc>
-              <a:buNone/>
-              <a:tabLst>
-                <a:tab pos="0" algn="l"/>
-              </a:tabLst>
-            </a:pPr>
-            <a:endParaRPr lang="en-US" sz="2000" b="0" u="none" strike="noStrike">
-              <a:solidFill>
-                <a:srgbClr val="000000"/>
-              </a:solidFill>
-              <a:effectLst/>
-              <a:uFillTx/>
-              <a:latin typeface="Noto Sans CJK KR"/>
-            </a:endParaRPr>
-          </a:p>
-          <a:p>
-            <a:pPr indent="0" algn="l">
-              <a:lnSpc>
-                <a:spcPct val="100000"/>
-              </a:lnSpc>
-              <a:buNone/>
-              <a:tabLst>
-                <a:tab pos="0" algn="l"/>
-              </a:tabLst>
-            </a:pPr>
-            <a:r>
-              <a:rPr lang="en-US" sz="2000" b="0" u="none" strike="noStrike">
-                <a:solidFill>
-                  <a:srgbClr val="000000"/>
-                </a:solidFill>
-                <a:effectLst/>
-                <a:uFillTx/>
-                <a:latin typeface="Noto Sans CJK KR"/>
-              </a:rPr>
-              <a:t>※ 발표 대본은 </a:t>
-            </a:r>
-            <a:r>
-              <a:rPr lang="en-US" sz="2000" b="0" u="none" strike="noStrike">
-                <a:solidFill>
-                  <a:srgbClr val="000000"/>
-                </a:solidFill>
-                <a:effectLst/>
-                <a:uFillTx/>
-                <a:latin typeface="Noto Sans CJK KR"/>
-              </a:rPr>
-              <a:t>PRESENT-SCRIPT-01</a:t>
-            </a:r>
-            <a:r>
-              <a:rPr lang="ko-KR" sz="2000" b="0" u="none" strike="noStrike">
-                <a:solidFill>
-                  <a:srgbClr val="000000"/>
-                </a:solidFill>
-                <a:effectLst/>
-                <a:uFillTx/>
-                <a:latin typeface="Noto Sans CJK KR"/>
-              </a:rPr>
-              <a:t>이 이 </a:t>
-            </a:r>
-            <a:r>
-              <a:rPr lang="en-US" sz="2000" b="0" u="none" strike="noStrike">
-                <a:solidFill>
-                  <a:srgbClr val="000000"/>
-                </a:solidFill>
-                <a:effectLst/>
-                <a:uFillTx/>
-                <a:latin typeface="Noto Sans CJK KR"/>
-              </a:rPr>
-              <a:t>notes</a:t>
-            </a:r>
-            <a:r>
-              <a:rPr lang="ko-KR" sz="2000" b="0" u="none" strike="noStrike">
-                <a:solidFill>
-                  <a:srgbClr val="000000"/>
-                </a:solidFill>
-                <a:effectLst/>
-                <a:uFillTx/>
-                <a:latin typeface="Noto Sans CJK KR"/>
-              </a:rPr>
-              <a:t>를 대체한다</a:t>
-            </a:r>
-            <a:r>
-              <a:rPr lang="en-US" sz="2000" b="0" u="none" strike="noStrike">
-                <a:solidFill>
-                  <a:srgbClr val="000000"/>
-                </a:solidFill>
-                <a:effectLst/>
-                <a:uFillTx/>
-                <a:latin typeface="Noto Sans CJK KR"/>
-              </a:rPr>
-              <a:t>.</a:t>
-            </a:r>
-            <a:endParaRPr lang="en-US" sz="2000" b="0" u="none" strike="noStrike">
-              <a:solidFill>
-                <a:srgbClr val="000000"/>
-              </a:solidFill>
-              <a:effectLst/>
-              <a:uFillTx/>
-              <a:latin typeface="Noto Sans CJK KR"/>
-            </a:endParaRPr>
+          <a:p/>
+          <a:p>
+            <a:r>
+              <a:t>다음은 권한 관리입니다. 권한은 처음에 잘 줘도 시간이 지나면 늘어납니다.</a:t>
+            </a:r>
+          </a:p>
+          <a:p>
+            <a:r>
+              <a:t>IAM Access Analyzer가 CloudTrail 로그를 분석해 일정 기간 안 쓴 권한을 찾아 지웁니다.</a:t>
+            </a:r>
+          </a:p>
+          <a:p>
+            <a:r>
+              <a:t>반대로 EventBridge가 로그를 실시간으로 보다가 핵심 권한을 건드리는 시도가 잡히면</a:t>
+            </a:r>
+          </a:p>
+          <a:p>
+            <a:r>
+              <a:t>Lambda가 바로 끊고 Slack으로 알립니다.</a:t>
+            </a:r>
+          </a:p>
+          <a:p>
+            <a:r>
+              <a:t>온프레미스 탐지는 사람 승인 앞에서 멈추는데, CIEM만 권한 변조라는 좁은 조건에서 자동으로 끊게 뒀습니다.</a:t>
+            </a:r>
+          </a:p>
+          <a:p/>
+          <a:p>
+            <a:r>
+              <a:t>※ 질문이 들어오면 온프레미스 탐지는 사람 승인, AWS 권한 변조만 자동 차단이라고 답한다.</a:t>
+            </a:r>
           </a:p>
         </p:txBody>
       </p:sp>
@@ -4812,70 +2265,7 @@
               </a:tabLst>
             </a:pPr>
             <a:r>
-              <a:rPr lang="en-US" sz="2000" b="0" u="none" strike="noStrike">
-                <a:solidFill>
-                  <a:srgbClr val="000000"/>
-                </a:solidFill>
-                <a:effectLst/>
-                <a:uFillTx/>
-                <a:latin typeface="Noto Sans CJK KR"/>
-              </a:rPr>
-              <a:t>[14/22 · 00:45] </a:t>
-            </a:r>
-            <a:r>
-              <a:rPr lang="ko-KR" sz="2000" b="0" u="none" strike="noStrike">
-                <a:solidFill>
-                  <a:srgbClr val="000000"/>
-                </a:solidFill>
-                <a:effectLst/>
-                <a:uFillTx/>
-                <a:latin typeface="Noto Sans CJK KR"/>
-              </a:rPr>
-              <a:t>관측</a:t>
-            </a:r>
-            <a:r>
-              <a:rPr lang="en-US" sz="2000" b="0" u="none" strike="noStrike">
-                <a:solidFill>
-                  <a:srgbClr val="000000"/>
-                </a:solidFill>
-                <a:effectLst/>
-                <a:uFillTx/>
-                <a:latin typeface="Noto Sans CJK KR"/>
-              </a:rPr>
-              <a:t>·</a:t>
-            </a:r>
-            <a:r>
-              <a:rPr lang="ko-KR" sz="2000" b="0" u="none" strike="noStrike">
-                <a:solidFill>
-                  <a:srgbClr val="000000"/>
-                </a:solidFill>
-                <a:effectLst/>
-                <a:uFillTx/>
-                <a:latin typeface="Noto Sans CJK KR"/>
-              </a:rPr>
-              <a:t>탐지</a:t>
-            </a:r>
-            <a:r>
-              <a:rPr lang="en-US" sz="2000" b="0" u="none" strike="noStrike">
-                <a:solidFill>
-                  <a:srgbClr val="000000"/>
-                </a:solidFill>
-                <a:effectLst/>
-                <a:uFillTx/>
-                <a:latin typeface="Noto Sans CJK KR"/>
-              </a:rPr>
-              <a:t>·</a:t>
-            </a:r>
-            <a:r>
-              <a:rPr lang="ko-KR" sz="2000" b="0" u="none" strike="noStrike">
-                <a:solidFill>
-                  <a:srgbClr val="000000"/>
-                </a:solidFill>
-                <a:effectLst/>
-                <a:uFillTx/>
-                <a:latin typeface="Noto Sans CJK KR"/>
-              </a:rPr>
-              <a:t>사람 승인</a:t>
+              <a:t>[19/23 · 0:40] CSPM</a:t>
             </a:r>
             <a:endParaRPr lang="en-US" sz="2000" b="0" u="none" strike="noStrike">
               <a:solidFill>
@@ -4886,391 +2276,37 @@
               <a:latin typeface="Noto Sans CJK KR"/>
             </a:endParaRPr>
           </a:p>
-          <a:p>
-            <a:pPr indent="0" algn="l">
-              <a:lnSpc>
-                <a:spcPct val="100000"/>
-              </a:lnSpc>
-              <a:buNone/>
-              <a:tabLst>
-                <a:tab pos="0" algn="l"/>
-              </a:tabLst>
-            </a:pPr>
-            <a:endParaRPr lang="en-US" sz="2000" b="0" u="none" strike="noStrike">
-              <a:solidFill>
-                <a:srgbClr val="000000"/>
-              </a:solidFill>
-              <a:effectLst/>
-              <a:uFillTx/>
-              <a:latin typeface="Noto Sans CJK KR"/>
-            </a:endParaRPr>
-          </a:p>
-          <a:p>
-            <a:pPr indent="0" algn="l">
-              <a:lnSpc>
-                <a:spcPct val="100000"/>
-              </a:lnSpc>
-              <a:buNone/>
-              <a:tabLst>
-                <a:tab pos="0" algn="l"/>
-              </a:tabLst>
-            </a:pPr>
-            <a:r>
-              <a:rPr lang="en-US" sz="2000" b="0" u="none" strike="noStrike">
-                <a:solidFill>
-                  <a:srgbClr val="000000"/>
-                </a:solidFill>
-                <a:effectLst/>
-                <a:uFillTx/>
-                <a:latin typeface="Noto Sans CJK KR"/>
-              </a:rPr>
-              <a:t>PURPOSE: </a:t>
-            </a:r>
-            <a:r>
-              <a:rPr lang="ko-KR" sz="2000" b="0" u="none" strike="noStrike">
-                <a:solidFill>
-                  <a:srgbClr val="000000"/>
-                </a:solidFill>
-                <a:effectLst/>
-                <a:uFillTx/>
-                <a:latin typeface="Noto Sans CJK KR"/>
-              </a:rPr>
-              <a:t>경보가 사람의 판단으로 이어지는 경로를 보여준다</a:t>
-            </a:r>
-            <a:r>
-              <a:rPr lang="en-US" sz="2000" b="0" u="none" strike="noStrike">
-                <a:solidFill>
-                  <a:srgbClr val="000000"/>
-                </a:solidFill>
-                <a:effectLst/>
-                <a:uFillTx/>
-                <a:latin typeface="Noto Sans CJK KR"/>
-              </a:rPr>
-              <a:t>.</a:t>
-            </a:r>
-            <a:endParaRPr lang="en-US" sz="2000" b="0" u="none" strike="noStrike">
-              <a:solidFill>
-                <a:srgbClr val="000000"/>
-              </a:solidFill>
-              <a:effectLst/>
-              <a:uFillTx/>
-              <a:latin typeface="Noto Sans CJK KR"/>
-            </a:endParaRPr>
-          </a:p>
-          <a:p>
-            <a:pPr indent="0" algn="l">
-              <a:lnSpc>
-                <a:spcPct val="100000"/>
-              </a:lnSpc>
-              <a:buNone/>
-              <a:tabLst>
-                <a:tab pos="0" algn="l"/>
-              </a:tabLst>
-            </a:pPr>
-            <a:r>
-              <a:rPr lang="en-US" sz="2000" b="0" u="none" strike="noStrike">
-                <a:solidFill>
-                  <a:srgbClr val="000000"/>
-                </a:solidFill>
-                <a:effectLst/>
-                <a:uFillTx/>
-                <a:latin typeface="Noto Sans CJK KR"/>
-              </a:rPr>
-              <a:t>MESSAGE: Suricata</a:t>
-            </a:r>
-            <a:r>
-              <a:rPr lang="ko-KR" sz="2000" b="0" u="none" strike="noStrike">
-                <a:solidFill>
-                  <a:srgbClr val="000000"/>
-                </a:solidFill>
-                <a:effectLst/>
-                <a:uFillTx/>
-                <a:latin typeface="Noto Sans CJK KR"/>
-              </a:rPr>
-              <a:t>는 </a:t>
-            </a:r>
-            <a:r>
-              <a:rPr lang="en-US" sz="2000" b="0" u="none" strike="noStrike">
-                <a:solidFill>
-                  <a:srgbClr val="000000"/>
-                </a:solidFill>
-                <a:effectLst/>
-                <a:uFillTx/>
-                <a:latin typeface="Noto Sans CJK KR"/>
-              </a:rPr>
-              <a:t>alert-only</a:t>
-            </a:r>
-            <a:r>
-              <a:rPr lang="ko-KR" sz="2000" b="0" u="none" strike="noStrike">
-                <a:solidFill>
-                  <a:srgbClr val="000000"/>
-                </a:solidFill>
-                <a:effectLst/>
-                <a:uFillTx/>
-                <a:latin typeface="Noto Sans CJK KR"/>
-              </a:rPr>
-              <a:t>이고 </a:t>
-            </a:r>
-            <a:r>
-              <a:rPr lang="en-US" sz="2000" b="0" u="none" strike="noStrike">
-                <a:solidFill>
-                  <a:srgbClr val="000000"/>
-                </a:solidFill>
-                <a:effectLst/>
-                <a:uFillTx/>
-                <a:latin typeface="Noto Sans CJK KR"/>
-              </a:rPr>
-              <a:t>Shuffle</a:t>
-            </a:r>
-            <a:r>
-              <a:rPr lang="ko-KR" sz="2000" b="0" u="none" strike="noStrike">
-                <a:solidFill>
-                  <a:srgbClr val="000000"/>
-                </a:solidFill>
-                <a:effectLst/>
-                <a:uFillTx/>
-                <a:latin typeface="Noto Sans CJK KR"/>
-              </a:rPr>
-              <a:t>은 </a:t>
-            </a:r>
-            <a:r>
-              <a:rPr lang="en-US" sz="2000" b="0" u="none" strike="noStrike">
-                <a:solidFill>
-                  <a:srgbClr val="000000"/>
-                </a:solidFill>
-                <a:effectLst/>
-                <a:uFillTx/>
-                <a:latin typeface="Noto Sans CJK KR"/>
-              </a:rPr>
-              <a:t>read-only </a:t>
-            </a:r>
-            <a:r>
-              <a:rPr lang="ko-KR" sz="2000" b="0" u="none" strike="noStrike">
-                <a:solidFill>
-                  <a:srgbClr val="000000"/>
-                </a:solidFill>
-                <a:effectLst/>
-                <a:uFillTx/>
-                <a:latin typeface="Noto Sans CJK KR"/>
-              </a:rPr>
-              <a:t>보강까지다</a:t>
-            </a:r>
-            <a:r>
-              <a:rPr lang="en-US" sz="2000" b="0" u="none" strike="noStrike">
-                <a:solidFill>
-                  <a:srgbClr val="000000"/>
-                </a:solidFill>
-                <a:effectLst/>
-                <a:uFillTx/>
-                <a:latin typeface="Noto Sans CJK KR"/>
-              </a:rPr>
-              <a:t>. </a:t>
-            </a:r>
-            <a:r>
-              <a:rPr lang="ko-KR" sz="2000" b="0" u="none" strike="noStrike">
-                <a:solidFill>
-                  <a:srgbClr val="000000"/>
-                </a:solidFill>
-                <a:effectLst/>
-                <a:uFillTx/>
-                <a:latin typeface="Noto Sans CJK KR"/>
-              </a:rPr>
-              <a:t>차단과 대응은 사람이 결정한다</a:t>
-            </a:r>
-            <a:r>
-              <a:rPr lang="en-US" sz="2000" b="0" u="none" strike="noStrike">
-                <a:solidFill>
-                  <a:srgbClr val="000000"/>
-                </a:solidFill>
-                <a:effectLst/>
-                <a:uFillTx/>
-                <a:latin typeface="Noto Sans CJK KR"/>
-              </a:rPr>
-              <a:t>.</a:t>
-            </a:r>
-            <a:endParaRPr lang="en-US" sz="2000" b="0" u="none" strike="noStrike">
-              <a:solidFill>
-                <a:srgbClr val="000000"/>
-              </a:solidFill>
-              <a:effectLst/>
-              <a:uFillTx/>
-              <a:latin typeface="Noto Sans CJK KR"/>
-            </a:endParaRPr>
-          </a:p>
-          <a:p>
-            <a:pPr indent="0" algn="l">
-              <a:lnSpc>
-                <a:spcPct val="100000"/>
-              </a:lnSpc>
-              <a:buNone/>
-              <a:tabLst>
-                <a:tab pos="0" algn="l"/>
-              </a:tabLst>
-            </a:pPr>
-            <a:r>
-              <a:rPr lang="en-US" sz="2000" b="0" u="none" strike="noStrike">
-                <a:solidFill>
-                  <a:srgbClr val="000000"/>
-                </a:solidFill>
-                <a:effectLst/>
-                <a:uFillTx/>
-                <a:latin typeface="Noto Sans CJK KR"/>
-              </a:rPr>
-              <a:t>ASSET: native </a:t>
-            </a:r>
-            <a:r>
-              <a:rPr lang="ko-KR" sz="2000" b="0" u="none" strike="noStrike">
-                <a:solidFill>
-                  <a:srgbClr val="000000"/>
-                </a:solidFill>
-                <a:effectLst/>
-                <a:uFillTx/>
-                <a:latin typeface="Noto Sans CJK KR"/>
-              </a:rPr>
-              <a:t>도형</a:t>
-            </a:r>
-            <a:endParaRPr lang="en-US" sz="2000" b="0" u="none" strike="noStrike">
-              <a:solidFill>
-                <a:srgbClr val="000000"/>
-              </a:solidFill>
-              <a:effectLst/>
-              <a:uFillTx/>
-              <a:latin typeface="Noto Sans CJK KR"/>
-            </a:endParaRPr>
-          </a:p>
-          <a:p>
-            <a:pPr indent="0" algn="l">
-              <a:lnSpc>
-                <a:spcPct val="100000"/>
-              </a:lnSpc>
-              <a:buNone/>
-              <a:tabLst>
-                <a:tab pos="0" algn="l"/>
-              </a:tabLst>
-            </a:pPr>
-            <a:r>
-              <a:rPr lang="en-US" sz="2000" b="0" u="none" strike="noStrike">
-                <a:solidFill>
-                  <a:srgbClr val="000000"/>
-                </a:solidFill>
-                <a:effectLst/>
-                <a:uFillTx/>
-                <a:latin typeface="Noto Sans CJK KR"/>
-              </a:rPr>
-              <a:t>EVIDENCE: NIDS-01 · FALCO-01 · WAZUH-01 · SOAR-01 · OBS-01 · LOKI-01</a:t>
-            </a:r>
-            <a:endParaRPr lang="en-US" sz="2000" b="0" u="none" strike="noStrike">
-              <a:solidFill>
-                <a:srgbClr val="000000"/>
-              </a:solidFill>
-              <a:effectLst/>
-              <a:uFillTx/>
-              <a:latin typeface="Noto Sans CJK KR"/>
-            </a:endParaRPr>
-          </a:p>
-          <a:p>
-            <a:pPr indent="0" algn="l">
-              <a:lnSpc>
-                <a:spcPct val="100000"/>
-              </a:lnSpc>
-              <a:buNone/>
-              <a:tabLst>
-                <a:tab pos="0" algn="l"/>
-              </a:tabLst>
-            </a:pPr>
-            <a:endParaRPr lang="en-US" sz="2000" b="0" u="none" strike="noStrike">
-              <a:solidFill>
-                <a:srgbClr val="000000"/>
-              </a:solidFill>
-              <a:effectLst/>
-              <a:uFillTx/>
-              <a:latin typeface="Noto Sans CJK KR"/>
-            </a:endParaRPr>
-          </a:p>
-          <a:p>
-            <a:pPr indent="0" algn="l">
-              <a:lnSpc>
-                <a:spcPct val="100000"/>
-              </a:lnSpc>
-              <a:buNone/>
-              <a:tabLst>
-                <a:tab pos="0" algn="l"/>
-              </a:tabLst>
-            </a:pPr>
-            <a:r>
-              <a:rPr lang="en-US" sz="2000" b="0" u="none" strike="noStrike">
-                <a:solidFill>
-                  <a:srgbClr val="000000"/>
-                </a:solidFill>
-                <a:effectLst/>
-                <a:uFillTx/>
-                <a:latin typeface="Noto Sans CJK KR"/>
-              </a:rPr>
-              <a:t>※ 발표 대본은 </a:t>
-            </a:r>
-            <a:r>
-              <a:rPr lang="en-US" sz="2000" b="0" u="none" strike="noStrike">
-                <a:solidFill>
-                  <a:srgbClr val="000000"/>
-                </a:solidFill>
-                <a:effectLst/>
-                <a:uFillTx/>
-                <a:latin typeface="Noto Sans CJK KR"/>
-              </a:rPr>
-              <a:t>PRESENT-SCRIPT-01</a:t>
-            </a:r>
-            <a:r>
-              <a:rPr lang="ko-KR" sz="2000" b="0" u="none" strike="noStrike">
-                <a:solidFill>
-                  <a:srgbClr val="000000"/>
-                </a:solidFill>
-                <a:effectLst/>
-                <a:uFillTx/>
-                <a:latin typeface="Noto Sans CJK KR"/>
-              </a:rPr>
-              <a:t>이 이 </a:t>
-            </a:r>
-            <a:r>
-              <a:rPr lang="en-US" sz="2000" b="0" u="none" strike="noStrike">
-                <a:solidFill>
-                  <a:srgbClr val="000000"/>
-                </a:solidFill>
-                <a:effectLst/>
-                <a:uFillTx/>
-                <a:latin typeface="Noto Sans CJK KR"/>
-              </a:rPr>
-              <a:t>notes</a:t>
-            </a:r>
-            <a:r>
-              <a:rPr lang="ko-KR" sz="2000" b="0" u="none" strike="noStrike">
-                <a:solidFill>
-                  <a:srgbClr val="000000"/>
-                </a:solidFill>
-                <a:effectLst/>
-                <a:uFillTx/>
-                <a:latin typeface="Noto Sans CJK KR"/>
-              </a:rPr>
-              <a:t>를 대체한다</a:t>
-            </a:r>
-            <a:r>
-              <a:rPr lang="en-US" sz="2000" b="0" u="none" strike="noStrike">
-                <a:solidFill>
-                  <a:srgbClr val="000000"/>
-                </a:solidFill>
-                <a:effectLst/>
-                <a:uFillTx/>
-                <a:latin typeface="Noto Sans CJK KR"/>
-              </a:rPr>
-              <a:t>.</a:t>
-            </a:r>
-            <a:endParaRPr lang="en-US" sz="2000" b="0" u="none" strike="noStrike">
-              <a:solidFill>
-                <a:srgbClr val="000000"/>
-              </a:solidFill>
-              <a:effectLst/>
-              <a:uFillTx/>
-              <a:latin typeface="Noto Sans CJK KR"/>
-            </a:endParaRPr>
+          <a:p/>
+          <a:p>
+            <a:r>
+              <a:t>세 번째는 상시 감사입니다. 콘솔을 매번 볼 수는 없으니까요.</a:t>
+            </a:r>
+          </a:p>
+          <a:p>
+            <a:r>
+              <a:t>Security Hub 보안 표준 점수를 지표로 잡고 계속 고쳐서 92%까지 올렸습니다.</a:t>
+            </a:r>
+          </a:p>
+          <a:p>
+            <a:r>
+              <a:t>Critical과 High는 남기지 않는 게 기준입니다.</a:t>
+            </a:r>
+          </a:p>
+          <a:p>
+            <a:r>
+              <a:t>EC2에 IMDSv2를 강제해 토큰 없이는 자격 증명을 못 꺼내게 했고, S3 버킷에는 MFA Delete를 켰습니다.</a:t>
+            </a:r>
+          </a:p>
+          <a:p>
+            <a:r>
+              <a:t>오른쪽이 실제 알림인데, 리소스 이름과 확인할 쿼리까지 붙어서 Slack으로 옵니다.</a:t>
+            </a:r>
+          </a:p>
+          <a:p/>
+          <a:p>
+            <a:r>
+              <a:t>※ 오른쪽 알림 캡처에 AWS 계정 번호가 보인다. 외부 공개용으로 다시 쓸 때는 가린다.</a:t>
+            </a:r>
           </a:p>
         </p:txBody>
       </p:sp>
@@ -5437,26 +2473,7 @@
               </a:tabLst>
             </a:pPr>
             <a:r>
-              <a:rPr lang="en-US" sz="2000" b="0" u="none" strike="noStrike">
-                <a:solidFill>
-                  <a:srgbClr val="000000"/>
-                </a:solidFill>
-                <a:effectLst/>
-                <a:uFillTx/>
-                <a:latin typeface="Noto Sans CJK KR"/>
-              </a:rPr>
-              <a:t>[2/22 · 00:20] </a:t>
-            </a:r>
-            <a:r>
-              <a:rPr lang="ko-KR" sz="2000" b="0" u="none" strike="noStrike">
-                <a:solidFill>
-                  <a:srgbClr val="000000"/>
-                </a:solidFill>
-                <a:effectLst/>
-                <a:uFillTx/>
-                <a:latin typeface="Noto Sans CJK KR"/>
-              </a:rPr>
-              <a:t>목차</a:t>
+              <a:t>[2/23 · 0:20] 목차</a:t>
             </a:r>
             <a:endParaRPr lang="en-US" sz="2000" b="0" u="none" strike="noStrike">
               <a:solidFill>
@@ -5467,336 +2484,21 @@
               <a:latin typeface="Noto Sans CJK KR"/>
             </a:endParaRPr>
           </a:p>
-          <a:p>
-            <a:pPr indent="0" algn="l">
-              <a:lnSpc>
-                <a:spcPct val="100000"/>
-              </a:lnSpc>
-              <a:buNone/>
-              <a:tabLst>
-                <a:tab pos="0" algn="l"/>
-              </a:tabLst>
-            </a:pPr>
-            <a:endParaRPr lang="en-US" sz="2000" b="0" u="none" strike="noStrike">
-              <a:solidFill>
-                <a:srgbClr val="000000"/>
-              </a:solidFill>
-              <a:effectLst/>
-              <a:uFillTx/>
-              <a:latin typeface="Noto Sans CJK KR"/>
-            </a:endParaRPr>
-          </a:p>
-          <a:p>
-            <a:pPr indent="0" algn="l">
-              <a:lnSpc>
-                <a:spcPct val="100000"/>
-              </a:lnSpc>
-              <a:buNone/>
-              <a:tabLst>
-                <a:tab pos="0" algn="l"/>
-              </a:tabLst>
-            </a:pPr>
-            <a:r>
-              <a:rPr lang="en-US" sz="2000" b="0" u="none" strike="noStrike">
-                <a:solidFill>
-                  <a:srgbClr val="000000"/>
-                </a:solidFill>
-                <a:effectLst/>
-                <a:uFillTx/>
-                <a:latin typeface="Noto Sans CJK KR"/>
-              </a:rPr>
-              <a:t>PURPOSE: 22</a:t>
-            </a:r>
-            <a:r>
-              <a:rPr lang="ko-KR" sz="2000" b="0" u="none" strike="noStrike">
-                <a:solidFill>
-                  <a:srgbClr val="000000"/>
-                </a:solidFill>
-                <a:effectLst/>
-                <a:uFillTx/>
-                <a:latin typeface="Noto Sans CJK KR"/>
-              </a:rPr>
-              <a:t>장의 뼈대를 먼저 보여 청중이 길을 잃지 않게 한다</a:t>
-            </a:r>
-            <a:r>
-              <a:rPr lang="en-US" sz="2000" b="0" u="none" strike="noStrike">
-                <a:solidFill>
-                  <a:srgbClr val="000000"/>
-                </a:solidFill>
-                <a:effectLst/>
-                <a:uFillTx/>
-                <a:latin typeface="Noto Sans CJK KR"/>
-              </a:rPr>
-              <a:t>.</a:t>
-            </a:r>
-            <a:endParaRPr lang="en-US" sz="2000" b="0" u="none" strike="noStrike">
-              <a:solidFill>
-                <a:srgbClr val="000000"/>
-              </a:solidFill>
-              <a:effectLst/>
-              <a:uFillTx/>
-              <a:latin typeface="Noto Sans CJK KR"/>
-            </a:endParaRPr>
-          </a:p>
-          <a:p>
-            <a:pPr indent="0" algn="l">
-              <a:lnSpc>
-                <a:spcPct val="100000"/>
-              </a:lnSpc>
-              <a:buNone/>
-              <a:tabLst>
-                <a:tab pos="0" algn="l"/>
-              </a:tabLst>
-            </a:pPr>
-            <a:r>
-              <a:rPr lang="en-US" sz="2000" b="0" u="none" strike="noStrike">
-                <a:solidFill>
-                  <a:srgbClr val="000000"/>
-                </a:solidFill>
-                <a:effectLst/>
-                <a:uFillTx/>
-                <a:latin typeface="Noto Sans CJK KR"/>
-              </a:rPr>
-              <a:t>MESSAGE: </a:t>
-            </a:r>
-            <a:r>
-              <a:rPr lang="ko-KR" sz="2000" b="0" u="none" strike="noStrike">
-                <a:solidFill>
-                  <a:srgbClr val="000000"/>
-                </a:solidFill>
-                <a:effectLst/>
-                <a:uFillTx/>
-                <a:latin typeface="Noto Sans CJK KR"/>
-              </a:rPr>
-              <a:t>구조 → 통제 → 증거 순으로 간다</a:t>
-            </a:r>
-            <a:r>
-              <a:rPr lang="en-US" sz="2000" b="0" u="none" strike="noStrike">
-                <a:solidFill>
-                  <a:srgbClr val="000000"/>
-                </a:solidFill>
-                <a:effectLst/>
-                <a:uFillTx/>
-                <a:latin typeface="Noto Sans CJK KR"/>
-              </a:rPr>
-              <a:t>.</a:t>
-            </a:r>
-            <a:endParaRPr lang="en-US" sz="2000" b="0" u="none" strike="noStrike">
-              <a:solidFill>
-                <a:srgbClr val="000000"/>
-              </a:solidFill>
-              <a:effectLst/>
-              <a:uFillTx/>
-              <a:latin typeface="Noto Sans CJK KR"/>
-            </a:endParaRPr>
-          </a:p>
-          <a:p>
-            <a:pPr indent="0" algn="l">
-              <a:lnSpc>
-                <a:spcPct val="100000"/>
-              </a:lnSpc>
-              <a:buNone/>
-              <a:tabLst>
-                <a:tab pos="0" algn="l"/>
-              </a:tabLst>
-            </a:pPr>
-            <a:r>
-              <a:rPr lang="en-US" sz="2000" b="0" u="none" strike="noStrike">
-                <a:solidFill>
-                  <a:srgbClr val="000000"/>
-                </a:solidFill>
-                <a:effectLst/>
-                <a:uFillTx/>
-                <a:latin typeface="Noto Sans CJK KR"/>
-              </a:rPr>
-              <a:t>ASSET: native </a:t>
-            </a:r>
-            <a:r>
-              <a:rPr lang="ko-KR" sz="2000" b="0" u="none" strike="noStrike">
-                <a:solidFill>
-                  <a:srgbClr val="000000"/>
-                </a:solidFill>
-                <a:effectLst/>
-                <a:uFillTx/>
-                <a:latin typeface="Noto Sans CJK KR"/>
-              </a:rPr>
-              <a:t>도형</a:t>
-            </a:r>
-            <a:endParaRPr lang="en-US" sz="2000" b="0" u="none" strike="noStrike">
-              <a:solidFill>
-                <a:srgbClr val="000000"/>
-              </a:solidFill>
-              <a:effectLst/>
-              <a:uFillTx/>
-              <a:latin typeface="Noto Sans CJK KR"/>
-            </a:endParaRPr>
-          </a:p>
-          <a:p>
-            <a:pPr indent="0" algn="l">
-              <a:lnSpc>
-                <a:spcPct val="100000"/>
-              </a:lnSpc>
-              <a:buNone/>
-              <a:tabLst>
-                <a:tab pos="0" algn="l"/>
-              </a:tabLst>
-            </a:pPr>
-            <a:r>
-              <a:rPr lang="en-US" sz="2000" b="0" u="none" strike="noStrike">
-                <a:solidFill>
-                  <a:srgbClr val="000000"/>
-                </a:solidFill>
-                <a:effectLst/>
-                <a:uFillTx/>
-                <a:latin typeface="Noto Sans CJK KR"/>
-              </a:rPr>
-              <a:t>EVIDENCE: PRESENT-PLAN-01 </a:t>
-            </a:r>
-            <a:r>
-              <a:rPr lang="ko-KR" sz="2000" b="0" u="none" strike="noStrike">
-                <a:solidFill>
-                  <a:srgbClr val="000000"/>
-                </a:solidFill>
-                <a:effectLst/>
-                <a:uFillTx/>
-                <a:latin typeface="Noto Sans CJK KR"/>
-              </a:rPr>
-              <a:t>확정 </a:t>
-            </a:r>
-            <a:r>
-              <a:rPr lang="en-US" sz="2000" b="0" u="none" strike="noStrike">
-                <a:solidFill>
-                  <a:srgbClr val="000000"/>
-                </a:solidFill>
-                <a:effectLst/>
-                <a:uFillTx/>
-                <a:latin typeface="Noto Sans CJK KR"/>
-              </a:rPr>
-              <a:t>22</a:t>
-            </a:r>
-            <a:r>
-              <a:rPr lang="ko-KR" sz="2000" b="0" u="none" strike="noStrike">
-                <a:solidFill>
-                  <a:srgbClr val="000000"/>
-                </a:solidFill>
-                <a:effectLst/>
-                <a:uFillTx/>
-                <a:latin typeface="Noto Sans CJK KR"/>
-              </a:rPr>
-              <a:t>장 순서</a:t>
-            </a:r>
-            <a:endParaRPr lang="en-US" sz="2000" b="0" u="none" strike="noStrike">
-              <a:solidFill>
-                <a:srgbClr val="000000"/>
-              </a:solidFill>
-              <a:effectLst/>
-              <a:uFillTx/>
-              <a:latin typeface="Noto Sans CJK KR"/>
-            </a:endParaRPr>
-          </a:p>
-          <a:p>
-            <a:pPr indent="0" algn="l">
-              <a:lnSpc>
-                <a:spcPct val="100000"/>
-              </a:lnSpc>
-              <a:buNone/>
-              <a:tabLst>
-                <a:tab pos="0" algn="l"/>
-              </a:tabLst>
-            </a:pPr>
-            <a:endParaRPr lang="en-US" sz="2000" b="0" u="none" strike="noStrike">
-              <a:solidFill>
-                <a:srgbClr val="000000"/>
-              </a:solidFill>
-              <a:effectLst/>
-              <a:uFillTx/>
-              <a:latin typeface="Noto Sans CJK KR"/>
-            </a:endParaRPr>
-          </a:p>
-          <a:p>
-            <a:pPr indent="0" algn="l">
-              <a:lnSpc>
-                <a:spcPct val="100000"/>
-              </a:lnSpc>
-              <a:buNone/>
-              <a:tabLst>
-                <a:tab pos="0" algn="l"/>
-              </a:tabLst>
-            </a:pPr>
-            <a:r>
-              <a:rPr lang="en-US" sz="2000" b="0" u="none" strike="noStrike">
-                <a:solidFill>
-                  <a:srgbClr val="000000"/>
-                </a:solidFill>
-                <a:effectLst/>
-                <a:uFillTx/>
-                <a:latin typeface="Noto Sans CJK KR"/>
-              </a:rPr>
-              <a:t>※ 발표 대본은 </a:t>
-            </a:r>
-            <a:r>
-              <a:rPr lang="en-US" sz="2000" b="0" u="none" strike="noStrike">
-                <a:solidFill>
-                  <a:srgbClr val="000000"/>
-                </a:solidFill>
-                <a:effectLst/>
-                <a:uFillTx/>
-                <a:latin typeface="Noto Sans CJK KR"/>
-              </a:rPr>
-              <a:t>PRESENT-SCRIPT-01</a:t>
-            </a:r>
-            <a:r>
-              <a:rPr lang="ko-KR" sz="2000" b="0" u="none" strike="noStrike">
-                <a:solidFill>
-                  <a:srgbClr val="000000"/>
-                </a:solidFill>
-                <a:effectLst/>
-                <a:uFillTx/>
-                <a:latin typeface="Noto Sans CJK KR"/>
-              </a:rPr>
-              <a:t>이 이 </a:t>
-            </a:r>
-            <a:r>
-              <a:rPr lang="en-US" sz="2000" b="0" u="none" strike="noStrike">
-                <a:solidFill>
-                  <a:srgbClr val="000000"/>
-                </a:solidFill>
-                <a:effectLst/>
-                <a:uFillTx/>
-                <a:latin typeface="Noto Sans CJK KR"/>
-              </a:rPr>
-              <a:t>notes</a:t>
-            </a:r>
-            <a:r>
-              <a:rPr lang="ko-KR" sz="2000" b="0" u="none" strike="noStrike">
-                <a:solidFill>
-                  <a:srgbClr val="000000"/>
-                </a:solidFill>
-                <a:effectLst/>
-                <a:uFillTx/>
-                <a:latin typeface="Noto Sans CJK KR"/>
-              </a:rPr>
-              <a:t>를 대체한다</a:t>
-            </a:r>
-            <a:r>
-              <a:rPr lang="en-US" sz="2000" b="0" u="none" strike="noStrike">
-                <a:solidFill>
-                  <a:srgbClr val="000000"/>
-                </a:solidFill>
-                <a:effectLst/>
-                <a:uFillTx/>
-                <a:latin typeface="Noto Sans CJK KR"/>
-              </a:rPr>
-              <a:t>.</a:t>
-            </a:r>
-            <a:endParaRPr lang="en-US" sz="2000" b="0" u="none" strike="noStrike">
-              <a:solidFill>
-                <a:srgbClr val="000000"/>
-              </a:solidFill>
-              <a:effectLst/>
-              <a:uFillTx/>
-              <a:latin typeface="Noto Sans CJK KR"/>
-            </a:endParaRPr>
+          <a:p/>
+          <a:p>
+            <a:r>
+              <a:t>오늘 순서는 다섯 개입니다.</a:t>
+            </a:r>
+          </a:p>
+          <a:p>
+            <a:r>
+              <a:t>주제를 고른 이유와 팀 구성은 짧게 짚고, 네 번째 수행 결과에 시간을 가장 많이 쓰겠습니다.</a:t>
+            </a:r>
+          </a:p>
+          <a:p>
+            <a:r>
+              <a:t>구조를 먼저 보여드리고 그 위에 접근 통제와 공급망, 모니터링을 얹는 순서로 가겠습니다.</a:t>
+            </a:r>
           </a:p>
         </p:txBody>
       </p:sp>
@@ -5963,70 +2665,7 @@
               </a:tabLst>
             </a:pPr>
             <a:r>
-              <a:rPr lang="en-US" sz="2000" b="0" u="none" strike="noStrike">
-                <a:solidFill>
-                  <a:srgbClr val="000000"/>
-                </a:solidFill>
-                <a:effectLst/>
-                <a:uFillTx/>
-                <a:latin typeface="Noto Sans CJK KR"/>
-              </a:rPr>
-              <a:t>[14/22 · 00:45] </a:t>
-            </a:r>
-            <a:r>
-              <a:rPr lang="ko-KR" sz="2000" b="0" u="none" strike="noStrike">
-                <a:solidFill>
-                  <a:srgbClr val="000000"/>
-                </a:solidFill>
-                <a:effectLst/>
-                <a:uFillTx/>
-                <a:latin typeface="Noto Sans CJK KR"/>
-              </a:rPr>
-              <a:t>관측</a:t>
-            </a:r>
-            <a:r>
-              <a:rPr lang="en-US" sz="2000" b="0" u="none" strike="noStrike">
-                <a:solidFill>
-                  <a:srgbClr val="000000"/>
-                </a:solidFill>
-                <a:effectLst/>
-                <a:uFillTx/>
-                <a:latin typeface="Noto Sans CJK KR"/>
-              </a:rPr>
-              <a:t>·</a:t>
-            </a:r>
-            <a:r>
-              <a:rPr lang="ko-KR" sz="2000" b="0" u="none" strike="noStrike">
-                <a:solidFill>
-                  <a:srgbClr val="000000"/>
-                </a:solidFill>
-                <a:effectLst/>
-                <a:uFillTx/>
-                <a:latin typeface="Noto Sans CJK KR"/>
-              </a:rPr>
-              <a:t>탐지</a:t>
-            </a:r>
-            <a:r>
-              <a:rPr lang="en-US" sz="2000" b="0" u="none" strike="noStrike">
-                <a:solidFill>
-                  <a:srgbClr val="000000"/>
-                </a:solidFill>
-                <a:effectLst/>
-                <a:uFillTx/>
-                <a:latin typeface="Noto Sans CJK KR"/>
-              </a:rPr>
-              <a:t>·</a:t>
-            </a:r>
-            <a:r>
-              <a:rPr lang="ko-KR" sz="2000" b="0" u="none" strike="noStrike">
-                <a:solidFill>
-                  <a:srgbClr val="000000"/>
-                </a:solidFill>
-                <a:effectLst/>
-                <a:uFillTx/>
-                <a:latin typeface="Noto Sans CJK KR"/>
-              </a:rPr>
-              <a:t>사람 승인</a:t>
+              <a:t>[20/23 · 0:39] 운영 모니터링</a:t>
             </a:r>
             <a:endParaRPr lang="en-US" sz="2000" b="0" u="none" strike="noStrike">
               <a:solidFill>
@@ -6037,391 +2676,36 @@
               <a:latin typeface="Noto Sans CJK KR"/>
             </a:endParaRPr>
           </a:p>
-          <a:p>
-            <a:pPr indent="0" algn="l">
-              <a:lnSpc>
-                <a:spcPct val="100000"/>
-              </a:lnSpc>
-              <a:buNone/>
-              <a:tabLst>
-                <a:tab pos="0" algn="l"/>
-              </a:tabLst>
-            </a:pPr>
-            <a:endParaRPr lang="en-US" sz="2000" b="0" u="none" strike="noStrike">
-              <a:solidFill>
-                <a:srgbClr val="000000"/>
-              </a:solidFill>
-              <a:effectLst/>
-              <a:uFillTx/>
-              <a:latin typeface="Noto Sans CJK KR"/>
-            </a:endParaRPr>
-          </a:p>
-          <a:p>
-            <a:pPr indent="0" algn="l">
-              <a:lnSpc>
-                <a:spcPct val="100000"/>
-              </a:lnSpc>
-              <a:buNone/>
-              <a:tabLst>
-                <a:tab pos="0" algn="l"/>
-              </a:tabLst>
-            </a:pPr>
-            <a:r>
-              <a:rPr lang="en-US" sz="2000" b="0" u="none" strike="noStrike">
-                <a:solidFill>
-                  <a:srgbClr val="000000"/>
-                </a:solidFill>
-                <a:effectLst/>
-                <a:uFillTx/>
-                <a:latin typeface="Noto Sans CJK KR"/>
-              </a:rPr>
-              <a:t>PURPOSE: </a:t>
-            </a:r>
-            <a:r>
-              <a:rPr lang="ko-KR" sz="2000" b="0" u="none" strike="noStrike">
-                <a:solidFill>
-                  <a:srgbClr val="000000"/>
-                </a:solidFill>
-                <a:effectLst/>
-                <a:uFillTx/>
-                <a:latin typeface="Noto Sans CJK KR"/>
-              </a:rPr>
-              <a:t>경보가 사람의 판단으로 이어지는 경로를 보여준다</a:t>
-            </a:r>
-            <a:r>
-              <a:rPr lang="en-US" sz="2000" b="0" u="none" strike="noStrike">
-                <a:solidFill>
-                  <a:srgbClr val="000000"/>
-                </a:solidFill>
-                <a:effectLst/>
-                <a:uFillTx/>
-                <a:latin typeface="Noto Sans CJK KR"/>
-              </a:rPr>
-              <a:t>.</a:t>
-            </a:r>
-            <a:endParaRPr lang="en-US" sz="2000" b="0" u="none" strike="noStrike">
-              <a:solidFill>
-                <a:srgbClr val="000000"/>
-              </a:solidFill>
-              <a:effectLst/>
-              <a:uFillTx/>
-              <a:latin typeface="Noto Sans CJK KR"/>
-            </a:endParaRPr>
-          </a:p>
-          <a:p>
-            <a:pPr indent="0" algn="l">
-              <a:lnSpc>
-                <a:spcPct val="100000"/>
-              </a:lnSpc>
-              <a:buNone/>
-              <a:tabLst>
-                <a:tab pos="0" algn="l"/>
-              </a:tabLst>
-            </a:pPr>
-            <a:r>
-              <a:rPr lang="en-US" sz="2000" b="0" u="none" strike="noStrike">
-                <a:solidFill>
-                  <a:srgbClr val="000000"/>
-                </a:solidFill>
-                <a:effectLst/>
-                <a:uFillTx/>
-                <a:latin typeface="Noto Sans CJK KR"/>
-              </a:rPr>
-              <a:t>MESSAGE: Suricata</a:t>
-            </a:r>
-            <a:r>
-              <a:rPr lang="ko-KR" sz="2000" b="0" u="none" strike="noStrike">
-                <a:solidFill>
-                  <a:srgbClr val="000000"/>
-                </a:solidFill>
-                <a:effectLst/>
-                <a:uFillTx/>
-                <a:latin typeface="Noto Sans CJK KR"/>
-              </a:rPr>
-              <a:t>는 </a:t>
-            </a:r>
-            <a:r>
-              <a:rPr lang="en-US" sz="2000" b="0" u="none" strike="noStrike">
-                <a:solidFill>
-                  <a:srgbClr val="000000"/>
-                </a:solidFill>
-                <a:effectLst/>
-                <a:uFillTx/>
-                <a:latin typeface="Noto Sans CJK KR"/>
-              </a:rPr>
-              <a:t>alert-only</a:t>
-            </a:r>
-            <a:r>
-              <a:rPr lang="ko-KR" sz="2000" b="0" u="none" strike="noStrike">
-                <a:solidFill>
-                  <a:srgbClr val="000000"/>
-                </a:solidFill>
-                <a:effectLst/>
-                <a:uFillTx/>
-                <a:latin typeface="Noto Sans CJK KR"/>
-              </a:rPr>
-              <a:t>이고 </a:t>
-            </a:r>
-            <a:r>
-              <a:rPr lang="en-US" sz="2000" b="0" u="none" strike="noStrike">
-                <a:solidFill>
-                  <a:srgbClr val="000000"/>
-                </a:solidFill>
-                <a:effectLst/>
-                <a:uFillTx/>
-                <a:latin typeface="Noto Sans CJK KR"/>
-              </a:rPr>
-              <a:t>Shuffle</a:t>
-            </a:r>
-            <a:r>
-              <a:rPr lang="ko-KR" sz="2000" b="0" u="none" strike="noStrike">
-                <a:solidFill>
-                  <a:srgbClr val="000000"/>
-                </a:solidFill>
-                <a:effectLst/>
-                <a:uFillTx/>
-                <a:latin typeface="Noto Sans CJK KR"/>
-              </a:rPr>
-              <a:t>은 </a:t>
-            </a:r>
-            <a:r>
-              <a:rPr lang="en-US" sz="2000" b="0" u="none" strike="noStrike">
-                <a:solidFill>
-                  <a:srgbClr val="000000"/>
-                </a:solidFill>
-                <a:effectLst/>
-                <a:uFillTx/>
-                <a:latin typeface="Noto Sans CJK KR"/>
-              </a:rPr>
-              <a:t>read-only </a:t>
-            </a:r>
-            <a:r>
-              <a:rPr lang="ko-KR" sz="2000" b="0" u="none" strike="noStrike">
-                <a:solidFill>
-                  <a:srgbClr val="000000"/>
-                </a:solidFill>
-                <a:effectLst/>
-                <a:uFillTx/>
-                <a:latin typeface="Noto Sans CJK KR"/>
-              </a:rPr>
-              <a:t>보강까지다</a:t>
-            </a:r>
-            <a:r>
-              <a:rPr lang="en-US" sz="2000" b="0" u="none" strike="noStrike">
-                <a:solidFill>
-                  <a:srgbClr val="000000"/>
-                </a:solidFill>
-                <a:effectLst/>
-                <a:uFillTx/>
-                <a:latin typeface="Noto Sans CJK KR"/>
-              </a:rPr>
-              <a:t>. </a:t>
-            </a:r>
-            <a:r>
-              <a:rPr lang="ko-KR" sz="2000" b="0" u="none" strike="noStrike">
-                <a:solidFill>
-                  <a:srgbClr val="000000"/>
-                </a:solidFill>
-                <a:effectLst/>
-                <a:uFillTx/>
-                <a:latin typeface="Noto Sans CJK KR"/>
-              </a:rPr>
-              <a:t>차단과 대응은 사람이 결정한다</a:t>
-            </a:r>
-            <a:r>
-              <a:rPr lang="en-US" sz="2000" b="0" u="none" strike="noStrike">
-                <a:solidFill>
-                  <a:srgbClr val="000000"/>
-                </a:solidFill>
-                <a:effectLst/>
-                <a:uFillTx/>
-                <a:latin typeface="Noto Sans CJK KR"/>
-              </a:rPr>
-              <a:t>.</a:t>
-            </a:r>
-            <a:endParaRPr lang="en-US" sz="2000" b="0" u="none" strike="noStrike">
-              <a:solidFill>
-                <a:srgbClr val="000000"/>
-              </a:solidFill>
-              <a:effectLst/>
-              <a:uFillTx/>
-              <a:latin typeface="Noto Sans CJK KR"/>
-            </a:endParaRPr>
-          </a:p>
-          <a:p>
-            <a:pPr indent="0" algn="l">
-              <a:lnSpc>
-                <a:spcPct val="100000"/>
-              </a:lnSpc>
-              <a:buNone/>
-              <a:tabLst>
-                <a:tab pos="0" algn="l"/>
-              </a:tabLst>
-            </a:pPr>
-            <a:r>
-              <a:rPr lang="en-US" sz="2000" b="0" u="none" strike="noStrike">
-                <a:solidFill>
-                  <a:srgbClr val="000000"/>
-                </a:solidFill>
-                <a:effectLst/>
-                <a:uFillTx/>
-                <a:latin typeface="Noto Sans CJK KR"/>
-              </a:rPr>
-              <a:t>ASSET: native </a:t>
-            </a:r>
-            <a:r>
-              <a:rPr lang="ko-KR" sz="2000" b="0" u="none" strike="noStrike">
-                <a:solidFill>
-                  <a:srgbClr val="000000"/>
-                </a:solidFill>
-                <a:effectLst/>
-                <a:uFillTx/>
-                <a:latin typeface="Noto Sans CJK KR"/>
-              </a:rPr>
-              <a:t>도형</a:t>
-            </a:r>
-            <a:endParaRPr lang="en-US" sz="2000" b="0" u="none" strike="noStrike">
-              <a:solidFill>
-                <a:srgbClr val="000000"/>
-              </a:solidFill>
-              <a:effectLst/>
-              <a:uFillTx/>
-              <a:latin typeface="Noto Sans CJK KR"/>
-            </a:endParaRPr>
-          </a:p>
-          <a:p>
-            <a:pPr indent="0" algn="l">
-              <a:lnSpc>
-                <a:spcPct val="100000"/>
-              </a:lnSpc>
-              <a:buNone/>
-              <a:tabLst>
-                <a:tab pos="0" algn="l"/>
-              </a:tabLst>
-            </a:pPr>
-            <a:r>
-              <a:rPr lang="en-US" sz="2000" b="0" u="none" strike="noStrike">
-                <a:solidFill>
-                  <a:srgbClr val="000000"/>
-                </a:solidFill>
-                <a:effectLst/>
-                <a:uFillTx/>
-                <a:latin typeface="Noto Sans CJK KR"/>
-              </a:rPr>
-              <a:t>EVIDENCE: NIDS-01 · FALCO-01 · WAZUH-01 · SOAR-01 · OBS-01 · LOKI-01</a:t>
-            </a:r>
-            <a:endParaRPr lang="en-US" sz="2000" b="0" u="none" strike="noStrike">
-              <a:solidFill>
-                <a:srgbClr val="000000"/>
-              </a:solidFill>
-              <a:effectLst/>
-              <a:uFillTx/>
-              <a:latin typeface="Noto Sans CJK KR"/>
-            </a:endParaRPr>
-          </a:p>
-          <a:p>
-            <a:pPr indent="0" algn="l">
-              <a:lnSpc>
-                <a:spcPct val="100000"/>
-              </a:lnSpc>
-              <a:buNone/>
-              <a:tabLst>
-                <a:tab pos="0" algn="l"/>
-              </a:tabLst>
-            </a:pPr>
-            <a:endParaRPr lang="en-US" sz="2000" b="0" u="none" strike="noStrike">
-              <a:solidFill>
-                <a:srgbClr val="000000"/>
-              </a:solidFill>
-              <a:effectLst/>
-              <a:uFillTx/>
-              <a:latin typeface="Noto Sans CJK KR"/>
-            </a:endParaRPr>
-          </a:p>
-          <a:p>
-            <a:pPr indent="0" algn="l">
-              <a:lnSpc>
-                <a:spcPct val="100000"/>
-              </a:lnSpc>
-              <a:buNone/>
-              <a:tabLst>
-                <a:tab pos="0" algn="l"/>
-              </a:tabLst>
-            </a:pPr>
-            <a:r>
-              <a:rPr lang="en-US" sz="2000" b="0" u="none" strike="noStrike">
-                <a:solidFill>
-                  <a:srgbClr val="000000"/>
-                </a:solidFill>
-                <a:effectLst/>
-                <a:uFillTx/>
-                <a:latin typeface="Noto Sans CJK KR"/>
-              </a:rPr>
-              <a:t>※ 발표 대본은 </a:t>
-            </a:r>
-            <a:r>
-              <a:rPr lang="en-US" sz="2000" b="0" u="none" strike="noStrike">
-                <a:solidFill>
-                  <a:srgbClr val="000000"/>
-                </a:solidFill>
-                <a:effectLst/>
-                <a:uFillTx/>
-                <a:latin typeface="Noto Sans CJK KR"/>
-              </a:rPr>
-              <a:t>PRESENT-SCRIPT-01</a:t>
-            </a:r>
-            <a:r>
-              <a:rPr lang="ko-KR" sz="2000" b="0" u="none" strike="noStrike">
-                <a:solidFill>
-                  <a:srgbClr val="000000"/>
-                </a:solidFill>
-                <a:effectLst/>
-                <a:uFillTx/>
-                <a:latin typeface="Noto Sans CJK KR"/>
-              </a:rPr>
-              <a:t>이 이 </a:t>
-            </a:r>
-            <a:r>
-              <a:rPr lang="en-US" sz="2000" b="0" u="none" strike="noStrike">
-                <a:solidFill>
-                  <a:srgbClr val="000000"/>
-                </a:solidFill>
-                <a:effectLst/>
-                <a:uFillTx/>
-                <a:latin typeface="Noto Sans CJK KR"/>
-              </a:rPr>
-              <a:t>notes</a:t>
-            </a:r>
-            <a:r>
-              <a:rPr lang="ko-KR" sz="2000" b="0" u="none" strike="noStrike">
-                <a:solidFill>
-                  <a:srgbClr val="000000"/>
-                </a:solidFill>
-                <a:effectLst/>
-                <a:uFillTx/>
-                <a:latin typeface="Noto Sans CJK KR"/>
-              </a:rPr>
-              <a:t>를 대체한다</a:t>
-            </a:r>
-            <a:r>
-              <a:rPr lang="en-US" sz="2000" b="0" u="none" strike="noStrike">
-                <a:solidFill>
-                  <a:srgbClr val="000000"/>
-                </a:solidFill>
-                <a:effectLst/>
-                <a:uFillTx/>
-                <a:latin typeface="Noto Sans CJK KR"/>
-              </a:rPr>
-              <a:t>.</a:t>
-            </a:r>
-            <a:endParaRPr lang="en-US" sz="2000" b="0" u="none" strike="noStrike">
-              <a:solidFill>
-                <a:srgbClr val="000000"/>
-              </a:solidFill>
-              <a:effectLst/>
-              <a:uFillTx/>
-              <a:latin typeface="Noto Sans CJK KR"/>
-            </a:endParaRPr>
+          <a:p/>
+          <a:p>
+            <a:r>
+              <a:t>모니터링은 두 갈래입니다.</a:t>
+            </a:r>
+          </a:p>
+          <a:p>
+            <a:r>
+              <a:t>잘 돌고 있는지 보는 운영 쪽, 공격받고 있는지 보는 보안 쪽인데 먼저 운영입니다.</a:t>
+            </a:r>
+          </a:p>
+          <a:p>
+            <a:r>
+              <a:t>Grafana 대시보드 10종으로 자원 사용률과 Traefik 트래픽, 백업, Argo CD 동기화를 봅니다.</a:t>
+            </a:r>
+          </a:p>
+          <a:p>
+            <a:r>
+              <a:t>로그는 Loki로 모아 error와 warn만 걸러 보고요.</a:t>
+            </a:r>
+          </a:p>
+          <a:p>
+            <a:r>
+              <a:t>알림은 Prometheus 상시 경보 19개인데 이 중 9개가 백업입니다.</a:t>
+            </a:r>
+          </a:p>
+          <a:p>
+            <a:r>
+              <a:t>설정이 아니라 어젯밤에 실제로 돌았는지를 봅니다.</a:t>
+            </a:r>
           </a:p>
         </p:txBody>
       </p:sp>
@@ -6588,70 +2872,7 @@
               </a:tabLst>
             </a:pPr>
             <a:r>
-              <a:rPr lang="en-US" sz="2000" b="0" u="none" strike="noStrike">
-                <a:solidFill>
-                  <a:srgbClr val="000000"/>
-                </a:solidFill>
-                <a:effectLst/>
-                <a:uFillTx/>
-                <a:latin typeface="Noto Sans CJK KR"/>
-              </a:rPr>
-              <a:t>[14/22 · 00:45] </a:t>
-            </a:r>
-            <a:r>
-              <a:rPr lang="ko-KR" sz="2000" b="0" u="none" strike="noStrike">
-                <a:solidFill>
-                  <a:srgbClr val="000000"/>
-                </a:solidFill>
-                <a:effectLst/>
-                <a:uFillTx/>
-                <a:latin typeface="Noto Sans CJK KR"/>
-              </a:rPr>
-              <a:t>관측</a:t>
-            </a:r>
-            <a:r>
-              <a:rPr lang="en-US" sz="2000" b="0" u="none" strike="noStrike">
-                <a:solidFill>
-                  <a:srgbClr val="000000"/>
-                </a:solidFill>
-                <a:effectLst/>
-                <a:uFillTx/>
-                <a:latin typeface="Noto Sans CJK KR"/>
-              </a:rPr>
-              <a:t>·</a:t>
-            </a:r>
-            <a:r>
-              <a:rPr lang="ko-KR" sz="2000" b="0" u="none" strike="noStrike">
-                <a:solidFill>
-                  <a:srgbClr val="000000"/>
-                </a:solidFill>
-                <a:effectLst/>
-                <a:uFillTx/>
-                <a:latin typeface="Noto Sans CJK KR"/>
-              </a:rPr>
-              <a:t>탐지</a:t>
-            </a:r>
-            <a:r>
-              <a:rPr lang="en-US" sz="2000" b="0" u="none" strike="noStrike">
-                <a:solidFill>
-                  <a:srgbClr val="000000"/>
-                </a:solidFill>
-                <a:effectLst/>
-                <a:uFillTx/>
-                <a:latin typeface="Noto Sans CJK KR"/>
-              </a:rPr>
-              <a:t>·</a:t>
-            </a:r>
-            <a:r>
-              <a:rPr lang="ko-KR" sz="2000" b="0" u="none" strike="noStrike">
-                <a:solidFill>
-                  <a:srgbClr val="000000"/>
-                </a:solidFill>
-                <a:effectLst/>
-                <a:uFillTx/>
-                <a:latin typeface="Noto Sans CJK KR"/>
-              </a:rPr>
-              <a:t>사람 승인</a:t>
+              <a:t>[21/23 · 0:53] 보안 모니터링</a:t>
             </a:r>
             <a:endParaRPr lang="en-US" sz="2000" b="0" u="none" strike="noStrike">
               <a:solidFill>
@@ -6662,391 +2883,47 @@
               <a:latin typeface="Noto Sans CJK KR"/>
             </a:endParaRPr>
           </a:p>
-          <a:p>
-            <a:pPr indent="0" algn="l">
-              <a:lnSpc>
-                <a:spcPct val="100000"/>
-              </a:lnSpc>
-              <a:buNone/>
-              <a:tabLst>
-                <a:tab pos="0" algn="l"/>
-              </a:tabLst>
-            </a:pPr>
-            <a:endParaRPr lang="en-US" sz="2000" b="0" u="none" strike="noStrike">
-              <a:solidFill>
-                <a:srgbClr val="000000"/>
-              </a:solidFill>
-              <a:effectLst/>
-              <a:uFillTx/>
-              <a:latin typeface="Noto Sans CJK KR"/>
-            </a:endParaRPr>
-          </a:p>
-          <a:p>
-            <a:pPr indent="0" algn="l">
-              <a:lnSpc>
-                <a:spcPct val="100000"/>
-              </a:lnSpc>
-              <a:buNone/>
-              <a:tabLst>
-                <a:tab pos="0" algn="l"/>
-              </a:tabLst>
-            </a:pPr>
-            <a:r>
-              <a:rPr lang="en-US" sz="2000" b="0" u="none" strike="noStrike">
-                <a:solidFill>
-                  <a:srgbClr val="000000"/>
-                </a:solidFill>
-                <a:effectLst/>
-                <a:uFillTx/>
-                <a:latin typeface="Noto Sans CJK KR"/>
-              </a:rPr>
-              <a:t>PURPOSE: </a:t>
-            </a:r>
-            <a:r>
-              <a:rPr lang="ko-KR" sz="2000" b="0" u="none" strike="noStrike">
-                <a:solidFill>
-                  <a:srgbClr val="000000"/>
-                </a:solidFill>
-                <a:effectLst/>
-                <a:uFillTx/>
-                <a:latin typeface="Noto Sans CJK KR"/>
-              </a:rPr>
-              <a:t>경보가 사람의 판단으로 이어지는 경로를 보여준다</a:t>
-            </a:r>
-            <a:r>
-              <a:rPr lang="en-US" sz="2000" b="0" u="none" strike="noStrike">
-                <a:solidFill>
-                  <a:srgbClr val="000000"/>
-                </a:solidFill>
-                <a:effectLst/>
-                <a:uFillTx/>
-                <a:latin typeface="Noto Sans CJK KR"/>
-              </a:rPr>
-              <a:t>.</a:t>
-            </a:r>
-            <a:endParaRPr lang="en-US" sz="2000" b="0" u="none" strike="noStrike">
-              <a:solidFill>
-                <a:srgbClr val="000000"/>
-              </a:solidFill>
-              <a:effectLst/>
-              <a:uFillTx/>
-              <a:latin typeface="Noto Sans CJK KR"/>
-            </a:endParaRPr>
-          </a:p>
-          <a:p>
-            <a:pPr indent="0" algn="l">
-              <a:lnSpc>
-                <a:spcPct val="100000"/>
-              </a:lnSpc>
-              <a:buNone/>
-              <a:tabLst>
-                <a:tab pos="0" algn="l"/>
-              </a:tabLst>
-            </a:pPr>
-            <a:r>
-              <a:rPr lang="en-US" sz="2000" b="0" u="none" strike="noStrike">
-                <a:solidFill>
-                  <a:srgbClr val="000000"/>
-                </a:solidFill>
-                <a:effectLst/>
-                <a:uFillTx/>
-                <a:latin typeface="Noto Sans CJK KR"/>
-              </a:rPr>
-              <a:t>MESSAGE: Suricata</a:t>
-            </a:r>
-            <a:r>
-              <a:rPr lang="ko-KR" sz="2000" b="0" u="none" strike="noStrike">
-                <a:solidFill>
-                  <a:srgbClr val="000000"/>
-                </a:solidFill>
-                <a:effectLst/>
-                <a:uFillTx/>
-                <a:latin typeface="Noto Sans CJK KR"/>
-              </a:rPr>
-              <a:t>는 </a:t>
-            </a:r>
-            <a:r>
-              <a:rPr lang="en-US" sz="2000" b="0" u="none" strike="noStrike">
-                <a:solidFill>
-                  <a:srgbClr val="000000"/>
-                </a:solidFill>
-                <a:effectLst/>
-                <a:uFillTx/>
-                <a:latin typeface="Noto Sans CJK KR"/>
-              </a:rPr>
-              <a:t>alert-only</a:t>
-            </a:r>
-            <a:r>
-              <a:rPr lang="ko-KR" sz="2000" b="0" u="none" strike="noStrike">
-                <a:solidFill>
-                  <a:srgbClr val="000000"/>
-                </a:solidFill>
-                <a:effectLst/>
-                <a:uFillTx/>
-                <a:latin typeface="Noto Sans CJK KR"/>
-              </a:rPr>
-              <a:t>이고 </a:t>
-            </a:r>
-            <a:r>
-              <a:rPr lang="en-US" sz="2000" b="0" u="none" strike="noStrike">
-                <a:solidFill>
-                  <a:srgbClr val="000000"/>
-                </a:solidFill>
-                <a:effectLst/>
-                <a:uFillTx/>
-                <a:latin typeface="Noto Sans CJK KR"/>
-              </a:rPr>
-              <a:t>Shuffle</a:t>
-            </a:r>
-            <a:r>
-              <a:rPr lang="ko-KR" sz="2000" b="0" u="none" strike="noStrike">
-                <a:solidFill>
-                  <a:srgbClr val="000000"/>
-                </a:solidFill>
-                <a:effectLst/>
-                <a:uFillTx/>
-                <a:latin typeface="Noto Sans CJK KR"/>
-              </a:rPr>
-              <a:t>은 </a:t>
-            </a:r>
-            <a:r>
-              <a:rPr lang="en-US" sz="2000" b="0" u="none" strike="noStrike">
-                <a:solidFill>
-                  <a:srgbClr val="000000"/>
-                </a:solidFill>
-                <a:effectLst/>
-                <a:uFillTx/>
-                <a:latin typeface="Noto Sans CJK KR"/>
-              </a:rPr>
-              <a:t>read-only </a:t>
-            </a:r>
-            <a:r>
-              <a:rPr lang="ko-KR" sz="2000" b="0" u="none" strike="noStrike">
-                <a:solidFill>
-                  <a:srgbClr val="000000"/>
-                </a:solidFill>
-                <a:effectLst/>
-                <a:uFillTx/>
-                <a:latin typeface="Noto Sans CJK KR"/>
-              </a:rPr>
-              <a:t>보강까지다</a:t>
-            </a:r>
-            <a:r>
-              <a:rPr lang="en-US" sz="2000" b="0" u="none" strike="noStrike">
-                <a:solidFill>
-                  <a:srgbClr val="000000"/>
-                </a:solidFill>
-                <a:effectLst/>
-                <a:uFillTx/>
-                <a:latin typeface="Noto Sans CJK KR"/>
-              </a:rPr>
-              <a:t>. </a:t>
-            </a:r>
-            <a:r>
-              <a:rPr lang="ko-KR" sz="2000" b="0" u="none" strike="noStrike">
-                <a:solidFill>
-                  <a:srgbClr val="000000"/>
-                </a:solidFill>
-                <a:effectLst/>
-                <a:uFillTx/>
-                <a:latin typeface="Noto Sans CJK KR"/>
-              </a:rPr>
-              <a:t>차단과 대응은 사람이 결정한다</a:t>
-            </a:r>
-            <a:r>
-              <a:rPr lang="en-US" sz="2000" b="0" u="none" strike="noStrike">
-                <a:solidFill>
-                  <a:srgbClr val="000000"/>
-                </a:solidFill>
-                <a:effectLst/>
-                <a:uFillTx/>
-                <a:latin typeface="Noto Sans CJK KR"/>
-              </a:rPr>
-              <a:t>.</a:t>
-            </a:r>
-            <a:endParaRPr lang="en-US" sz="2000" b="0" u="none" strike="noStrike">
-              <a:solidFill>
-                <a:srgbClr val="000000"/>
-              </a:solidFill>
-              <a:effectLst/>
-              <a:uFillTx/>
-              <a:latin typeface="Noto Sans CJK KR"/>
-            </a:endParaRPr>
-          </a:p>
-          <a:p>
-            <a:pPr indent="0" algn="l">
-              <a:lnSpc>
-                <a:spcPct val="100000"/>
-              </a:lnSpc>
-              <a:buNone/>
-              <a:tabLst>
-                <a:tab pos="0" algn="l"/>
-              </a:tabLst>
-            </a:pPr>
-            <a:r>
-              <a:rPr lang="en-US" sz="2000" b="0" u="none" strike="noStrike">
-                <a:solidFill>
-                  <a:srgbClr val="000000"/>
-                </a:solidFill>
-                <a:effectLst/>
-                <a:uFillTx/>
-                <a:latin typeface="Noto Sans CJK KR"/>
-              </a:rPr>
-              <a:t>ASSET: native </a:t>
-            </a:r>
-            <a:r>
-              <a:rPr lang="ko-KR" sz="2000" b="0" u="none" strike="noStrike">
-                <a:solidFill>
-                  <a:srgbClr val="000000"/>
-                </a:solidFill>
-                <a:effectLst/>
-                <a:uFillTx/>
-                <a:latin typeface="Noto Sans CJK KR"/>
-              </a:rPr>
-              <a:t>도형</a:t>
-            </a:r>
-            <a:endParaRPr lang="en-US" sz="2000" b="0" u="none" strike="noStrike">
-              <a:solidFill>
-                <a:srgbClr val="000000"/>
-              </a:solidFill>
-              <a:effectLst/>
-              <a:uFillTx/>
-              <a:latin typeface="Noto Sans CJK KR"/>
-            </a:endParaRPr>
-          </a:p>
-          <a:p>
-            <a:pPr indent="0" algn="l">
-              <a:lnSpc>
-                <a:spcPct val="100000"/>
-              </a:lnSpc>
-              <a:buNone/>
-              <a:tabLst>
-                <a:tab pos="0" algn="l"/>
-              </a:tabLst>
-            </a:pPr>
-            <a:r>
-              <a:rPr lang="en-US" sz="2000" b="0" u="none" strike="noStrike">
-                <a:solidFill>
-                  <a:srgbClr val="000000"/>
-                </a:solidFill>
-                <a:effectLst/>
-                <a:uFillTx/>
-                <a:latin typeface="Noto Sans CJK KR"/>
-              </a:rPr>
-              <a:t>EVIDENCE: NIDS-01 · FALCO-01 · WAZUH-01 · SOAR-01 · OBS-01 · LOKI-01</a:t>
-            </a:r>
-            <a:endParaRPr lang="en-US" sz="2000" b="0" u="none" strike="noStrike">
-              <a:solidFill>
-                <a:srgbClr val="000000"/>
-              </a:solidFill>
-              <a:effectLst/>
-              <a:uFillTx/>
-              <a:latin typeface="Noto Sans CJK KR"/>
-            </a:endParaRPr>
-          </a:p>
-          <a:p>
-            <a:pPr indent="0" algn="l">
-              <a:lnSpc>
-                <a:spcPct val="100000"/>
-              </a:lnSpc>
-              <a:buNone/>
-              <a:tabLst>
-                <a:tab pos="0" algn="l"/>
-              </a:tabLst>
-            </a:pPr>
-            <a:endParaRPr lang="en-US" sz="2000" b="0" u="none" strike="noStrike">
-              <a:solidFill>
-                <a:srgbClr val="000000"/>
-              </a:solidFill>
-              <a:effectLst/>
-              <a:uFillTx/>
-              <a:latin typeface="Noto Sans CJK KR"/>
-            </a:endParaRPr>
-          </a:p>
-          <a:p>
-            <a:pPr indent="0" algn="l">
-              <a:lnSpc>
-                <a:spcPct val="100000"/>
-              </a:lnSpc>
-              <a:buNone/>
-              <a:tabLst>
-                <a:tab pos="0" algn="l"/>
-              </a:tabLst>
-            </a:pPr>
-            <a:r>
-              <a:rPr lang="en-US" sz="2000" b="0" u="none" strike="noStrike">
-                <a:solidFill>
-                  <a:srgbClr val="000000"/>
-                </a:solidFill>
-                <a:effectLst/>
-                <a:uFillTx/>
-                <a:latin typeface="Noto Sans CJK KR"/>
-              </a:rPr>
-              <a:t>※ 발표 대본은 </a:t>
-            </a:r>
-            <a:r>
-              <a:rPr lang="en-US" sz="2000" b="0" u="none" strike="noStrike">
-                <a:solidFill>
-                  <a:srgbClr val="000000"/>
-                </a:solidFill>
-                <a:effectLst/>
-                <a:uFillTx/>
-                <a:latin typeface="Noto Sans CJK KR"/>
-              </a:rPr>
-              <a:t>PRESENT-SCRIPT-01</a:t>
-            </a:r>
-            <a:r>
-              <a:rPr lang="ko-KR" sz="2000" b="0" u="none" strike="noStrike">
-                <a:solidFill>
-                  <a:srgbClr val="000000"/>
-                </a:solidFill>
-                <a:effectLst/>
-                <a:uFillTx/>
-                <a:latin typeface="Noto Sans CJK KR"/>
-              </a:rPr>
-              <a:t>이 이 </a:t>
-            </a:r>
-            <a:r>
-              <a:rPr lang="en-US" sz="2000" b="0" u="none" strike="noStrike">
-                <a:solidFill>
-                  <a:srgbClr val="000000"/>
-                </a:solidFill>
-                <a:effectLst/>
-                <a:uFillTx/>
-                <a:latin typeface="Noto Sans CJK KR"/>
-              </a:rPr>
-              <a:t>notes</a:t>
-            </a:r>
-            <a:r>
-              <a:rPr lang="ko-KR" sz="2000" b="0" u="none" strike="noStrike">
-                <a:solidFill>
-                  <a:srgbClr val="000000"/>
-                </a:solidFill>
-                <a:effectLst/>
-                <a:uFillTx/>
-                <a:latin typeface="Noto Sans CJK KR"/>
-              </a:rPr>
-              <a:t>를 대체한다</a:t>
-            </a:r>
-            <a:r>
-              <a:rPr lang="en-US" sz="2000" b="0" u="none" strike="noStrike">
-                <a:solidFill>
-                  <a:srgbClr val="000000"/>
-                </a:solidFill>
-                <a:effectLst/>
-                <a:uFillTx/>
-                <a:latin typeface="Noto Sans CJK KR"/>
-              </a:rPr>
-              <a:t>.</a:t>
-            </a:r>
-            <a:endParaRPr lang="en-US" sz="2000" b="0" u="none" strike="noStrike">
-              <a:solidFill>
-                <a:srgbClr val="000000"/>
-              </a:solidFill>
-              <a:effectLst/>
-              <a:uFillTx/>
-              <a:latin typeface="Noto Sans CJK KR"/>
-            </a:endParaRPr>
+          <a:p/>
+          <a:p>
+            <a:r>
+              <a:t>보안 쪽은 Wazuh로 호스트 7대의 파일 무결성과 rootcheck, 앱 로그 6종, NetBird 감사 이벤트를 모읍니다.</a:t>
+            </a:r>
+          </a:p>
+          <a:p>
+            <a:r>
+              <a:t>왼쪽이 최근 24시간인데 21만 8천 건입니다.</a:t>
+            </a:r>
+          </a:p>
+          <a:p>
+            <a:r>
+              <a:t>가운데가 잡힌 예인데, Proxmox 설정 디렉터리가 바뀌면 rule 550, level 7로 올라옵니다.</a:t>
+            </a:r>
+          </a:p>
+          <a:p>
+            <a:r>
+              <a:t>여기서부터는 저희 규칙인데, 등급이 경로를 정합니다.</a:t>
+            </a:r>
+          </a:p>
+          <a:p>
+            <a:r>
+              <a:t>level 7은 Shuffle이 정보를 붙여 사람 승인 앞에서 멈춥니다.</a:t>
+            </a:r>
+          </a:p>
+          <a:p>
+            <a:r>
+              <a:t>계속할지 멈출지는 오른쪽처럼 사람이 고르고, level 14 이상만 즉시 통지됩니다.</a:t>
+            </a:r>
+          </a:p>
+          <a:p>
+            <a:r>
+              <a:t>그래서 active_response는 0건입니다.</a:t>
+            </a:r>
+          </a:p>
+          <a:p/>
+          <a:p>
+            <a:r>
+              <a:t>※ rule 550은 Proxmox 설정 디렉터리 변경 감지다. 경로를 읽지 말고 화면을 가리킨다.</a:t>
+            </a:r>
           </a:p>
         </p:txBody>
       </p:sp>
@@ -7213,15 +3090,7 @@
               </a:tabLst>
             </a:pPr>
             <a:r>
-              <a:rPr lang="en-US" sz="2000" b="0" u="none" strike="noStrike">
-                <a:solidFill>
-                  <a:srgbClr val="000000"/>
-                </a:solidFill>
-                <a:effectLst/>
-                <a:uFillTx/>
-                <a:latin typeface="Noto Sans CJK KR"/>
-              </a:rPr>
-              <a:t>[19/22 · 00:35] SWOT</a:t>
+              <a:t>[22/23 · 0:35] SWOT</a:t>
             </a:r>
             <a:endParaRPr lang="en-US" sz="2000" b="0" u="none" strike="noStrike">
               <a:solidFill>
@@ -7232,314 +3101,31 @@
               <a:latin typeface="Noto Sans CJK KR"/>
             </a:endParaRPr>
           </a:p>
-          <a:p>
-            <a:pPr indent="0" algn="l">
-              <a:lnSpc>
-                <a:spcPct val="100000"/>
-              </a:lnSpc>
-              <a:buNone/>
-              <a:tabLst>
-                <a:tab pos="0" algn="l"/>
-              </a:tabLst>
-            </a:pPr>
-            <a:endParaRPr lang="en-US" sz="2000" b="0" u="none" strike="noStrike">
-              <a:solidFill>
-                <a:srgbClr val="000000"/>
-              </a:solidFill>
-              <a:effectLst/>
-              <a:uFillTx/>
-              <a:latin typeface="Noto Sans CJK KR"/>
-            </a:endParaRPr>
-          </a:p>
-          <a:p>
-            <a:pPr indent="0" algn="l">
-              <a:lnSpc>
-                <a:spcPct val="100000"/>
-              </a:lnSpc>
-              <a:buNone/>
-              <a:tabLst>
-                <a:tab pos="0" algn="l"/>
-              </a:tabLst>
-            </a:pPr>
-            <a:r>
-              <a:rPr lang="en-US" sz="2000" b="0" u="none" strike="noStrike">
-                <a:solidFill>
-                  <a:srgbClr val="000000"/>
-                </a:solidFill>
-                <a:effectLst/>
-                <a:uFillTx/>
-                <a:latin typeface="Noto Sans CJK KR"/>
-              </a:rPr>
-              <a:t>PURPOSE: </a:t>
-            </a:r>
-            <a:r>
-              <a:rPr lang="ko-KR" sz="2000" b="0" u="none" strike="noStrike">
-                <a:solidFill>
-                  <a:srgbClr val="000000"/>
-                </a:solidFill>
-                <a:effectLst/>
-                <a:uFillTx/>
-                <a:latin typeface="Noto Sans CJK KR"/>
-              </a:rPr>
-              <a:t>한계를 먼저 인정해 나머지 주장의 신뢰를 지킨다</a:t>
-            </a:r>
-            <a:r>
-              <a:rPr lang="en-US" sz="2000" b="0" u="none" strike="noStrike">
-                <a:solidFill>
-                  <a:srgbClr val="000000"/>
-                </a:solidFill>
-                <a:effectLst/>
-                <a:uFillTx/>
-                <a:latin typeface="Noto Sans CJK KR"/>
-              </a:rPr>
-              <a:t>.</a:t>
-            </a:r>
-            <a:endParaRPr lang="en-US" sz="2000" b="0" u="none" strike="noStrike">
-              <a:solidFill>
-                <a:srgbClr val="000000"/>
-              </a:solidFill>
-              <a:effectLst/>
-              <a:uFillTx/>
-              <a:latin typeface="Noto Sans CJK KR"/>
-            </a:endParaRPr>
-          </a:p>
-          <a:p>
-            <a:pPr indent="0" algn="l">
-              <a:lnSpc>
-                <a:spcPct val="100000"/>
-              </a:lnSpc>
-              <a:buNone/>
-              <a:tabLst>
-                <a:tab pos="0" algn="l"/>
-              </a:tabLst>
-            </a:pPr>
-            <a:r>
-              <a:rPr lang="en-US" sz="2000" b="0" u="none" strike="noStrike">
-                <a:solidFill>
-                  <a:srgbClr val="000000"/>
-                </a:solidFill>
-                <a:effectLst/>
-                <a:uFillTx/>
-                <a:latin typeface="Noto Sans CJK KR"/>
-              </a:rPr>
-              <a:t>MESSAGE: HA</a:t>
-            </a:r>
-            <a:r>
-              <a:rPr lang="ko-KR" sz="2000" b="0" u="none" strike="noStrike">
-                <a:solidFill>
-                  <a:srgbClr val="000000"/>
-                </a:solidFill>
-                <a:effectLst/>
-                <a:uFillTx/>
-                <a:latin typeface="Noto Sans CJK KR"/>
-              </a:rPr>
-              <a:t>를 포기한 대신 재구축과 복구 가능성을 확보했다</a:t>
-            </a:r>
-            <a:r>
-              <a:rPr lang="en-US" sz="2000" b="0" u="none" strike="noStrike">
-                <a:solidFill>
-                  <a:srgbClr val="000000"/>
-                </a:solidFill>
-                <a:effectLst/>
-                <a:uFillTx/>
-                <a:latin typeface="Noto Sans CJK KR"/>
-              </a:rPr>
-              <a:t>.</a:t>
-            </a:r>
-            <a:endParaRPr lang="en-US" sz="2000" b="0" u="none" strike="noStrike">
-              <a:solidFill>
-                <a:srgbClr val="000000"/>
-              </a:solidFill>
-              <a:effectLst/>
-              <a:uFillTx/>
-              <a:latin typeface="Noto Sans CJK KR"/>
-            </a:endParaRPr>
-          </a:p>
-          <a:p>
-            <a:pPr indent="0" algn="l">
-              <a:lnSpc>
-                <a:spcPct val="100000"/>
-              </a:lnSpc>
-              <a:buNone/>
-              <a:tabLst>
-                <a:tab pos="0" algn="l"/>
-              </a:tabLst>
-            </a:pPr>
-            <a:r>
-              <a:rPr lang="en-US" sz="2000" b="0" u="none" strike="noStrike">
-                <a:solidFill>
-                  <a:srgbClr val="000000"/>
-                </a:solidFill>
-                <a:effectLst/>
-                <a:uFillTx/>
-                <a:latin typeface="Noto Sans CJK KR"/>
-              </a:rPr>
-              <a:t>ASSET: native </a:t>
-            </a:r>
-            <a:r>
-              <a:rPr lang="ko-KR" sz="2000" b="0" u="none" strike="noStrike">
-                <a:solidFill>
-                  <a:srgbClr val="000000"/>
-                </a:solidFill>
-                <a:effectLst/>
-                <a:uFillTx/>
-                <a:latin typeface="Noto Sans CJK KR"/>
-              </a:rPr>
-              <a:t>도형</a:t>
-            </a:r>
-            <a:endParaRPr lang="en-US" sz="2000" b="0" u="none" strike="noStrike">
-              <a:solidFill>
-                <a:srgbClr val="000000"/>
-              </a:solidFill>
-              <a:effectLst/>
-              <a:uFillTx/>
-              <a:latin typeface="Noto Sans CJK KR"/>
-            </a:endParaRPr>
-          </a:p>
-          <a:p>
-            <a:pPr indent="0" algn="l">
-              <a:lnSpc>
-                <a:spcPct val="100000"/>
-              </a:lnSpc>
-              <a:buNone/>
-              <a:tabLst>
-                <a:tab pos="0" algn="l"/>
-              </a:tabLst>
-            </a:pPr>
-            <a:r>
-              <a:rPr lang="en-US" sz="2000" b="0" u="none" strike="noStrike">
-                <a:solidFill>
-                  <a:srgbClr val="000000"/>
-                </a:solidFill>
-                <a:effectLst/>
-                <a:uFillTx/>
-                <a:latin typeface="Noto Sans CJK KR"/>
-              </a:rPr>
-              <a:t>EVIDENCE: docs/architecture.md </a:t>
-            </a:r>
-            <a:r>
-              <a:rPr lang="ko-KR" sz="2000" b="0" u="none" strike="noStrike">
-                <a:solidFill>
-                  <a:srgbClr val="000000"/>
-                </a:solidFill>
-                <a:effectLst/>
-                <a:uFillTx/>
-                <a:latin typeface="Noto Sans CJK KR"/>
-              </a:rPr>
-              <a:t>의도적으로 유보한 것</a:t>
-            </a:r>
-            <a:endParaRPr lang="en-US" sz="2000" b="0" u="none" strike="noStrike">
-              <a:solidFill>
-                <a:srgbClr val="000000"/>
-              </a:solidFill>
-              <a:effectLst/>
-              <a:uFillTx/>
-              <a:latin typeface="Noto Sans CJK KR"/>
-            </a:endParaRPr>
-          </a:p>
-          <a:p>
-            <a:pPr indent="0" algn="l">
-              <a:lnSpc>
-                <a:spcPct val="100000"/>
-              </a:lnSpc>
-              <a:buNone/>
-              <a:tabLst>
-                <a:tab pos="0" algn="l"/>
-              </a:tabLst>
-            </a:pPr>
-            <a:endParaRPr lang="en-US" sz="2000" b="0" u="none" strike="noStrike">
-              <a:solidFill>
-                <a:srgbClr val="000000"/>
-              </a:solidFill>
-              <a:effectLst/>
-              <a:uFillTx/>
-              <a:latin typeface="Noto Sans CJK KR"/>
-            </a:endParaRPr>
-          </a:p>
-          <a:p>
-            <a:pPr indent="0" algn="l">
-              <a:lnSpc>
-                <a:spcPct val="100000"/>
-              </a:lnSpc>
-              <a:buNone/>
-              <a:tabLst>
-                <a:tab pos="0" algn="l"/>
-              </a:tabLst>
-            </a:pPr>
-            <a:r>
-              <a:rPr lang="en-US" sz="2000" b="0" u="none" strike="noStrike">
-                <a:solidFill>
-                  <a:srgbClr val="000000"/>
-                </a:solidFill>
-                <a:effectLst/>
-                <a:uFillTx/>
-                <a:latin typeface="Noto Sans CJK KR"/>
-              </a:rPr>
-              <a:t>※ 발표 대본은 </a:t>
-            </a:r>
-            <a:r>
-              <a:rPr lang="en-US" sz="2000" b="0" u="none" strike="noStrike">
-                <a:solidFill>
-                  <a:srgbClr val="000000"/>
-                </a:solidFill>
-                <a:effectLst/>
-                <a:uFillTx/>
-                <a:latin typeface="Noto Sans CJK KR"/>
-              </a:rPr>
-              <a:t>PRESENT-SCRIPT-01</a:t>
-            </a:r>
-            <a:r>
-              <a:rPr lang="ko-KR" sz="2000" b="0" u="none" strike="noStrike">
-                <a:solidFill>
-                  <a:srgbClr val="000000"/>
-                </a:solidFill>
-                <a:effectLst/>
-                <a:uFillTx/>
-                <a:latin typeface="Noto Sans CJK KR"/>
-              </a:rPr>
-              <a:t>이 이 </a:t>
-            </a:r>
-            <a:r>
-              <a:rPr lang="en-US" sz="2000" b="0" u="none" strike="noStrike">
-                <a:solidFill>
-                  <a:srgbClr val="000000"/>
-                </a:solidFill>
-                <a:effectLst/>
-                <a:uFillTx/>
-                <a:latin typeface="Noto Sans CJK KR"/>
-              </a:rPr>
-              <a:t>notes</a:t>
-            </a:r>
-            <a:r>
-              <a:rPr lang="ko-KR" sz="2000" b="0" u="none" strike="noStrike">
-                <a:solidFill>
-                  <a:srgbClr val="000000"/>
-                </a:solidFill>
-                <a:effectLst/>
-                <a:uFillTx/>
-                <a:latin typeface="Noto Sans CJK KR"/>
-              </a:rPr>
-              <a:t>를 대체한다</a:t>
-            </a:r>
-            <a:r>
-              <a:rPr lang="en-US" sz="2000" b="0" u="none" strike="noStrike">
-                <a:solidFill>
-                  <a:srgbClr val="000000"/>
-                </a:solidFill>
-                <a:effectLst/>
-                <a:uFillTx/>
-                <a:latin typeface="Noto Sans CJK KR"/>
-              </a:rPr>
-              <a:t>.</a:t>
-            </a:r>
-            <a:endParaRPr lang="en-US" sz="2000" b="0" u="none" strike="noStrike">
-              <a:solidFill>
-                <a:srgbClr val="000000"/>
-              </a:solidFill>
-              <a:effectLst/>
-              <a:uFillTx/>
-              <a:latin typeface="Noto Sans CJK KR"/>
-            </a:endParaRPr>
+          <a:p/>
+          <a:p>
+            <a:r>
+              <a:t>자체 평가입니다.</a:t>
+            </a:r>
+          </a:p>
+          <a:p>
+            <a:r>
+              <a:t>강점은 다시 세우는 것과 서명을 확인하는 게 실제로 돈다는 점입니다.</a:t>
+            </a:r>
+          </a:p>
+          <a:p>
+            <a:r>
+              <a:t>구성이 전부 Git에 있어서 지금 뭐가 떠 있는지 코드로 확인됩니다.</a:t>
+            </a:r>
+          </a:p>
+          <a:p>
+            <a:r>
+              <a:t>약점은 물리 노드가 한 대라 HA가 없다는 거고, 실시간 대응도 부족해서 지금은 사람이 승인해야 움직입니다.</a:t>
+            </a:r>
+          </a:p>
+          <a:p>
+            <a:r>
+              <a:t>노드가 한 대만 더 생기면 장애 도메인을 진짜로 나눌 수 있고, 그때 손댈 건 IaC 코드뿐입니다.</a:t>
+            </a:r>
           </a:p>
         </p:txBody>
       </p:sp>
@@ -7625,6 +3211,97 @@
       </p:sp>
     </p:spTree>
   </p:cSld>
+</p:notes>
+</file>
+
+<file path=ppt/notesSlides/notesSlide23.xml><?xml version="1.0" encoding="utf-8"?>
+<p:notes xmlns:a="http://schemas.openxmlformats.org/drawingml/2006/main" xmlns:p="http://schemas.openxmlformats.org/presentationml/2006/main" xmlns:r="http://schemas.openxmlformats.org/officeDocument/2006/relationships">
+  <p:cSld>
+    <p:spTree>
+      <p:nvGrpSpPr>
+        <p:cNvPr id="1" name=""/>
+        <p:cNvGrpSpPr/>
+        <p:nvPr/>
+      </p:nvGrpSpPr>
+      <p:grpSpPr>
+        <a:xfrm>
+          <a:off x="0" y="0"/>
+          <a:ext cx="0" cy="0"/>
+          <a:chOff x="0" y="0"/>
+          <a:chExt cx="0" cy="0"/>
+        </a:xfrm>
+      </p:grpSpPr>
+      <p:sp>
+        <p:nvSpPr>
+          <p:cNvPr id="2" name="Slide Image Placeholder 1"/>
+          <p:cNvSpPr>
+            <a:spLocks noGrp="1"/>
+          </p:cNvSpPr>
+          <p:nvPr>
+            <p:ph type="sldImg"/>
+          </p:nvPr>
+        </p:nvSpPr>
+        <p:spPr/>
+      </p:sp>
+      <p:sp>
+        <p:nvSpPr>
+          <p:cNvPr id="3" name="Notes Placeholder 2"/>
+          <p:cNvSpPr>
+            <a:spLocks noGrp="1"/>
+          </p:cNvSpPr>
+          <p:nvPr>
+            <p:ph type="body"/>
+          </p:nvPr>
+        </p:nvSpPr>
+        <p:spPr/>
+        <p:txBody>
+          <a:bodyPr/>
+          <a:lstStyle/>
+          <a:p>
+            <a:r>
+              <a:t>[23/23 · 0:19] 마무리</a:t>
+            </a:r>
+          </a:p>
+          <a:p/>
+          <a:p>
+            <a:r>
+              <a:t>정리하면 저희가 4주 동안 확인한 건 세 가지입니다.</a:t>
+            </a:r>
+          </a:p>
+          <a:p>
+            <a:r>
+              <a:t>접근은 한 곳에서 통제되고, 검증을 못 넘은 이미지는 배포되지 않고, 이상 징후는 사람 앞까지 옵니다.</a:t>
+            </a:r>
+          </a:p>
+          <a:p>
+            <a:r>
+              <a:t>발표 마치겠습니다. 감사합니다.</a:t>
+            </a:r>
+          </a:p>
+          <a:p>
+            <a:r>
+              <a:t>---</a:t>
+            </a:r>
+          </a:p>
+        </p:txBody>
+      </p:sp>
+      <p:sp>
+        <p:nvSpPr>
+          <p:cNvPr id="4" name="Slide Number Placeholder 3"/>
+          <p:cNvSpPr>
+            <a:spLocks noGrp="1"/>
+          </p:cNvSpPr>
+          <p:nvPr>
+            <p:ph type="sldNum" idx="3"/>
+          </p:nvPr>
+        </p:nvSpPr>
+        <p:spPr/>
+      </p:sp>
+    </p:spTree>
+  </p:cSld>
+  <p:clrMapOvr>
+    <a:masterClrMapping/>
+  </p:clrMapOvr>
 </p:notes>
 </file>
 
@@ -7706,26 +3383,7 @@
               </a:tabLst>
             </a:pPr>
             <a:r>
-              <a:rPr lang="en-US" sz="2000" b="0" u="none" strike="noStrike">
-                <a:solidFill>
-                  <a:srgbClr val="000000"/>
-                </a:solidFill>
-                <a:effectLst/>
-                <a:uFillTx/>
-                <a:latin typeface="Noto Sans CJK KR"/>
-              </a:rPr>
-              <a:t>[5/22 · 00:30] Bean Team 5</a:t>
-            </a:r>
-            <a:r>
-              <a:rPr lang="ko-KR" sz="2000" b="0" u="none" strike="noStrike">
-                <a:solidFill>
-                  <a:srgbClr val="000000"/>
-                </a:solidFill>
-                <a:effectLst/>
-                <a:uFillTx/>
-                <a:latin typeface="Noto Sans CJK KR"/>
-              </a:rPr>
-              <a:t>인 구성</a:t>
+              <a:t>[3/23 · 0:40] 침해 사례</a:t>
             </a:r>
             <a:endParaRPr lang="en-US" sz="2000" b="0" u="none" strike="noStrike">
               <a:solidFill>
@@ -7736,358 +3394,36 @@
               <a:latin typeface="Noto Sans CJK KR"/>
             </a:endParaRPr>
           </a:p>
-          <a:p>
-            <a:pPr indent="0" algn="l">
-              <a:lnSpc>
-                <a:spcPct val="100000"/>
-              </a:lnSpc>
-              <a:buNone/>
-              <a:tabLst>
-                <a:tab pos="0" algn="l"/>
-              </a:tabLst>
-            </a:pPr>
-            <a:endParaRPr lang="en-US" sz="2000" b="0" u="none" strike="noStrike">
-              <a:solidFill>
-                <a:srgbClr val="000000"/>
-              </a:solidFill>
-              <a:effectLst/>
-              <a:uFillTx/>
-              <a:latin typeface="Noto Sans CJK KR"/>
-            </a:endParaRPr>
-          </a:p>
-          <a:p>
-            <a:pPr indent="0" algn="l">
-              <a:lnSpc>
-                <a:spcPct val="100000"/>
-              </a:lnSpc>
-              <a:buNone/>
-              <a:tabLst>
-                <a:tab pos="0" algn="l"/>
-              </a:tabLst>
-            </a:pPr>
-            <a:r>
-              <a:rPr lang="en-US" sz="2000" b="0" u="none" strike="noStrike">
-                <a:solidFill>
-                  <a:srgbClr val="000000"/>
-                </a:solidFill>
-                <a:effectLst/>
-                <a:uFillTx/>
-                <a:latin typeface="Noto Sans CJK KR"/>
-              </a:rPr>
-              <a:t>PURPOSE: </a:t>
-            </a:r>
-            <a:r>
-              <a:rPr lang="ko-KR" sz="2000" b="0" u="none" strike="noStrike">
-                <a:solidFill>
-                  <a:srgbClr val="000000"/>
-                </a:solidFill>
-                <a:effectLst/>
-                <a:uFillTx/>
-                <a:latin typeface="Noto Sans CJK KR"/>
-              </a:rPr>
-              <a:t>누가 무엇을 맡았는지 한 번에 보여준다</a:t>
-            </a:r>
-            <a:r>
-              <a:rPr lang="en-US" sz="2000" b="0" u="none" strike="noStrike">
-                <a:solidFill>
-                  <a:srgbClr val="000000"/>
-                </a:solidFill>
-                <a:effectLst/>
-                <a:uFillTx/>
-                <a:latin typeface="Noto Sans CJK KR"/>
-              </a:rPr>
-              <a:t>.</a:t>
-            </a:r>
-            <a:endParaRPr lang="en-US" sz="2000" b="0" u="none" strike="noStrike">
-              <a:solidFill>
-                <a:srgbClr val="000000"/>
-              </a:solidFill>
-              <a:effectLst/>
-              <a:uFillTx/>
-              <a:latin typeface="Noto Sans CJK KR"/>
-            </a:endParaRPr>
-          </a:p>
-          <a:p>
-            <a:pPr indent="0" algn="l">
-              <a:lnSpc>
-                <a:spcPct val="100000"/>
-              </a:lnSpc>
-              <a:buNone/>
-              <a:tabLst>
-                <a:tab pos="0" algn="l"/>
-              </a:tabLst>
-            </a:pPr>
-            <a:r>
-              <a:rPr lang="en-US" sz="2000" b="0" u="none" strike="noStrike">
-                <a:solidFill>
-                  <a:srgbClr val="000000"/>
-                </a:solidFill>
-                <a:effectLst/>
-                <a:uFillTx/>
-                <a:latin typeface="Noto Sans CJK KR"/>
-              </a:rPr>
-              <a:t>MESSAGE: 5</a:t>
-            </a:r>
-            <a:r>
-              <a:rPr lang="ko-KR" sz="2000" b="0" u="none" strike="noStrike">
-                <a:solidFill>
-                  <a:srgbClr val="000000"/>
-                </a:solidFill>
-                <a:effectLst/>
-                <a:uFillTx/>
-                <a:latin typeface="Noto Sans CJK KR"/>
-              </a:rPr>
-              <a:t>인이 인프라</a:t>
-            </a:r>
-            <a:r>
-              <a:rPr lang="en-US" sz="2000" b="0" u="none" strike="noStrike">
-                <a:solidFill>
-                  <a:srgbClr val="000000"/>
-                </a:solidFill>
-                <a:effectLst/>
-                <a:uFillTx/>
-                <a:latin typeface="Noto Sans CJK KR"/>
-              </a:rPr>
-              <a:t>·</a:t>
-            </a:r>
-            <a:r>
-              <a:rPr lang="ko-KR" sz="2000" b="0" u="none" strike="noStrike">
-                <a:solidFill>
-                  <a:srgbClr val="000000"/>
-                </a:solidFill>
-                <a:effectLst/>
-                <a:uFillTx/>
-                <a:latin typeface="Noto Sans CJK KR"/>
-              </a:rPr>
-              <a:t>보안</a:t>
-            </a:r>
-            <a:r>
-              <a:rPr lang="en-US" sz="2000" b="0" u="none" strike="noStrike">
-                <a:solidFill>
-                  <a:srgbClr val="000000"/>
-                </a:solidFill>
-                <a:effectLst/>
-                <a:uFillTx/>
-                <a:latin typeface="Noto Sans CJK KR"/>
-              </a:rPr>
-              <a:t>·</a:t>
-            </a:r>
-            <a:r>
-              <a:rPr lang="ko-KR" sz="2000" b="0" u="none" strike="noStrike">
-                <a:solidFill>
-                  <a:srgbClr val="000000"/>
-                </a:solidFill>
-                <a:effectLst/>
-                <a:uFillTx/>
-                <a:latin typeface="Noto Sans CJK KR"/>
-              </a:rPr>
-              <a:t>애플리케이션 영역을 나눠 맡았다</a:t>
-            </a:r>
-            <a:r>
-              <a:rPr lang="en-US" sz="2000" b="0" u="none" strike="noStrike">
-                <a:solidFill>
-                  <a:srgbClr val="000000"/>
-                </a:solidFill>
-                <a:effectLst/>
-                <a:uFillTx/>
-                <a:latin typeface="Noto Sans CJK KR"/>
-              </a:rPr>
-              <a:t>.</a:t>
-            </a:r>
-            <a:endParaRPr lang="en-US" sz="2000" b="0" u="none" strike="noStrike">
-              <a:solidFill>
-                <a:srgbClr val="000000"/>
-              </a:solidFill>
-              <a:effectLst/>
-              <a:uFillTx/>
-              <a:latin typeface="Noto Sans CJK KR"/>
-            </a:endParaRPr>
-          </a:p>
-          <a:p>
-            <a:pPr indent="0" algn="l">
-              <a:lnSpc>
-                <a:spcPct val="100000"/>
-              </a:lnSpc>
-              <a:buNone/>
-              <a:tabLst>
-                <a:tab pos="0" algn="l"/>
-              </a:tabLst>
-            </a:pPr>
-            <a:r>
-              <a:rPr lang="en-US" sz="2000" b="0" u="none" strike="noStrike">
-                <a:solidFill>
-                  <a:srgbClr val="000000"/>
-                </a:solidFill>
-                <a:effectLst/>
-                <a:uFillTx/>
-                <a:latin typeface="Noto Sans CJK KR"/>
-              </a:rPr>
-              <a:t>ASSET: native </a:t>
-            </a:r>
-            <a:r>
-              <a:rPr lang="ko-KR" sz="2000" b="0" u="none" strike="noStrike">
-                <a:solidFill>
-                  <a:srgbClr val="000000"/>
-                </a:solidFill>
-                <a:effectLst/>
-                <a:uFillTx/>
-                <a:latin typeface="Noto Sans CJK KR"/>
-              </a:rPr>
-              <a:t>도형</a:t>
-            </a:r>
-            <a:endParaRPr lang="en-US" sz="2000" b="0" u="none" strike="noStrike">
-              <a:solidFill>
-                <a:srgbClr val="000000"/>
-              </a:solidFill>
-              <a:effectLst/>
-              <a:uFillTx/>
-              <a:latin typeface="Noto Sans CJK KR"/>
-            </a:endParaRPr>
-          </a:p>
-          <a:p>
-            <a:pPr indent="0" algn="l">
-              <a:lnSpc>
-                <a:spcPct val="100000"/>
-              </a:lnSpc>
-              <a:buNone/>
-              <a:tabLst>
-                <a:tab pos="0" algn="l"/>
-              </a:tabLst>
-            </a:pPr>
-            <a:r>
-              <a:rPr lang="en-US" sz="2000" b="0" u="none" strike="noStrike">
-                <a:solidFill>
-                  <a:srgbClr val="000000"/>
-                </a:solidFill>
-                <a:effectLst/>
-                <a:uFillTx/>
-                <a:latin typeface="Noto Sans CJK KR"/>
-              </a:rPr>
-              <a:t>EVIDENCE: PRESENT-PLAN-01 </a:t>
-            </a:r>
-            <a:r>
-              <a:rPr lang="ko-KR" sz="2000" b="0" u="none" strike="noStrike">
-                <a:solidFill>
-                  <a:srgbClr val="000000"/>
-                </a:solidFill>
-                <a:effectLst/>
-                <a:uFillTx/>
-                <a:latin typeface="Noto Sans CJK KR"/>
-              </a:rPr>
-              <a:t>팀 구성 확정</a:t>
-            </a:r>
-            <a:endParaRPr lang="en-US" sz="2000" b="0" u="none" strike="noStrike">
-              <a:solidFill>
-                <a:srgbClr val="000000"/>
-              </a:solidFill>
-              <a:effectLst/>
-              <a:uFillTx/>
-              <a:latin typeface="Noto Sans CJK KR"/>
-            </a:endParaRPr>
-          </a:p>
-          <a:p>
-            <a:pPr indent="0" algn="l">
-              <a:lnSpc>
-                <a:spcPct val="100000"/>
-              </a:lnSpc>
-              <a:buNone/>
-              <a:tabLst>
-                <a:tab pos="0" algn="l"/>
-              </a:tabLst>
-            </a:pPr>
-            <a:endParaRPr lang="en-US" sz="2000" b="0" u="none" strike="noStrike">
-              <a:solidFill>
-                <a:srgbClr val="000000"/>
-              </a:solidFill>
-              <a:effectLst/>
-              <a:uFillTx/>
-              <a:latin typeface="Noto Sans CJK KR"/>
-            </a:endParaRPr>
-          </a:p>
-          <a:p>
-            <a:pPr indent="0" algn="l">
-              <a:lnSpc>
-                <a:spcPct val="100000"/>
-              </a:lnSpc>
-              <a:buNone/>
-              <a:tabLst>
-                <a:tab pos="0" algn="l"/>
-              </a:tabLst>
-            </a:pPr>
-            <a:r>
-              <a:rPr lang="en-US" sz="2000" b="0" u="none" strike="noStrike">
-                <a:solidFill>
-                  <a:srgbClr val="000000"/>
-                </a:solidFill>
-                <a:effectLst/>
-                <a:uFillTx/>
-                <a:latin typeface="Noto Sans CJK KR"/>
-              </a:rPr>
-              <a:t>※ 발표 대본은 </a:t>
-            </a:r>
-            <a:r>
-              <a:rPr lang="en-US" sz="2000" b="0" u="none" strike="noStrike">
-                <a:solidFill>
-                  <a:srgbClr val="000000"/>
-                </a:solidFill>
-                <a:effectLst/>
-                <a:uFillTx/>
-                <a:latin typeface="Noto Sans CJK KR"/>
-              </a:rPr>
-              <a:t>PRESENT-SCRIPT-01</a:t>
-            </a:r>
-            <a:r>
-              <a:rPr lang="ko-KR" sz="2000" b="0" u="none" strike="noStrike">
-                <a:solidFill>
-                  <a:srgbClr val="000000"/>
-                </a:solidFill>
-                <a:effectLst/>
-                <a:uFillTx/>
-                <a:latin typeface="Noto Sans CJK KR"/>
-              </a:rPr>
-              <a:t>이 이 </a:t>
-            </a:r>
-            <a:r>
-              <a:rPr lang="en-US" sz="2000" b="0" u="none" strike="noStrike">
-                <a:solidFill>
-                  <a:srgbClr val="000000"/>
-                </a:solidFill>
-                <a:effectLst/>
-                <a:uFillTx/>
-                <a:latin typeface="Noto Sans CJK KR"/>
-              </a:rPr>
-              <a:t>notes</a:t>
-            </a:r>
-            <a:r>
-              <a:rPr lang="ko-KR" sz="2000" b="0" u="none" strike="noStrike">
-                <a:solidFill>
-                  <a:srgbClr val="000000"/>
-                </a:solidFill>
-                <a:effectLst/>
-                <a:uFillTx/>
-                <a:latin typeface="Noto Sans CJK KR"/>
-              </a:rPr>
-              <a:t>를 대체한다</a:t>
-            </a:r>
-            <a:r>
-              <a:rPr lang="en-US" sz="2000" b="0" u="none" strike="noStrike">
-                <a:solidFill>
-                  <a:srgbClr val="000000"/>
-                </a:solidFill>
-                <a:effectLst/>
-                <a:uFillTx/>
-                <a:latin typeface="Noto Sans CJK KR"/>
-              </a:rPr>
-              <a:t>.</a:t>
-            </a:r>
-            <a:endParaRPr lang="en-US" sz="2000" b="0" u="none" strike="noStrike">
-              <a:solidFill>
-                <a:srgbClr val="000000"/>
-              </a:solidFill>
-              <a:effectLst/>
-              <a:uFillTx/>
-              <a:latin typeface="Noto Sans CJK KR"/>
-            </a:endParaRPr>
+          <a:p/>
+          <a:p>
+            <a:r>
+              <a:t>계기는 실제 사고들입니다.</a:t>
+            </a:r>
+          </a:p>
+          <a:p>
+            <a:r>
+              <a:t>쿠팡은 전직 내부 직원 한 명이 회원 3,370만 건을 빼냈습니다. 외부 침입이 아니라 권한을 이미 가진 사람이었고요.</a:t>
+            </a:r>
+          </a:p>
+          <a:p>
+            <a:r>
+              <a:t>패스트캠퍼스는 GitHub 마스터 계정 키값 하나가 탈취되면서 뚫렸습니다.</a:t>
+            </a:r>
+          </a:p>
+          <a:p>
+            <a:r>
+              <a:t>KT는 불법 초소형 기지국으로 가입자 식별번호가 샜고,</a:t>
+            </a:r>
+          </a:p>
+          <a:p>
+            <a:r>
+              <a:t>YES24는 랜섬웨어로 멈춘 뒤 두 달 만에 또 맞았습니다.</a:t>
+            </a:r>
+          </a:p>
+          <a:p>
+            <a:r>
+              <a:t>원인은 다 다른데, 결과를 가른 건 권한과 비밀 정보, 복구 준비였습니다.</a:t>
+            </a:r>
           </a:p>
         </p:txBody>
       </p:sp>
@@ -8254,26 +3590,7 @@
               </a:tabLst>
             </a:pPr>
             <a:r>
-              <a:rPr lang="en-US" sz="2000" b="0" u="none" strike="noStrike">
-                <a:solidFill>
-                  <a:srgbClr val="000000"/>
-                </a:solidFill>
-                <a:effectLst/>
-                <a:uFillTx/>
-                <a:latin typeface="Noto Sans CJK KR"/>
-              </a:rPr>
-              <a:t>[5/22 · 00:30] Bean Team 5</a:t>
-            </a:r>
-            <a:r>
-              <a:rPr lang="ko-KR" sz="2000" b="0" u="none" strike="noStrike">
-                <a:solidFill>
-                  <a:srgbClr val="000000"/>
-                </a:solidFill>
-                <a:effectLst/>
-                <a:uFillTx/>
-                <a:latin typeface="Noto Sans CJK KR"/>
-              </a:rPr>
-              <a:t>인 구성</a:t>
+              <a:t>[4/23 · 0:27] 문제 정의</a:t>
             </a:r>
             <a:endParaRPr lang="en-US" sz="2000" b="0" u="none" strike="noStrike">
               <a:solidFill>
@@ -8284,358 +3601,31 @@
               <a:latin typeface="Noto Sans CJK KR"/>
             </a:endParaRPr>
           </a:p>
-          <a:p>
-            <a:pPr indent="0" algn="l">
-              <a:lnSpc>
-                <a:spcPct val="100000"/>
-              </a:lnSpc>
-              <a:buNone/>
-              <a:tabLst>
-                <a:tab pos="0" algn="l"/>
-              </a:tabLst>
-            </a:pPr>
-            <a:endParaRPr lang="en-US" sz="2000" b="0" u="none" strike="noStrike">
-              <a:solidFill>
-                <a:srgbClr val="000000"/>
-              </a:solidFill>
-              <a:effectLst/>
-              <a:uFillTx/>
-              <a:latin typeface="Noto Sans CJK KR"/>
-            </a:endParaRPr>
-          </a:p>
-          <a:p>
-            <a:pPr indent="0" algn="l">
-              <a:lnSpc>
-                <a:spcPct val="100000"/>
-              </a:lnSpc>
-              <a:buNone/>
-              <a:tabLst>
-                <a:tab pos="0" algn="l"/>
-              </a:tabLst>
-            </a:pPr>
-            <a:r>
-              <a:rPr lang="en-US" sz="2000" b="0" u="none" strike="noStrike">
-                <a:solidFill>
-                  <a:srgbClr val="000000"/>
-                </a:solidFill>
-                <a:effectLst/>
-                <a:uFillTx/>
-                <a:latin typeface="Noto Sans CJK KR"/>
-              </a:rPr>
-              <a:t>PURPOSE: </a:t>
-            </a:r>
-            <a:r>
-              <a:rPr lang="ko-KR" sz="2000" b="0" u="none" strike="noStrike">
-                <a:solidFill>
-                  <a:srgbClr val="000000"/>
-                </a:solidFill>
-                <a:effectLst/>
-                <a:uFillTx/>
-                <a:latin typeface="Noto Sans CJK KR"/>
-              </a:rPr>
-              <a:t>누가 무엇을 맡았는지 한 번에 보여준다</a:t>
-            </a:r>
-            <a:r>
-              <a:rPr lang="en-US" sz="2000" b="0" u="none" strike="noStrike">
-                <a:solidFill>
-                  <a:srgbClr val="000000"/>
-                </a:solidFill>
-                <a:effectLst/>
-                <a:uFillTx/>
-                <a:latin typeface="Noto Sans CJK KR"/>
-              </a:rPr>
-              <a:t>.</a:t>
-            </a:r>
-            <a:endParaRPr lang="en-US" sz="2000" b="0" u="none" strike="noStrike">
-              <a:solidFill>
-                <a:srgbClr val="000000"/>
-              </a:solidFill>
-              <a:effectLst/>
-              <a:uFillTx/>
-              <a:latin typeface="Noto Sans CJK KR"/>
-            </a:endParaRPr>
-          </a:p>
-          <a:p>
-            <a:pPr indent="0" algn="l">
-              <a:lnSpc>
-                <a:spcPct val="100000"/>
-              </a:lnSpc>
-              <a:buNone/>
-              <a:tabLst>
-                <a:tab pos="0" algn="l"/>
-              </a:tabLst>
-            </a:pPr>
-            <a:r>
-              <a:rPr lang="en-US" sz="2000" b="0" u="none" strike="noStrike">
-                <a:solidFill>
-                  <a:srgbClr val="000000"/>
-                </a:solidFill>
-                <a:effectLst/>
-                <a:uFillTx/>
-                <a:latin typeface="Noto Sans CJK KR"/>
-              </a:rPr>
-              <a:t>MESSAGE: 5</a:t>
-            </a:r>
-            <a:r>
-              <a:rPr lang="ko-KR" sz="2000" b="0" u="none" strike="noStrike">
-                <a:solidFill>
-                  <a:srgbClr val="000000"/>
-                </a:solidFill>
-                <a:effectLst/>
-                <a:uFillTx/>
-                <a:latin typeface="Noto Sans CJK KR"/>
-              </a:rPr>
-              <a:t>인이 인프라</a:t>
-            </a:r>
-            <a:r>
-              <a:rPr lang="en-US" sz="2000" b="0" u="none" strike="noStrike">
-                <a:solidFill>
-                  <a:srgbClr val="000000"/>
-                </a:solidFill>
-                <a:effectLst/>
-                <a:uFillTx/>
-                <a:latin typeface="Noto Sans CJK KR"/>
-              </a:rPr>
-              <a:t>·</a:t>
-            </a:r>
-            <a:r>
-              <a:rPr lang="ko-KR" sz="2000" b="0" u="none" strike="noStrike">
-                <a:solidFill>
-                  <a:srgbClr val="000000"/>
-                </a:solidFill>
-                <a:effectLst/>
-                <a:uFillTx/>
-                <a:latin typeface="Noto Sans CJK KR"/>
-              </a:rPr>
-              <a:t>보안</a:t>
-            </a:r>
-            <a:r>
-              <a:rPr lang="en-US" sz="2000" b="0" u="none" strike="noStrike">
-                <a:solidFill>
-                  <a:srgbClr val="000000"/>
-                </a:solidFill>
-                <a:effectLst/>
-                <a:uFillTx/>
-                <a:latin typeface="Noto Sans CJK KR"/>
-              </a:rPr>
-              <a:t>·</a:t>
-            </a:r>
-            <a:r>
-              <a:rPr lang="ko-KR" sz="2000" b="0" u="none" strike="noStrike">
-                <a:solidFill>
-                  <a:srgbClr val="000000"/>
-                </a:solidFill>
-                <a:effectLst/>
-                <a:uFillTx/>
-                <a:latin typeface="Noto Sans CJK KR"/>
-              </a:rPr>
-              <a:t>애플리케이션 영역을 나눠 맡았다</a:t>
-            </a:r>
-            <a:r>
-              <a:rPr lang="en-US" sz="2000" b="0" u="none" strike="noStrike">
-                <a:solidFill>
-                  <a:srgbClr val="000000"/>
-                </a:solidFill>
-                <a:effectLst/>
-                <a:uFillTx/>
-                <a:latin typeface="Noto Sans CJK KR"/>
-              </a:rPr>
-              <a:t>.</a:t>
-            </a:r>
-            <a:endParaRPr lang="en-US" sz="2000" b="0" u="none" strike="noStrike">
-              <a:solidFill>
-                <a:srgbClr val="000000"/>
-              </a:solidFill>
-              <a:effectLst/>
-              <a:uFillTx/>
-              <a:latin typeface="Noto Sans CJK KR"/>
-            </a:endParaRPr>
-          </a:p>
-          <a:p>
-            <a:pPr indent="0" algn="l">
-              <a:lnSpc>
-                <a:spcPct val="100000"/>
-              </a:lnSpc>
-              <a:buNone/>
-              <a:tabLst>
-                <a:tab pos="0" algn="l"/>
-              </a:tabLst>
-            </a:pPr>
-            <a:r>
-              <a:rPr lang="en-US" sz="2000" b="0" u="none" strike="noStrike">
-                <a:solidFill>
-                  <a:srgbClr val="000000"/>
-                </a:solidFill>
-                <a:effectLst/>
-                <a:uFillTx/>
-                <a:latin typeface="Noto Sans CJK KR"/>
-              </a:rPr>
-              <a:t>ASSET: native </a:t>
-            </a:r>
-            <a:r>
-              <a:rPr lang="ko-KR" sz="2000" b="0" u="none" strike="noStrike">
-                <a:solidFill>
-                  <a:srgbClr val="000000"/>
-                </a:solidFill>
-                <a:effectLst/>
-                <a:uFillTx/>
-                <a:latin typeface="Noto Sans CJK KR"/>
-              </a:rPr>
-              <a:t>도형</a:t>
-            </a:r>
-            <a:endParaRPr lang="en-US" sz="2000" b="0" u="none" strike="noStrike">
-              <a:solidFill>
-                <a:srgbClr val="000000"/>
-              </a:solidFill>
-              <a:effectLst/>
-              <a:uFillTx/>
-              <a:latin typeface="Noto Sans CJK KR"/>
-            </a:endParaRPr>
-          </a:p>
-          <a:p>
-            <a:pPr indent="0" algn="l">
-              <a:lnSpc>
-                <a:spcPct val="100000"/>
-              </a:lnSpc>
-              <a:buNone/>
-              <a:tabLst>
-                <a:tab pos="0" algn="l"/>
-              </a:tabLst>
-            </a:pPr>
-            <a:r>
-              <a:rPr lang="en-US" sz="2000" b="0" u="none" strike="noStrike">
-                <a:solidFill>
-                  <a:srgbClr val="000000"/>
-                </a:solidFill>
-                <a:effectLst/>
-                <a:uFillTx/>
-                <a:latin typeface="Noto Sans CJK KR"/>
-              </a:rPr>
-              <a:t>EVIDENCE: PRESENT-PLAN-01 </a:t>
-            </a:r>
-            <a:r>
-              <a:rPr lang="ko-KR" sz="2000" b="0" u="none" strike="noStrike">
-                <a:solidFill>
-                  <a:srgbClr val="000000"/>
-                </a:solidFill>
-                <a:effectLst/>
-                <a:uFillTx/>
-                <a:latin typeface="Noto Sans CJK KR"/>
-              </a:rPr>
-              <a:t>팀 구성 확정</a:t>
-            </a:r>
-            <a:endParaRPr lang="en-US" sz="2000" b="0" u="none" strike="noStrike">
-              <a:solidFill>
-                <a:srgbClr val="000000"/>
-              </a:solidFill>
-              <a:effectLst/>
-              <a:uFillTx/>
-              <a:latin typeface="Noto Sans CJK KR"/>
-            </a:endParaRPr>
-          </a:p>
-          <a:p>
-            <a:pPr indent="0" algn="l">
-              <a:lnSpc>
-                <a:spcPct val="100000"/>
-              </a:lnSpc>
-              <a:buNone/>
-              <a:tabLst>
-                <a:tab pos="0" algn="l"/>
-              </a:tabLst>
-            </a:pPr>
-            <a:endParaRPr lang="en-US" sz="2000" b="0" u="none" strike="noStrike">
-              <a:solidFill>
-                <a:srgbClr val="000000"/>
-              </a:solidFill>
-              <a:effectLst/>
-              <a:uFillTx/>
-              <a:latin typeface="Noto Sans CJK KR"/>
-            </a:endParaRPr>
-          </a:p>
-          <a:p>
-            <a:pPr indent="0" algn="l">
-              <a:lnSpc>
-                <a:spcPct val="100000"/>
-              </a:lnSpc>
-              <a:buNone/>
-              <a:tabLst>
-                <a:tab pos="0" algn="l"/>
-              </a:tabLst>
-            </a:pPr>
-            <a:r>
-              <a:rPr lang="en-US" sz="2000" b="0" u="none" strike="noStrike">
-                <a:solidFill>
-                  <a:srgbClr val="000000"/>
-                </a:solidFill>
-                <a:effectLst/>
-                <a:uFillTx/>
-                <a:latin typeface="Noto Sans CJK KR"/>
-              </a:rPr>
-              <a:t>※ 발표 대본은 </a:t>
-            </a:r>
-            <a:r>
-              <a:rPr lang="en-US" sz="2000" b="0" u="none" strike="noStrike">
-                <a:solidFill>
-                  <a:srgbClr val="000000"/>
-                </a:solidFill>
-                <a:effectLst/>
-                <a:uFillTx/>
-                <a:latin typeface="Noto Sans CJK KR"/>
-              </a:rPr>
-              <a:t>PRESENT-SCRIPT-01</a:t>
-            </a:r>
-            <a:r>
-              <a:rPr lang="ko-KR" sz="2000" b="0" u="none" strike="noStrike">
-                <a:solidFill>
-                  <a:srgbClr val="000000"/>
-                </a:solidFill>
-                <a:effectLst/>
-                <a:uFillTx/>
-                <a:latin typeface="Noto Sans CJK KR"/>
-              </a:rPr>
-              <a:t>이 이 </a:t>
-            </a:r>
-            <a:r>
-              <a:rPr lang="en-US" sz="2000" b="0" u="none" strike="noStrike">
-                <a:solidFill>
-                  <a:srgbClr val="000000"/>
-                </a:solidFill>
-                <a:effectLst/>
-                <a:uFillTx/>
-                <a:latin typeface="Noto Sans CJK KR"/>
-              </a:rPr>
-              <a:t>notes</a:t>
-            </a:r>
-            <a:r>
-              <a:rPr lang="ko-KR" sz="2000" b="0" u="none" strike="noStrike">
-                <a:solidFill>
-                  <a:srgbClr val="000000"/>
-                </a:solidFill>
-                <a:effectLst/>
-                <a:uFillTx/>
-                <a:latin typeface="Noto Sans CJK KR"/>
-              </a:rPr>
-              <a:t>를 대체한다</a:t>
-            </a:r>
-            <a:r>
-              <a:rPr lang="en-US" sz="2000" b="0" u="none" strike="noStrike">
-                <a:solidFill>
-                  <a:srgbClr val="000000"/>
-                </a:solidFill>
-                <a:effectLst/>
-                <a:uFillTx/>
-                <a:latin typeface="Noto Sans CJK KR"/>
-              </a:rPr>
-              <a:t>.</a:t>
-            </a:r>
-            <a:endParaRPr lang="en-US" sz="2000" b="0" u="none" strike="noStrike">
-              <a:solidFill>
-                <a:srgbClr val="000000"/>
-              </a:solidFill>
-              <a:effectLst/>
-              <a:uFillTx/>
-              <a:latin typeface="Noto Sans CJK KR"/>
-            </a:endParaRPr>
+          <a:p/>
+          <a:p>
+            <a:r>
+              <a:t>그래서 세 가지를 기준으로 잡았습니다.</a:t>
+            </a:r>
+          </a:p>
+          <a:p>
+            <a:r>
+              <a:t>접근 권한을 한 곳에서 관리할 수 있는지, 비밀 정보가 코드에 남지 않는지,</a:t>
+            </a:r>
+          </a:p>
+          <a:p>
+            <a:r>
+              <a:t>장애가 났을 때 되짚을 기록이 남는지입니다.</a:t>
+            </a:r>
+          </a:p>
+          <a:p>
+            <a:r>
+              <a:t>이걸 온프레미스에서만 풀면 반쪽이라고 봤습니다.</a:t>
+            </a:r>
+          </a:p>
+          <a:p>
+            <a:r>
+              <a:t>실제 환경이 하이브리드니까 저희도 양쪽을 같은 규칙으로 묶기로 했습니다.</a:t>
+            </a:r>
           </a:p>
         </p:txBody>
       </p:sp>
@@ -8802,26 +3792,7 @@
               </a:tabLst>
             </a:pPr>
             <a:r>
-              <a:rPr lang="en-US" sz="2000" b="0" u="none" strike="noStrike">
-                <a:solidFill>
-                  <a:srgbClr val="000000"/>
-                </a:solidFill>
-                <a:effectLst/>
-                <a:uFillTx/>
-                <a:latin typeface="Noto Sans CJK KR"/>
-              </a:rPr>
-              <a:t>[5/22 · 00:30] Bean Team 5</a:t>
-            </a:r>
-            <a:r>
-              <a:rPr lang="ko-KR" sz="2000" b="0" u="none" strike="noStrike">
-                <a:solidFill>
-                  <a:srgbClr val="000000"/>
-                </a:solidFill>
-                <a:effectLst/>
-                <a:uFillTx/>
-                <a:latin typeface="Noto Sans CJK KR"/>
-              </a:rPr>
-              <a:t>인 구성</a:t>
+              <a:t>[5/23 · 0:35] 팀 구성</a:t>
             </a:r>
             <a:endParaRPr lang="en-US" sz="2000" b="0" u="none" strike="noStrike">
               <a:solidFill>
@@ -8832,358 +3803,31 @@
               <a:latin typeface="Noto Sans CJK KR"/>
             </a:endParaRPr>
           </a:p>
-          <a:p>
-            <a:pPr indent="0" algn="l">
-              <a:lnSpc>
-                <a:spcPct val="100000"/>
-              </a:lnSpc>
-              <a:buNone/>
-              <a:tabLst>
-                <a:tab pos="0" algn="l"/>
-              </a:tabLst>
-            </a:pPr>
-            <a:endParaRPr lang="en-US" sz="2000" b="0" u="none" strike="noStrike">
-              <a:solidFill>
-                <a:srgbClr val="000000"/>
-              </a:solidFill>
-              <a:effectLst/>
-              <a:uFillTx/>
-              <a:latin typeface="Noto Sans CJK KR"/>
-            </a:endParaRPr>
-          </a:p>
-          <a:p>
-            <a:pPr indent="0" algn="l">
-              <a:lnSpc>
-                <a:spcPct val="100000"/>
-              </a:lnSpc>
-              <a:buNone/>
-              <a:tabLst>
-                <a:tab pos="0" algn="l"/>
-              </a:tabLst>
-            </a:pPr>
-            <a:r>
-              <a:rPr lang="en-US" sz="2000" b="0" u="none" strike="noStrike">
-                <a:solidFill>
-                  <a:srgbClr val="000000"/>
-                </a:solidFill>
-                <a:effectLst/>
-                <a:uFillTx/>
-                <a:latin typeface="Noto Sans CJK KR"/>
-              </a:rPr>
-              <a:t>PURPOSE: </a:t>
-            </a:r>
-            <a:r>
-              <a:rPr lang="ko-KR" sz="2000" b="0" u="none" strike="noStrike">
-                <a:solidFill>
-                  <a:srgbClr val="000000"/>
-                </a:solidFill>
-                <a:effectLst/>
-                <a:uFillTx/>
-                <a:latin typeface="Noto Sans CJK KR"/>
-              </a:rPr>
-              <a:t>누가 무엇을 맡았는지 한 번에 보여준다</a:t>
-            </a:r>
-            <a:r>
-              <a:rPr lang="en-US" sz="2000" b="0" u="none" strike="noStrike">
-                <a:solidFill>
-                  <a:srgbClr val="000000"/>
-                </a:solidFill>
-                <a:effectLst/>
-                <a:uFillTx/>
-                <a:latin typeface="Noto Sans CJK KR"/>
-              </a:rPr>
-              <a:t>.</a:t>
-            </a:r>
-            <a:endParaRPr lang="en-US" sz="2000" b="0" u="none" strike="noStrike">
-              <a:solidFill>
-                <a:srgbClr val="000000"/>
-              </a:solidFill>
-              <a:effectLst/>
-              <a:uFillTx/>
-              <a:latin typeface="Noto Sans CJK KR"/>
-            </a:endParaRPr>
-          </a:p>
-          <a:p>
-            <a:pPr indent="0" algn="l">
-              <a:lnSpc>
-                <a:spcPct val="100000"/>
-              </a:lnSpc>
-              <a:buNone/>
-              <a:tabLst>
-                <a:tab pos="0" algn="l"/>
-              </a:tabLst>
-            </a:pPr>
-            <a:r>
-              <a:rPr lang="en-US" sz="2000" b="0" u="none" strike="noStrike">
-                <a:solidFill>
-                  <a:srgbClr val="000000"/>
-                </a:solidFill>
-                <a:effectLst/>
-                <a:uFillTx/>
-                <a:latin typeface="Noto Sans CJK KR"/>
-              </a:rPr>
-              <a:t>MESSAGE: 5</a:t>
-            </a:r>
-            <a:r>
-              <a:rPr lang="ko-KR" sz="2000" b="0" u="none" strike="noStrike">
-                <a:solidFill>
-                  <a:srgbClr val="000000"/>
-                </a:solidFill>
-                <a:effectLst/>
-                <a:uFillTx/>
-                <a:latin typeface="Noto Sans CJK KR"/>
-              </a:rPr>
-              <a:t>인이 인프라</a:t>
-            </a:r>
-            <a:r>
-              <a:rPr lang="en-US" sz="2000" b="0" u="none" strike="noStrike">
-                <a:solidFill>
-                  <a:srgbClr val="000000"/>
-                </a:solidFill>
-                <a:effectLst/>
-                <a:uFillTx/>
-                <a:latin typeface="Noto Sans CJK KR"/>
-              </a:rPr>
-              <a:t>·</a:t>
-            </a:r>
-            <a:r>
-              <a:rPr lang="ko-KR" sz="2000" b="0" u="none" strike="noStrike">
-                <a:solidFill>
-                  <a:srgbClr val="000000"/>
-                </a:solidFill>
-                <a:effectLst/>
-                <a:uFillTx/>
-                <a:latin typeface="Noto Sans CJK KR"/>
-              </a:rPr>
-              <a:t>보안</a:t>
-            </a:r>
-            <a:r>
-              <a:rPr lang="en-US" sz="2000" b="0" u="none" strike="noStrike">
-                <a:solidFill>
-                  <a:srgbClr val="000000"/>
-                </a:solidFill>
-                <a:effectLst/>
-                <a:uFillTx/>
-                <a:latin typeface="Noto Sans CJK KR"/>
-              </a:rPr>
-              <a:t>·</a:t>
-            </a:r>
-            <a:r>
-              <a:rPr lang="ko-KR" sz="2000" b="0" u="none" strike="noStrike">
-                <a:solidFill>
-                  <a:srgbClr val="000000"/>
-                </a:solidFill>
-                <a:effectLst/>
-                <a:uFillTx/>
-                <a:latin typeface="Noto Sans CJK KR"/>
-              </a:rPr>
-              <a:t>애플리케이션 영역을 나눠 맡았다</a:t>
-            </a:r>
-            <a:r>
-              <a:rPr lang="en-US" sz="2000" b="0" u="none" strike="noStrike">
-                <a:solidFill>
-                  <a:srgbClr val="000000"/>
-                </a:solidFill>
-                <a:effectLst/>
-                <a:uFillTx/>
-                <a:latin typeface="Noto Sans CJK KR"/>
-              </a:rPr>
-              <a:t>.</a:t>
-            </a:r>
-            <a:endParaRPr lang="en-US" sz="2000" b="0" u="none" strike="noStrike">
-              <a:solidFill>
-                <a:srgbClr val="000000"/>
-              </a:solidFill>
-              <a:effectLst/>
-              <a:uFillTx/>
-              <a:latin typeface="Noto Sans CJK KR"/>
-            </a:endParaRPr>
-          </a:p>
-          <a:p>
-            <a:pPr indent="0" algn="l">
-              <a:lnSpc>
-                <a:spcPct val="100000"/>
-              </a:lnSpc>
-              <a:buNone/>
-              <a:tabLst>
-                <a:tab pos="0" algn="l"/>
-              </a:tabLst>
-            </a:pPr>
-            <a:r>
-              <a:rPr lang="en-US" sz="2000" b="0" u="none" strike="noStrike">
-                <a:solidFill>
-                  <a:srgbClr val="000000"/>
-                </a:solidFill>
-                <a:effectLst/>
-                <a:uFillTx/>
-                <a:latin typeface="Noto Sans CJK KR"/>
-              </a:rPr>
-              <a:t>ASSET: native </a:t>
-            </a:r>
-            <a:r>
-              <a:rPr lang="ko-KR" sz="2000" b="0" u="none" strike="noStrike">
-                <a:solidFill>
-                  <a:srgbClr val="000000"/>
-                </a:solidFill>
-                <a:effectLst/>
-                <a:uFillTx/>
-                <a:latin typeface="Noto Sans CJK KR"/>
-              </a:rPr>
-              <a:t>도형</a:t>
-            </a:r>
-            <a:endParaRPr lang="en-US" sz="2000" b="0" u="none" strike="noStrike">
-              <a:solidFill>
-                <a:srgbClr val="000000"/>
-              </a:solidFill>
-              <a:effectLst/>
-              <a:uFillTx/>
-              <a:latin typeface="Noto Sans CJK KR"/>
-            </a:endParaRPr>
-          </a:p>
-          <a:p>
-            <a:pPr indent="0" algn="l">
-              <a:lnSpc>
-                <a:spcPct val="100000"/>
-              </a:lnSpc>
-              <a:buNone/>
-              <a:tabLst>
-                <a:tab pos="0" algn="l"/>
-              </a:tabLst>
-            </a:pPr>
-            <a:r>
-              <a:rPr lang="en-US" sz="2000" b="0" u="none" strike="noStrike">
-                <a:solidFill>
-                  <a:srgbClr val="000000"/>
-                </a:solidFill>
-                <a:effectLst/>
-                <a:uFillTx/>
-                <a:latin typeface="Noto Sans CJK KR"/>
-              </a:rPr>
-              <a:t>EVIDENCE: PRESENT-PLAN-01 </a:t>
-            </a:r>
-            <a:r>
-              <a:rPr lang="ko-KR" sz="2000" b="0" u="none" strike="noStrike">
-                <a:solidFill>
-                  <a:srgbClr val="000000"/>
-                </a:solidFill>
-                <a:effectLst/>
-                <a:uFillTx/>
-                <a:latin typeface="Noto Sans CJK KR"/>
-              </a:rPr>
-              <a:t>팀 구성 확정</a:t>
-            </a:r>
-            <a:endParaRPr lang="en-US" sz="2000" b="0" u="none" strike="noStrike">
-              <a:solidFill>
-                <a:srgbClr val="000000"/>
-              </a:solidFill>
-              <a:effectLst/>
-              <a:uFillTx/>
-              <a:latin typeface="Noto Sans CJK KR"/>
-            </a:endParaRPr>
-          </a:p>
-          <a:p>
-            <a:pPr indent="0" algn="l">
-              <a:lnSpc>
-                <a:spcPct val="100000"/>
-              </a:lnSpc>
-              <a:buNone/>
-              <a:tabLst>
-                <a:tab pos="0" algn="l"/>
-              </a:tabLst>
-            </a:pPr>
-            <a:endParaRPr lang="en-US" sz="2000" b="0" u="none" strike="noStrike">
-              <a:solidFill>
-                <a:srgbClr val="000000"/>
-              </a:solidFill>
-              <a:effectLst/>
-              <a:uFillTx/>
-              <a:latin typeface="Noto Sans CJK KR"/>
-            </a:endParaRPr>
-          </a:p>
-          <a:p>
-            <a:pPr indent="0" algn="l">
-              <a:lnSpc>
-                <a:spcPct val="100000"/>
-              </a:lnSpc>
-              <a:buNone/>
-              <a:tabLst>
-                <a:tab pos="0" algn="l"/>
-              </a:tabLst>
-            </a:pPr>
-            <a:r>
-              <a:rPr lang="en-US" sz="2000" b="0" u="none" strike="noStrike">
-                <a:solidFill>
-                  <a:srgbClr val="000000"/>
-                </a:solidFill>
-                <a:effectLst/>
-                <a:uFillTx/>
-                <a:latin typeface="Noto Sans CJK KR"/>
-              </a:rPr>
-              <a:t>※ 발표 대본은 </a:t>
-            </a:r>
-            <a:r>
-              <a:rPr lang="en-US" sz="2000" b="0" u="none" strike="noStrike">
-                <a:solidFill>
-                  <a:srgbClr val="000000"/>
-                </a:solidFill>
-                <a:effectLst/>
-                <a:uFillTx/>
-                <a:latin typeface="Noto Sans CJK KR"/>
-              </a:rPr>
-              <a:t>PRESENT-SCRIPT-01</a:t>
-            </a:r>
-            <a:r>
-              <a:rPr lang="ko-KR" sz="2000" b="0" u="none" strike="noStrike">
-                <a:solidFill>
-                  <a:srgbClr val="000000"/>
-                </a:solidFill>
-                <a:effectLst/>
-                <a:uFillTx/>
-                <a:latin typeface="Noto Sans CJK KR"/>
-              </a:rPr>
-              <a:t>이 이 </a:t>
-            </a:r>
-            <a:r>
-              <a:rPr lang="en-US" sz="2000" b="0" u="none" strike="noStrike">
-                <a:solidFill>
-                  <a:srgbClr val="000000"/>
-                </a:solidFill>
-                <a:effectLst/>
-                <a:uFillTx/>
-                <a:latin typeface="Noto Sans CJK KR"/>
-              </a:rPr>
-              <a:t>notes</a:t>
-            </a:r>
-            <a:r>
-              <a:rPr lang="ko-KR" sz="2000" b="0" u="none" strike="noStrike">
-                <a:solidFill>
-                  <a:srgbClr val="000000"/>
-                </a:solidFill>
-                <a:effectLst/>
-                <a:uFillTx/>
-                <a:latin typeface="Noto Sans CJK KR"/>
-              </a:rPr>
-              <a:t>를 대체한다</a:t>
-            </a:r>
-            <a:r>
-              <a:rPr lang="en-US" sz="2000" b="0" u="none" strike="noStrike">
-                <a:solidFill>
-                  <a:srgbClr val="000000"/>
-                </a:solidFill>
-                <a:effectLst/>
-                <a:uFillTx/>
-                <a:latin typeface="Noto Sans CJK KR"/>
-              </a:rPr>
-              <a:t>.</a:t>
-            </a:r>
-            <a:endParaRPr lang="en-US" sz="2000" b="0" u="none" strike="noStrike">
-              <a:solidFill>
-                <a:srgbClr val="000000"/>
-              </a:solidFill>
-              <a:effectLst/>
-              <a:uFillTx/>
-              <a:latin typeface="Noto Sans CJK KR"/>
-            </a:endParaRPr>
+          <a:p/>
+          <a:p>
+            <a:r>
+              <a:t>팀은 다섯 명입니다.</a:t>
+            </a:r>
+          </a:p>
+          <a:p>
+            <a:r>
+              <a:t>저는 OPNsense와 Proxmox, k3s 기반과 공급망, 통합 인증을 맡았습니다.</a:t>
+            </a:r>
+          </a:p>
+          <a:p>
+            <a:r>
+              <a:t>이진희 님이 Prometheus와 Grafana로 관측과 알림을, 박재윤 님이 AWS VPC와 CIEM, CSPM 거버넌스를,</a:t>
+            </a:r>
+          </a:p>
+          <a:p>
+            <a:r>
+              <a:t>박수근 님이 OpenTofu로 EKS 인프라와 테스트 코드를,</a:t>
+            </a:r>
+          </a:p>
+          <a:p>
+            <a:r>
+              <a:t>정주헌 님이 웹서비스 설계와 접근 시나리오 검증을 맡았습니다.</a:t>
+            </a:r>
           </a:p>
         </p:txBody>
       </p:sp>
@@ -9350,26 +3994,7 @@
               </a:tabLst>
             </a:pPr>
             <a:r>
-              <a:rPr lang="en-US" sz="2000" b="0" u="none" strike="noStrike">
-                <a:solidFill>
-                  <a:srgbClr val="000000"/>
-                </a:solidFill>
-                <a:effectLst/>
-                <a:uFillTx/>
-                <a:latin typeface="Noto Sans CJK KR"/>
-              </a:rPr>
-              <a:t>[6/22 · 00:35] 4</a:t>
-            </a:r>
-            <a:r>
-              <a:rPr lang="ko-KR" sz="2000" b="0" u="none" strike="noStrike">
-                <a:solidFill>
-                  <a:srgbClr val="000000"/>
-                </a:solidFill>
-                <a:effectLst/>
-                <a:uFillTx/>
-                <a:latin typeface="Noto Sans CJK KR"/>
-              </a:rPr>
-              <a:t>주 간트 차트</a:t>
+              <a:t>[6/23 · 0:24] 4주 일정</a:t>
             </a:r>
             <a:endParaRPr lang="en-US" sz="2000" b="0" u="none" strike="noStrike">
               <a:solidFill>
@@ -9380,517 +4005,26 @@
               <a:latin typeface="Noto Sans CJK KR"/>
             </a:endParaRPr>
           </a:p>
-          <a:p>
-            <a:pPr indent="0" algn="l">
-              <a:lnSpc>
-                <a:spcPct val="100000"/>
-              </a:lnSpc>
-              <a:buNone/>
-              <a:tabLst>
-                <a:tab pos="0" algn="l"/>
-              </a:tabLst>
-            </a:pPr>
-            <a:endParaRPr lang="en-US" sz="2000" b="0" u="none" strike="noStrike">
-              <a:solidFill>
-                <a:srgbClr val="000000"/>
-              </a:solidFill>
-              <a:effectLst/>
-              <a:uFillTx/>
-              <a:latin typeface="Noto Sans CJK KR"/>
-            </a:endParaRPr>
-          </a:p>
-          <a:p>
-            <a:pPr indent="0" algn="l">
-              <a:lnSpc>
-                <a:spcPct val="100000"/>
-              </a:lnSpc>
-              <a:buNone/>
-              <a:tabLst>
-                <a:tab pos="0" algn="l"/>
-              </a:tabLst>
-            </a:pPr>
-            <a:r>
-              <a:rPr lang="en-US" sz="2000" b="0" u="none" strike="noStrike">
-                <a:solidFill>
-                  <a:srgbClr val="000000"/>
-                </a:solidFill>
-                <a:effectLst/>
-                <a:uFillTx/>
-                <a:latin typeface="Noto Sans CJK KR"/>
-              </a:rPr>
-              <a:t>PURPOSE: </a:t>
-            </a:r>
-            <a:r>
-              <a:rPr lang="ko-KR" sz="2000" b="0" u="none" strike="noStrike">
-                <a:solidFill>
-                  <a:srgbClr val="000000"/>
-                </a:solidFill>
-                <a:effectLst/>
-                <a:uFillTx/>
-                <a:latin typeface="Noto Sans CJK KR"/>
-              </a:rPr>
-              <a:t>짧은 기간에 어떤 순서로 쌓았는지 보여준다</a:t>
-            </a:r>
-            <a:r>
-              <a:rPr lang="en-US" sz="2000" b="0" u="none" strike="noStrike">
-                <a:solidFill>
-                  <a:srgbClr val="000000"/>
-                </a:solidFill>
-                <a:effectLst/>
-                <a:uFillTx/>
-                <a:latin typeface="Noto Sans CJK KR"/>
-              </a:rPr>
-              <a:t>.</a:t>
-            </a:r>
-            <a:endParaRPr lang="en-US" sz="2000" b="0" u="none" strike="noStrike">
-              <a:solidFill>
-                <a:srgbClr val="000000"/>
-              </a:solidFill>
-              <a:effectLst/>
-              <a:uFillTx/>
-              <a:latin typeface="Noto Sans CJK KR"/>
-            </a:endParaRPr>
-          </a:p>
-          <a:p>
-            <a:pPr indent="0" algn="l">
-              <a:lnSpc>
-                <a:spcPct val="100000"/>
-              </a:lnSpc>
-              <a:buNone/>
-              <a:tabLst>
-                <a:tab pos="0" algn="l"/>
-              </a:tabLst>
-            </a:pPr>
-            <a:r>
-              <a:rPr lang="en-US" sz="2000" b="0" u="none" strike="noStrike">
-                <a:solidFill>
-                  <a:srgbClr val="000000"/>
-                </a:solidFill>
-                <a:effectLst/>
-                <a:uFillTx/>
-                <a:latin typeface="Noto Sans CJK KR"/>
-              </a:rPr>
-              <a:t>MESSAGE: </a:t>
-            </a:r>
-            <a:r>
-              <a:rPr lang="ko-KR" sz="2000" b="0" u="none" strike="noStrike">
-                <a:solidFill>
-                  <a:srgbClr val="000000"/>
-                </a:solidFill>
-                <a:effectLst/>
-                <a:uFillTx/>
-                <a:latin typeface="Noto Sans CJK KR"/>
-              </a:rPr>
-              <a:t>기반 → 통제 → 공급망 → 검증 순으로 </a:t>
-            </a:r>
-            <a:r>
-              <a:rPr lang="en-US" sz="2000" b="0" u="none" strike="noStrike">
-                <a:solidFill>
-                  <a:srgbClr val="000000"/>
-                </a:solidFill>
-                <a:effectLst/>
-                <a:uFillTx/>
-                <a:latin typeface="Noto Sans CJK KR"/>
-              </a:rPr>
-              <a:t>4</a:t>
-            </a:r>
-            <a:r>
-              <a:rPr lang="ko-KR" sz="2000" b="0" u="none" strike="noStrike">
-                <a:solidFill>
-                  <a:srgbClr val="000000"/>
-                </a:solidFill>
-                <a:effectLst/>
-                <a:uFillTx/>
-                <a:latin typeface="Noto Sans CJK KR"/>
-              </a:rPr>
-              <a:t>주를 나눴다</a:t>
-            </a:r>
-            <a:r>
-              <a:rPr lang="en-US" sz="2000" b="0" u="none" strike="noStrike">
-                <a:solidFill>
-                  <a:srgbClr val="000000"/>
-                </a:solidFill>
-                <a:effectLst/>
-                <a:uFillTx/>
-                <a:latin typeface="Noto Sans CJK KR"/>
-              </a:rPr>
-              <a:t>.</a:t>
-            </a:r>
-            <a:endParaRPr lang="en-US" sz="2000" b="0" u="none" strike="noStrike">
-              <a:solidFill>
-                <a:srgbClr val="000000"/>
-              </a:solidFill>
-              <a:effectLst/>
-              <a:uFillTx/>
-              <a:latin typeface="Noto Sans CJK KR"/>
-            </a:endParaRPr>
-          </a:p>
-          <a:p>
-            <a:pPr indent="0" algn="l">
-              <a:lnSpc>
-                <a:spcPct val="100000"/>
-              </a:lnSpc>
-              <a:buNone/>
-              <a:tabLst>
-                <a:tab pos="0" algn="l"/>
-              </a:tabLst>
-            </a:pPr>
-            <a:r>
-              <a:rPr lang="en-US" sz="2000" b="0" u="none" strike="noStrike">
-                <a:solidFill>
-                  <a:srgbClr val="000000"/>
-                </a:solidFill>
-                <a:effectLst/>
-                <a:uFillTx/>
-                <a:latin typeface="Noto Sans CJK KR"/>
-              </a:rPr>
-              <a:t>ASSET: native </a:t>
-            </a:r>
-            <a:r>
-              <a:rPr lang="ko-KR" sz="2000" b="0" u="none" strike="noStrike">
-                <a:solidFill>
-                  <a:srgbClr val="000000"/>
-                </a:solidFill>
-                <a:effectLst/>
-                <a:uFillTx/>
-                <a:latin typeface="Noto Sans CJK KR"/>
-              </a:rPr>
-              <a:t>도형</a:t>
-            </a:r>
-            <a:endParaRPr lang="en-US" sz="2000" b="0" u="none" strike="noStrike">
-              <a:solidFill>
-                <a:srgbClr val="000000"/>
-              </a:solidFill>
-              <a:effectLst/>
-              <a:uFillTx/>
-              <a:latin typeface="Noto Sans CJK KR"/>
-            </a:endParaRPr>
-          </a:p>
-          <a:p>
-            <a:pPr indent="0" algn="l">
-              <a:lnSpc>
-                <a:spcPct val="100000"/>
-              </a:lnSpc>
-              <a:buNone/>
-              <a:tabLst>
-                <a:tab pos="0" algn="l"/>
-              </a:tabLst>
-            </a:pPr>
-            <a:r>
-              <a:rPr lang="en-US" sz="2000" b="0" u="none" strike="noStrike">
-                <a:solidFill>
-                  <a:srgbClr val="000000"/>
-                </a:solidFill>
-                <a:effectLst/>
-                <a:uFillTx/>
-                <a:latin typeface="Noto Sans CJK KR"/>
-              </a:rPr>
-              <a:t>EVIDENCE: PRESENT-PLAN-01 </a:t>
-            </a:r>
-            <a:r>
-              <a:rPr lang="ko-KR" sz="2000" b="0" u="none" strike="noStrike">
-                <a:solidFill>
-                  <a:srgbClr val="000000"/>
-                </a:solidFill>
-                <a:effectLst/>
-                <a:uFillTx/>
-                <a:latin typeface="Noto Sans CJK KR"/>
-              </a:rPr>
-              <a:t>간트</a:t>
-            </a:r>
-            <a:r>
-              <a:rPr lang="en-US" sz="2000" b="0" u="none" strike="noStrike">
-                <a:solidFill>
-                  <a:srgbClr val="000000"/>
-                </a:solidFill>
-                <a:effectLst/>
-                <a:uFillTx/>
-                <a:latin typeface="Noto Sans CJK KR"/>
-              </a:rPr>
-              <a:t>·SWOT native </a:t>
-            </a:r>
-            <a:r>
-              <a:rPr lang="ko-KR" sz="2000" b="0" u="none" strike="noStrike">
-                <a:solidFill>
-                  <a:srgbClr val="000000"/>
-                </a:solidFill>
-                <a:effectLst/>
-                <a:uFillTx/>
-                <a:latin typeface="Noto Sans CJK KR"/>
-              </a:rPr>
-              <a:t>도형 확정</a:t>
-            </a:r>
-            <a:endParaRPr lang="en-US" sz="2000" b="0" u="none" strike="noStrike">
-              <a:solidFill>
-                <a:srgbClr val="000000"/>
-              </a:solidFill>
-              <a:effectLst/>
-              <a:uFillTx/>
-              <a:latin typeface="Noto Sans CJK KR"/>
-            </a:endParaRPr>
-          </a:p>
-          <a:p>
-            <a:pPr indent="0" algn="l">
-              <a:lnSpc>
-                <a:spcPct val="100000"/>
-              </a:lnSpc>
-              <a:buNone/>
-              <a:tabLst>
-                <a:tab pos="0" algn="l"/>
-              </a:tabLst>
-            </a:pPr>
-            <a:endParaRPr lang="en-US" sz="2000" b="0" u="none" strike="noStrike">
-              <a:solidFill>
-                <a:srgbClr val="000000"/>
-              </a:solidFill>
-              <a:effectLst/>
-              <a:uFillTx/>
-              <a:latin typeface="Noto Sans CJK KR"/>
-            </a:endParaRPr>
-          </a:p>
-          <a:p>
-            <a:pPr indent="0" algn="l">
-              <a:lnSpc>
-                <a:spcPct val="100000"/>
-              </a:lnSpc>
-              <a:buNone/>
-              <a:tabLst>
-                <a:tab pos="0" algn="l"/>
-              </a:tabLst>
-            </a:pPr>
-            <a:r>
-              <a:rPr lang="en-US" sz="2000" b="0" u="none" strike="noStrike">
-                <a:solidFill>
-                  <a:srgbClr val="000000"/>
-                </a:solidFill>
-                <a:effectLst/>
-                <a:uFillTx/>
-                <a:latin typeface="Noto Sans CJK KR"/>
-              </a:rPr>
-              <a:t>4</a:t>
-            </a:r>
-            <a:r>
-              <a:rPr lang="ko-KR" sz="2000" b="0" u="none" strike="noStrike">
-                <a:solidFill>
-                  <a:srgbClr val="000000"/>
-                </a:solidFill>
-                <a:effectLst/>
-                <a:uFillTx/>
-                <a:latin typeface="Noto Sans CJK KR"/>
-              </a:rPr>
-              <a:t>주차 종료일은 발표 시점</a:t>
-            </a:r>
-            <a:r>
-              <a:rPr lang="en-US" sz="2000" b="0" u="none" strike="noStrike">
-                <a:solidFill>
-                  <a:srgbClr val="000000"/>
-                </a:solidFill>
-                <a:effectLst/>
-                <a:uFillTx/>
-                <a:latin typeface="Noto Sans CJK KR"/>
-              </a:rPr>
-              <a:t>(2026-08-17)</a:t>
-            </a:r>
-            <a:r>
-              <a:rPr lang="ko-KR" sz="2000" b="0" u="none" strike="noStrike">
-                <a:solidFill>
-                  <a:srgbClr val="000000"/>
-                </a:solidFill>
-                <a:effectLst/>
-                <a:uFillTx/>
-                <a:latin typeface="Noto Sans CJK KR"/>
-              </a:rPr>
-              <a:t>에 맞춰 적었다</a:t>
-            </a:r>
-            <a:r>
-              <a:rPr lang="en-US" sz="2000" b="0" u="none" strike="noStrike">
-                <a:solidFill>
-                  <a:srgbClr val="000000"/>
-                </a:solidFill>
-                <a:effectLst/>
-                <a:uFillTx/>
-                <a:latin typeface="Noto Sans CJK KR"/>
-              </a:rPr>
-              <a:t>. </a:t>
-            </a:r>
-            <a:r>
-              <a:rPr lang="ko-KR" sz="2000" b="0" u="none" strike="noStrike">
-                <a:solidFill>
-                  <a:srgbClr val="000000"/>
-                </a:solidFill>
-                <a:effectLst/>
-                <a:uFillTx/>
-                <a:latin typeface="Noto Sans CJK KR"/>
-              </a:rPr>
-              <a:t>저장소 첫 커밋 </a:t>
-            </a:r>
-            <a:r>
-              <a:rPr lang="en-US" sz="2000" b="0" u="none" strike="noStrike">
-                <a:solidFill>
-                  <a:srgbClr val="000000"/>
-                </a:solidFill>
-                <a:effectLst/>
-                <a:uFillTx/>
-                <a:latin typeface="Noto Sans CJK KR"/>
-              </a:rPr>
-              <a:t>2026-07-28</a:t>
-            </a:r>
-            <a:r>
-              <a:rPr lang="ko-KR" sz="2000" b="0" u="none" strike="noStrike">
-                <a:solidFill>
-                  <a:srgbClr val="000000"/>
-                </a:solidFill>
-                <a:effectLst/>
-                <a:uFillTx/>
-                <a:latin typeface="Noto Sans CJK KR"/>
-              </a:rPr>
-              <a:t>은 </a:t>
-            </a:r>
-            <a:r>
-              <a:rPr lang="en-US" sz="2000" b="0" u="none" strike="noStrike">
-                <a:solidFill>
-                  <a:srgbClr val="000000"/>
-                </a:solidFill>
-                <a:effectLst/>
-                <a:uFillTx/>
-                <a:latin typeface="Noto Sans CJK KR"/>
-              </a:rPr>
-              <a:t>2</a:t>
-            </a:r>
-            <a:r>
-              <a:rPr lang="ko-KR" sz="2000" b="0" u="none" strike="noStrike">
-                <a:solidFill>
-                  <a:srgbClr val="000000"/>
-                </a:solidFill>
-                <a:effectLst/>
-                <a:uFillTx/>
-                <a:latin typeface="Noto Sans CJK KR"/>
-              </a:rPr>
-              <a:t>주차 첫날이다</a:t>
-            </a:r>
-            <a:r>
-              <a:rPr lang="en-US" sz="2000" b="0" u="none" strike="noStrike">
-                <a:solidFill>
-                  <a:srgbClr val="000000"/>
-                </a:solidFill>
-                <a:effectLst/>
-                <a:uFillTx/>
-                <a:latin typeface="Noto Sans CJK KR"/>
-              </a:rPr>
-              <a:t>.</a:t>
-            </a:r>
-            <a:endParaRPr lang="en-US" sz="2000" b="0" u="none" strike="noStrike">
-              <a:solidFill>
-                <a:srgbClr val="000000"/>
-              </a:solidFill>
-              <a:effectLst/>
-              <a:uFillTx/>
-              <a:latin typeface="Noto Sans CJK KR"/>
-            </a:endParaRPr>
-          </a:p>
-          <a:p>
-            <a:pPr indent="0" algn="l">
-              <a:lnSpc>
-                <a:spcPct val="100000"/>
-              </a:lnSpc>
-              <a:buNone/>
-              <a:tabLst>
-                <a:tab pos="0" algn="l"/>
-              </a:tabLst>
-            </a:pPr>
-            <a:endParaRPr lang="en-US" sz="2000" b="0" u="none" strike="noStrike">
-              <a:solidFill>
-                <a:srgbClr val="000000"/>
-              </a:solidFill>
-              <a:effectLst/>
-              <a:uFillTx/>
-              <a:latin typeface="Noto Sans CJK KR"/>
-            </a:endParaRPr>
-          </a:p>
-          <a:p>
-            <a:pPr indent="0" algn="l">
-              <a:lnSpc>
-                <a:spcPct val="100000"/>
-              </a:lnSpc>
-              <a:buNone/>
-              <a:tabLst>
-                <a:tab pos="0" algn="l"/>
-              </a:tabLst>
-            </a:pPr>
-            <a:r>
-              <a:rPr lang="en-US" sz="2000" b="0" u="none" strike="noStrike">
-                <a:solidFill>
-                  <a:srgbClr val="000000"/>
-                </a:solidFill>
-                <a:effectLst/>
-                <a:uFillTx/>
-                <a:latin typeface="Noto Sans CJK KR"/>
-              </a:rPr>
-              <a:t>※ 발표 대본은 </a:t>
-            </a:r>
-            <a:r>
-              <a:rPr lang="en-US" sz="2000" b="0" u="none" strike="noStrike">
-                <a:solidFill>
-                  <a:srgbClr val="000000"/>
-                </a:solidFill>
-                <a:effectLst/>
-                <a:uFillTx/>
-                <a:latin typeface="Noto Sans CJK KR"/>
-              </a:rPr>
-              <a:t>PRESENT-SCRIPT-01</a:t>
-            </a:r>
-            <a:r>
-              <a:rPr lang="ko-KR" sz="2000" b="0" u="none" strike="noStrike">
-                <a:solidFill>
-                  <a:srgbClr val="000000"/>
-                </a:solidFill>
-                <a:effectLst/>
-                <a:uFillTx/>
-                <a:latin typeface="Noto Sans CJK KR"/>
-              </a:rPr>
-              <a:t>이 이 </a:t>
-            </a:r>
-            <a:r>
-              <a:rPr lang="en-US" sz="2000" b="0" u="none" strike="noStrike">
-                <a:solidFill>
-                  <a:srgbClr val="000000"/>
-                </a:solidFill>
-                <a:effectLst/>
-                <a:uFillTx/>
-                <a:latin typeface="Noto Sans CJK KR"/>
-              </a:rPr>
-              <a:t>notes</a:t>
-            </a:r>
-            <a:r>
-              <a:rPr lang="ko-KR" sz="2000" b="0" u="none" strike="noStrike">
-                <a:solidFill>
-                  <a:srgbClr val="000000"/>
-                </a:solidFill>
-                <a:effectLst/>
-                <a:uFillTx/>
-                <a:latin typeface="Noto Sans CJK KR"/>
-              </a:rPr>
-              <a:t>를 대체한다</a:t>
-            </a:r>
-            <a:r>
-              <a:rPr lang="en-US" sz="2000" b="0" u="none" strike="noStrike">
-                <a:solidFill>
-                  <a:srgbClr val="000000"/>
-                </a:solidFill>
-                <a:effectLst/>
-                <a:uFillTx/>
-                <a:latin typeface="Noto Sans CJK KR"/>
-              </a:rPr>
-              <a:t>.</a:t>
-            </a:r>
-            <a:endParaRPr lang="en-US" sz="2000" b="0" u="none" strike="noStrike">
-              <a:solidFill>
-                <a:srgbClr val="000000"/>
-              </a:solidFill>
-              <a:effectLst/>
-              <a:uFillTx/>
-              <a:latin typeface="Noto Sans CJK KR"/>
-            </a:endParaRPr>
+          <a:p/>
+          <a:p>
+            <a:r>
+              <a:t>기간은 4주였습니다.</a:t>
+            </a:r>
+          </a:p>
+          <a:p>
+            <a:r>
+              <a:t>첫 주는 아키텍처 설계와 역할 배분, 2주차에 인프라를 올리면서 보안 단계를 잡았습니다.</a:t>
+            </a:r>
+          </a:p>
+          <a:p>
+            <a:r>
+              <a:t>3주차에 각자 만든 걸 붙였는데 사실 이때 오류가 제일 많이 나왔습니다.</a:t>
+            </a:r>
+          </a:p>
+          <a:p>
+            <a:r>
+              <a:t>마지막 주에 통합 테스트와 데모 영상, 발표 자료를 정리했습니다.</a:t>
+            </a:r>
           </a:p>
         </p:txBody>
       </p:sp>
@@ -10057,26 +4191,7 @@
               </a:tabLst>
             </a:pPr>
             <a:r>
-              <a:rPr lang="en-US" sz="2000" b="0" u="none" strike="noStrike">
-                <a:solidFill>
-                  <a:srgbClr val="000000"/>
-                </a:solidFill>
-                <a:effectLst/>
-                <a:uFillTx/>
-                <a:latin typeface="Noto Sans CJK KR"/>
-              </a:rPr>
-              <a:t>[8/22 · 00:40] </a:t>
-            </a:r>
-            <a:r>
-              <a:rPr lang="ko-KR" sz="2000" b="0" u="none" strike="noStrike">
-                <a:solidFill>
-                  <a:srgbClr val="000000"/>
-                </a:solidFill>
-                <a:effectLst/>
-                <a:uFillTx/>
-                <a:latin typeface="Noto Sans CJK KR"/>
-              </a:rPr>
-              <a:t>물리 경계</a:t>
+              <a:t>[7/23 · 0:46] 물리 경계</a:t>
             </a:r>
             <a:endParaRPr lang="en-US" sz="2000" b="0" u="none" strike="noStrike">
               <a:solidFill>
@@ -10087,369 +4202,37 @@
               <a:latin typeface="Noto Sans CJK KR"/>
             </a:endParaRPr>
           </a:p>
-          <a:p>
-            <a:pPr indent="0" algn="l">
-              <a:lnSpc>
-                <a:spcPct val="100000"/>
-              </a:lnSpc>
-              <a:buNone/>
-              <a:tabLst>
-                <a:tab pos="0" algn="l"/>
-              </a:tabLst>
-            </a:pPr>
-            <a:endParaRPr lang="en-US" sz="2000" b="0" u="none" strike="noStrike">
-              <a:solidFill>
-                <a:srgbClr val="000000"/>
-              </a:solidFill>
-              <a:effectLst/>
-              <a:uFillTx/>
-              <a:latin typeface="Noto Sans CJK KR"/>
-            </a:endParaRPr>
-          </a:p>
-          <a:p>
-            <a:pPr indent="0" algn="l">
-              <a:lnSpc>
-                <a:spcPct val="100000"/>
-              </a:lnSpc>
-              <a:buNone/>
-              <a:tabLst>
-                <a:tab pos="0" algn="l"/>
-              </a:tabLst>
-            </a:pPr>
-            <a:r>
-              <a:rPr lang="en-US" sz="2000" b="0" u="none" strike="noStrike">
-                <a:solidFill>
-                  <a:srgbClr val="000000"/>
-                </a:solidFill>
-                <a:effectLst/>
-                <a:uFillTx/>
-                <a:latin typeface="Noto Sans CJK KR"/>
-              </a:rPr>
-              <a:t>PURPOSE: </a:t>
-            </a:r>
-            <a:r>
-              <a:rPr lang="ko-KR" sz="2000" b="0" u="none" strike="noStrike">
-                <a:solidFill>
-                  <a:srgbClr val="000000"/>
-                </a:solidFill>
-                <a:effectLst/>
-                <a:uFillTx/>
-                <a:latin typeface="Noto Sans CJK KR"/>
-              </a:rPr>
-              <a:t>모든 것이 한 대의 물리 노드 위에 있다는 사실을 먼저 못 박는다</a:t>
-            </a:r>
-            <a:r>
-              <a:rPr lang="en-US" sz="2000" b="0" u="none" strike="noStrike">
-                <a:solidFill>
-                  <a:srgbClr val="000000"/>
-                </a:solidFill>
-                <a:effectLst/>
-                <a:uFillTx/>
-                <a:latin typeface="Noto Sans CJK KR"/>
-              </a:rPr>
-              <a:t>.</a:t>
-            </a:r>
-            <a:endParaRPr lang="en-US" sz="2000" b="0" u="none" strike="noStrike">
-              <a:solidFill>
-                <a:srgbClr val="000000"/>
-              </a:solidFill>
-              <a:effectLst/>
-              <a:uFillTx/>
-              <a:latin typeface="Noto Sans CJK KR"/>
-            </a:endParaRPr>
-          </a:p>
-          <a:p>
-            <a:pPr indent="0" algn="l">
-              <a:lnSpc>
-                <a:spcPct val="100000"/>
-              </a:lnSpc>
-              <a:buNone/>
-              <a:tabLst>
-                <a:tab pos="0" algn="l"/>
-              </a:tabLst>
-            </a:pPr>
-            <a:r>
-              <a:rPr lang="en-US" sz="2000" b="0" u="none" strike="noStrike">
-                <a:solidFill>
-                  <a:srgbClr val="000000"/>
-                </a:solidFill>
-                <a:effectLst/>
-                <a:uFillTx/>
-                <a:latin typeface="Noto Sans CJK KR"/>
-              </a:rPr>
-              <a:t>MESSAGE: </a:t>
-            </a:r>
-            <a:r>
-              <a:rPr lang="ko-KR" sz="2000" b="0" u="none" strike="noStrike">
-                <a:solidFill>
-                  <a:srgbClr val="000000"/>
-                </a:solidFill>
-                <a:effectLst/>
-                <a:uFillTx/>
-                <a:latin typeface="Noto Sans CJK KR"/>
-              </a:rPr>
-              <a:t>물리 노드</a:t>
-            </a:r>
-            <a:r>
-              <a:rPr lang="en-US" sz="2000" b="0" u="none" strike="noStrike">
-                <a:solidFill>
-                  <a:srgbClr val="000000"/>
-                </a:solidFill>
-                <a:effectLst/>
-                <a:uFillTx/>
-                <a:latin typeface="Noto Sans CJK KR"/>
-              </a:rPr>
-              <a:t>·OPNsense·Proxmox</a:t>
-            </a:r>
-            <a:r>
-              <a:rPr lang="ko-KR" sz="2000" b="0" u="none" strike="noStrike">
-                <a:solidFill>
-                  <a:srgbClr val="000000"/>
-                </a:solidFill>
-                <a:effectLst/>
-                <a:uFillTx/>
-                <a:latin typeface="Noto Sans CJK KR"/>
-              </a:rPr>
-              <a:t>는 허용한 </a:t>
-            </a:r>
-            <a:r>
-              <a:rPr lang="en-US" sz="2000" b="0" u="none" strike="noStrike">
-                <a:solidFill>
-                  <a:srgbClr val="000000"/>
-                </a:solidFill>
-                <a:effectLst/>
-                <a:uFillTx/>
-                <a:latin typeface="Noto Sans CJK KR"/>
-              </a:rPr>
-              <a:t>SPOF</a:t>
-            </a:r>
-            <a:r>
-              <a:rPr lang="ko-KR" sz="2000" b="0" u="none" strike="noStrike">
-                <a:solidFill>
-                  <a:srgbClr val="000000"/>
-                </a:solidFill>
-                <a:effectLst/>
-                <a:uFillTx/>
-                <a:latin typeface="Noto Sans CJK KR"/>
-              </a:rPr>
-              <a:t>다</a:t>
-            </a:r>
-            <a:r>
-              <a:rPr lang="en-US" sz="2000" b="0" u="none" strike="noStrike">
-                <a:solidFill>
-                  <a:srgbClr val="000000"/>
-                </a:solidFill>
-                <a:effectLst/>
-                <a:uFillTx/>
-                <a:latin typeface="Noto Sans CJK KR"/>
-              </a:rPr>
-              <a:t>.</a:t>
-            </a:r>
-            <a:endParaRPr lang="en-US" sz="2000" b="0" u="none" strike="noStrike">
-              <a:solidFill>
-                <a:srgbClr val="000000"/>
-              </a:solidFill>
-              <a:effectLst/>
-              <a:uFillTx/>
-              <a:latin typeface="Noto Sans CJK KR"/>
-            </a:endParaRPr>
-          </a:p>
-          <a:p>
-            <a:pPr indent="0" algn="l">
-              <a:lnSpc>
-                <a:spcPct val="100000"/>
-              </a:lnSpc>
-              <a:buNone/>
-              <a:tabLst>
-                <a:tab pos="0" algn="l"/>
-              </a:tabLst>
-            </a:pPr>
-            <a:r>
-              <a:rPr lang="en-US" sz="2000" b="0" u="none" strike="noStrike">
-                <a:solidFill>
-                  <a:srgbClr val="000000"/>
-                </a:solidFill>
-                <a:effectLst/>
-                <a:uFillTx/>
-                <a:latin typeface="Noto Sans CJK KR"/>
-              </a:rPr>
-              <a:t>ASSET: </a:t>
-            </a:r>
-            <a:r>
-              <a:rPr lang="ko-KR" sz="2000" b="0" u="none" strike="noStrike">
-                <a:solidFill>
-                  <a:srgbClr val="000000"/>
-                </a:solidFill>
-                <a:effectLst/>
-                <a:uFillTx/>
-                <a:latin typeface="Noto Sans CJK KR"/>
-              </a:rPr>
-              <a:t>승인 이미지 </a:t>
-            </a:r>
-            <a:r>
-              <a:rPr lang="en-US" sz="2000" b="0" u="none" strike="noStrike">
-                <a:solidFill>
-                  <a:srgbClr val="000000"/>
-                </a:solidFill>
-                <a:effectLst/>
-                <a:uFillTx/>
-                <a:latin typeface="Noto Sans CJK KR"/>
-              </a:rPr>
-              <a:t>+ green </a:t>
-            </a:r>
-            <a:r>
-              <a:rPr lang="ko-KR" sz="2000" b="0" u="none" strike="noStrike">
-                <a:solidFill>
-                  <a:srgbClr val="000000"/>
-                </a:solidFill>
-                <a:effectLst/>
-                <a:uFillTx/>
-                <a:latin typeface="Noto Sans CJK KR"/>
-              </a:rPr>
-              <a:t>강조 도형</a:t>
-            </a:r>
-            <a:endParaRPr lang="en-US" sz="2000" b="0" u="none" strike="noStrike">
-              <a:solidFill>
-                <a:srgbClr val="000000"/>
-              </a:solidFill>
-              <a:effectLst/>
-              <a:uFillTx/>
-              <a:latin typeface="Noto Sans CJK KR"/>
-            </a:endParaRPr>
-          </a:p>
-          <a:p>
-            <a:pPr indent="0" algn="l">
-              <a:lnSpc>
-                <a:spcPct val="100000"/>
-              </a:lnSpc>
-              <a:buNone/>
-              <a:tabLst>
-                <a:tab pos="0" algn="l"/>
-              </a:tabLst>
-            </a:pPr>
-            <a:r>
-              <a:rPr lang="en-US" sz="2000" b="0" u="none" strike="noStrike">
-                <a:solidFill>
-                  <a:srgbClr val="000000"/>
-                </a:solidFill>
-                <a:effectLst/>
-                <a:uFillTx/>
-                <a:latin typeface="Noto Sans CJK KR"/>
-              </a:rPr>
-              <a:t>EVIDENCE: PVE-01 · NET-02 · NET-03</a:t>
-            </a:r>
-            <a:endParaRPr lang="en-US" sz="2000" b="0" u="none" strike="noStrike">
-              <a:solidFill>
-                <a:srgbClr val="000000"/>
-              </a:solidFill>
-              <a:effectLst/>
-              <a:uFillTx/>
-              <a:latin typeface="Noto Sans CJK KR"/>
-            </a:endParaRPr>
-          </a:p>
-          <a:p>
-            <a:pPr indent="0" algn="l">
-              <a:lnSpc>
-                <a:spcPct val="100000"/>
-              </a:lnSpc>
-              <a:buNone/>
-              <a:tabLst>
-                <a:tab pos="0" algn="l"/>
-              </a:tabLst>
-            </a:pPr>
-            <a:endParaRPr lang="en-US" sz="2000" b="0" u="none" strike="noStrike">
-              <a:solidFill>
-                <a:srgbClr val="000000"/>
-              </a:solidFill>
-              <a:effectLst/>
-              <a:uFillTx/>
-              <a:latin typeface="Noto Sans CJK KR"/>
-            </a:endParaRPr>
-          </a:p>
-          <a:p>
-            <a:pPr indent="0" algn="l">
-              <a:lnSpc>
-                <a:spcPct val="100000"/>
-              </a:lnSpc>
-              <a:buNone/>
-              <a:tabLst>
-                <a:tab pos="0" algn="l"/>
-              </a:tabLst>
-            </a:pPr>
-            <a:r>
-              <a:rPr lang="en-US" sz="2000" b="0" u="none" strike="noStrike">
-                <a:solidFill>
-                  <a:srgbClr val="000000"/>
-                </a:solidFill>
-                <a:effectLst/>
-                <a:uFillTx/>
-                <a:latin typeface="Noto Sans CJK KR"/>
-              </a:rPr>
-              <a:t>※ 발표 대본은 </a:t>
-            </a:r>
-            <a:r>
-              <a:rPr lang="en-US" sz="2000" b="0" u="none" strike="noStrike">
-                <a:solidFill>
-                  <a:srgbClr val="000000"/>
-                </a:solidFill>
-                <a:effectLst/>
-                <a:uFillTx/>
-                <a:latin typeface="Noto Sans CJK KR"/>
-              </a:rPr>
-              <a:t>PRESENT-SCRIPT-01</a:t>
-            </a:r>
-            <a:r>
-              <a:rPr lang="ko-KR" sz="2000" b="0" u="none" strike="noStrike">
-                <a:solidFill>
-                  <a:srgbClr val="000000"/>
-                </a:solidFill>
-                <a:effectLst/>
-                <a:uFillTx/>
-                <a:latin typeface="Noto Sans CJK KR"/>
-              </a:rPr>
-              <a:t>이 이 </a:t>
-            </a:r>
-            <a:r>
-              <a:rPr lang="en-US" sz="2000" b="0" u="none" strike="noStrike">
-                <a:solidFill>
-                  <a:srgbClr val="000000"/>
-                </a:solidFill>
-                <a:effectLst/>
-                <a:uFillTx/>
-                <a:latin typeface="Noto Sans CJK KR"/>
-              </a:rPr>
-              <a:t>notes</a:t>
-            </a:r>
-            <a:r>
-              <a:rPr lang="ko-KR" sz="2000" b="0" u="none" strike="noStrike">
-                <a:solidFill>
-                  <a:srgbClr val="000000"/>
-                </a:solidFill>
-                <a:effectLst/>
-                <a:uFillTx/>
-                <a:latin typeface="Noto Sans CJK KR"/>
-              </a:rPr>
-              <a:t>를 대체한다</a:t>
-            </a:r>
-            <a:r>
-              <a:rPr lang="en-US" sz="2000" b="0" u="none" strike="noStrike">
-                <a:solidFill>
-                  <a:srgbClr val="000000"/>
-                </a:solidFill>
-                <a:effectLst/>
-                <a:uFillTx/>
-                <a:latin typeface="Noto Sans CJK KR"/>
-              </a:rPr>
-              <a:t>.</a:t>
-            </a:r>
-            <a:endParaRPr lang="en-US" sz="2000" b="0" u="none" strike="noStrike">
-              <a:solidFill>
-                <a:srgbClr val="000000"/>
-              </a:solidFill>
-              <a:effectLst/>
-              <a:uFillTx/>
-              <a:latin typeface="Noto Sans CJK KR"/>
-            </a:endParaRPr>
+          <a:p/>
+          <a:p>
+            <a:r>
+              <a:t>이 그림 한 장이 저희 플랫폼 전부입니다. 앞으로 네 장은 같은 그림에서 보실 곳만 바뀝니다.</a:t>
+            </a:r>
+          </a:p>
+          <a:p>
+            <a:r>
+              <a:t>먼저 들어오는 길인데요, 공개된 진입점은 NetBird 컨트롤 릴레이와 Cloudflare 뒤 SSO 프런트엔드 둘뿐입니다.</a:t>
+            </a:r>
+          </a:p>
+          <a:p>
+            <a:r>
+              <a:t>나머지는 내부 DNS에서만 보이고, 그 앞은 OPNsense가 막습니다.</a:t>
+            </a:r>
+          </a:p>
+          <a:p>
+            <a:r>
+              <a:t>안쪽은 전부 Proxmox 한 대 위에 있습니다. 이게 죽으면 다 죽습니다.</a:t>
+            </a:r>
+          </a:p>
+          <a:p>
+            <a:r>
+              <a:t>그래서 그림에도 허용한 SPOF라고 적었는데, HA를 포기한 대신 다시 세우는 쪽에 시간을 썼습니다.</a:t>
+            </a:r>
+          </a:p>
+          <a:p/>
+          <a:p>
+            <a:r>
+              <a:t>※ 7~11장은 같은 그림이다. 첫 문장에서 이 사실을 먼저 말하고, 초록 테두리만 짚는다.</a:t>
+            </a:r>
           </a:p>
         </p:txBody>
       </p:sp>
@@ -10616,26 +4399,7 @@
               </a:tabLst>
             </a:pPr>
             <a:r>
-              <a:rPr lang="en-US" sz="2000" b="0" u="none" strike="noStrike">
-                <a:solidFill>
-                  <a:srgbClr val="000000"/>
-                </a:solidFill>
-                <a:effectLst/>
-                <a:uFillTx/>
-                <a:latin typeface="Noto Sans CJK KR"/>
-              </a:rPr>
-              <a:t>[9/22 · 00:50] </a:t>
-            </a:r>
-            <a:r>
-              <a:rPr lang="ko-KR" sz="2000" b="0" u="none" strike="noStrike">
-                <a:solidFill>
-                  <a:srgbClr val="000000"/>
-                </a:solidFill>
-                <a:effectLst/>
-                <a:uFillTx/>
-                <a:latin typeface="Noto Sans CJK KR"/>
-              </a:rPr>
-              <a:t>온프레미스 플랫폼</a:t>
+              <a:t>[8/23 · 0:36] 온프레미스 플랫폼</a:t>
             </a:r>
             <a:endParaRPr lang="en-US" sz="2000" b="0" u="none" strike="noStrike">
               <a:solidFill>
@@ -10646,369 +4410,36 @@
               <a:latin typeface="Noto Sans CJK KR"/>
             </a:endParaRPr>
           </a:p>
-          <a:p>
-            <a:pPr indent="0" algn="l">
-              <a:lnSpc>
-                <a:spcPct val="100000"/>
-              </a:lnSpc>
-              <a:buNone/>
-              <a:tabLst>
-                <a:tab pos="0" algn="l"/>
-              </a:tabLst>
-            </a:pPr>
-            <a:endParaRPr lang="en-US" sz="2000" b="0" u="none" strike="noStrike">
-              <a:solidFill>
-                <a:srgbClr val="000000"/>
-              </a:solidFill>
-              <a:effectLst/>
-              <a:uFillTx/>
-              <a:latin typeface="Noto Sans CJK KR"/>
-            </a:endParaRPr>
-          </a:p>
-          <a:p>
-            <a:pPr indent="0" algn="l">
-              <a:lnSpc>
-                <a:spcPct val="100000"/>
-              </a:lnSpc>
-              <a:buNone/>
-              <a:tabLst>
-                <a:tab pos="0" algn="l"/>
-              </a:tabLst>
-            </a:pPr>
-            <a:r>
-              <a:rPr lang="en-US" sz="2000" b="0" u="none" strike="noStrike">
-                <a:solidFill>
-                  <a:srgbClr val="000000"/>
-                </a:solidFill>
-                <a:effectLst/>
-                <a:uFillTx/>
-                <a:latin typeface="Noto Sans CJK KR"/>
-              </a:rPr>
-              <a:t>PURPOSE: </a:t>
-            </a:r>
-            <a:r>
-              <a:rPr lang="ko-KR" sz="2000" b="0" u="none" strike="noStrike">
-                <a:solidFill>
-                  <a:srgbClr val="000000"/>
-                </a:solidFill>
-                <a:effectLst/>
-                <a:uFillTx/>
-                <a:latin typeface="Noto Sans CJK KR"/>
-              </a:rPr>
-              <a:t>플랫폼 서비스가 어디에 어떻게 나뉘어 있는지 보여준다</a:t>
-            </a:r>
-            <a:r>
-              <a:rPr lang="en-US" sz="2000" b="0" u="none" strike="noStrike">
-                <a:solidFill>
-                  <a:srgbClr val="000000"/>
-                </a:solidFill>
-                <a:effectLst/>
-                <a:uFillTx/>
-                <a:latin typeface="Noto Sans CJK KR"/>
-              </a:rPr>
-              <a:t>.</a:t>
-            </a:r>
-            <a:endParaRPr lang="en-US" sz="2000" b="0" u="none" strike="noStrike">
-              <a:solidFill>
-                <a:srgbClr val="000000"/>
-              </a:solidFill>
-              <a:effectLst/>
-              <a:uFillTx/>
-              <a:latin typeface="Noto Sans CJK KR"/>
-            </a:endParaRPr>
-          </a:p>
-          <a:p>
-            <a:pPr indent="0" algn="l">
-              <a:lnSpc>
-                <a:spcPct val="100000"/>
-              </a:lnSpc>
-              <a:buNone/>
-              <a:tabLst>
-                <a:tab pos="0" algn="l"/>
-              </a:tabLst>
-            </a:pPr>
-            <a:r>
-              <a:rPr lang="en-US" sz="2000" b="0" u="none" strike="noStrike">
-                <a:solidFill>
-                  <a:srgbClr val="000000"/>
-                </a:solidFill>
-                <a:effectLst/>
-                <a:uFillTx/>
-                <a:latin typeface="Noto Sans CJK KR"/>
-              </a:rPr>
-              <a:t>MESSAGE: VM </a:t>
-            </a:r>
-            <a:r>
-              <a:rPr lang="ko-KR" sz="2000" b="0" u="none" strike="noStrike">
-                <a:solidFill>
-                  <a:srgbClr val="000000"/>
-                </a:solidFill>
-                <a:effectLst/>
-                <a:uFillTx/>
-                <a:latin typeface="Noto Sans CJK KR"/>
-              </a:rPr>
-              <a:t>분리는 장애 도메인이 아니라 업데이트</a:t>
-            </a:r>
-            <a:r>
-              <a:rPr lang="en-US" sz="2000" b="0" u="none" strike="noStrike">
-                <a:solidFill>
-                  <a:srgbClr val="000000"/>
-                </a:solidFill>
-                <a:effectLst/>
-                <a:uFillTx/>
-                <a:latin typeface="Noto Sans CJK KR"/>
-              </a:rPr>
-              <a:t>·</a:t>
-            </a:r>
-            <a:r>
-              <a:rPr lang="ko-KR" sz="2000" b="0" u="none" strike="noStrike">
-                <a:solidFill>
-                  <a:srgbClr val="000000"/>
-                </a:solidFill>
-                <a:effectLst/>
-                <a:uFillTx/>
-                <a:latin typeface="Noto Sans CJK KR"/>
-              </a:rPr>
-              <a:t>권한</a:t>
-            </a:r>
-            <a:r>
-              <a:rPr lang="en-US" sz="2000" b="0" u="none" strike="noStrike">
-                <a:solidFill>
-                  <a:srgbClr val="000000"/>
-                </a:solidFill>
-                <a:effectLst/>
-                <a:uFillTx/>
-                <a:latin typeface="Noto Sans CJK KR"/>
-              </a:rPr>
-              <a:t>·</a:t>
-            </a:r>
-            <a:r>
-              <a:rPr lang="ko-KR" sz="2000" b="0" u="none" strike="noStrike">
-                <a:solidFill>
-                  <a:srgbClr val="000000"/>
-                </a:solidFill>
-                <a:effectLst/>
-                <a:uFillTx/>
-                <a:latin typeface="Noto Sans CJK KR"/>
-              </a:rPr>
-              <a:t>복구 단위를 나눈 것이다</a:t>
-            </a:r>
-            <a:r>
-              <a:rPr lang="en-US" sz="2000" b="0" u="none" strike="noStrike">
-                <a:solidFill>
-                  <a:srgbClr val="000000"/>
-                </a:solidFill>
-                <a:effectLst/>
-                <a:uFillTx/>
-                <a:latin typeface="Noto Sans CJK KR"/>
-              </a:rPr>
-              <a:t>.</a:t>
-            </a:r>
-            <a:endParaRPr lang="en-US" sz="2000" b="0" u="none" strike="noStrike">
-              <a:solidFill>
-                <a:srgbClr val="000000"/>
-              </a:solidFill>
-              <a:effectLst/>
-              <a:uFillTx/>
-              <a:latin typeface="Noto Sans CJK KR"/>
-            </a:endParaRPr>
-          </a:p>
-          <a:p>
-            <a:pPr indent="0" algn="l">
-              <a:lnSpc>
-                <a:spcPct val="100000"/>
-              </a:lnSpc>
-              <a:buNone/>
-              <a:tabLst>
-                <a:tab pos="0" algn="l"/>
-              </a:tabLst>
-            </a:pPr>
-            <a:r>
-              <a:rPr lang="en-US" sz="2000" b="0" u="none" strike="noStrike">
-                <a:solidFill>
-                  <a:srgbClr val="000000"/>
-                </a:solidFill>
-                <a:effectLst/>
-                <a:uFillTx/>
-                <a:latin typeface="Noto Sans CJK KR"/>
-              </a:rPr>
-              <a:t>ASSET: </a:t>
-            </a:r>
-            <a:r>
-              <a:rPr lang="ko-KR" sz="2000" b="0" u="none" strike="noStrike">
-                <a:solidFill>
-                  <a:srgbClr val="000000"/>
-                </a:solidFill>
-                <a:effectLst/>
-                <a:uFillTx/>
-                <a:latin typeface="Noto Sans CJK KR"/>
-              </a:rPr>
-              <a:t>승인 이미지 </a:t>
-            </a:r>
-            <a:r>
-              <a:rPr lang="en-US" sz="2000" b="0" u="none" strike="noStrike">
-                <a:solidFill>
-                  <a:srgbClr val="000000"/>
-                </a:solidFill>
-                <a:effectLst/>
-                <a:uFillTx/>
-                <a:latin typeface="Noto Sans CJK KR"/>
-              </a:rPr>
-              <a:t>+ green </a:t>
-            </a:r>
-            <a:r>
-              <a:rPr lang="ko-KR" sz="2000" b="0" u="none" strike="noStrike">
-                <a:solidFill>
-                  <a:srgbClr val="000000"/>
-                </a:solidFill>
-                <a:effectLst/>
-                <a:uFillTx/>
-                <a:latin typeface="Noto Sans CJK KR"/>
-              </a:rPr>
-              <a:t>강조 도형</a:t>
-            </a:r>
-            <a:endParaRPr lang="en-US" sz="2000" b="0" u="none" strike="noStrike">
-              <a:solidFill>
-                <a:srgbClr val="000000"/>
-              </a:solidFill>
-              <a:effectLst/>
-              <a:uFillTx/>
-              <a:latin typeface="Noto Sans CJK KR"/>
-            </a:endParaRPr>
-          </a:p>
-          <a:p>
-            <a:pPr indent="0" algn="l">
-              <a:lnSpc>
-                <a:spcPct val="100000"/>
-              </a:lnSpc>
-              <a:buNone/>
-              <a:tabLst>
-                <a:tab pos="0" algn="l"/>
-              </a:tabLst>
-            </a:pPr>
-            <a:r>
-              <a:rPr lang="en-US" sz="2000" b="0" u="none" strike="noStrike">
-                <a:solidFill>
-                  <a:srgbClr val="000000"/>
-                </a:solidFill>
-                <a:effectLst/>
-                <a:uFillTx/>
-                <a:latin typeface="Noto Sans CJK KR"/>
-              </a:rPr>
-              <a:t>EVIDENCE: K3S-01 · PG-01 · S3-01 · WG-01 · NB-01</a:t>
-            </a:r>
-            <a:endParaRPr lang="en-US" sz="2000" b="0" u="none" strike="noStrike">
-              <a:solidFill>
-                <a:srgbClr val="000000"/>
-              </a:solidFill>
-              <a:effectLst/>
-              <a:uFillTx/>
-              <a:latin typeface="Noto Sans CJK KR"/>
-            </a:endParaRPr>
-          </a:p>
-          <a:p>
-            <a:pPr indent="0" algn="l">
-              <a:lnSpc>
-                <a:spcPct val="100000"/>
-              </a:lnSpc>
-              <a:buNone/>
-              <a:tabLst>
-                <a:tab pos="0" algn="l"/>
-              </a:tabLst>
-            </a:pPr>
-            <a:endParaRPr lang="en-US" sz="2000" b="0" u="none" strike="noStrike">
-              <a:solidFill>
-                <a:srgbClr val="000000"/>
-              </a:solidFill>
-              <a:effectLst/>
-              <a:uFillTx/>
-              <a:latin typeface="Noto Sans CJK KR"/>
-            </a:endParaRPr>
-          </a:p>
-          <a:p>
-            <a:pPr indent="0" algn="l">
-              <a:lnSpc>
-                <a:spcPct val="100000"/>
-              </a:lnSpc>
-              <a:buNone/>
-              <a:tabLst>
-                <a:tab pos="0" algn="l"/>
-              </a:tabLst>
-            </a:pPr>
-            <a:r>
-              <a:rPr lang="en-US" sz="2000" b="0" u="none" strike="noStrike">
-                <a:solidFill>
-                  <a:srgbClr val="000000"/>
-                </a:solidFill>
-                <a:effectLst/>
-                <a:uFillTx/>
-                <a:latin typeface="Noto Sans CJK KR"/>
-              </a:rPr>
-              <a:t>※ 발표 대본은 </a:t>
-            </a:r>
-            <a:r>
-              <a:rPr lang="en-US" sz="2000" b="0" u="none" strike="noStrike">
-                <a:solidFill>
-                  <a:srgbClr val="000000"/>
-                </a:solidFill>
-                <a:effectLst/>
-                <a:uFillTx/>
-                <a:latin typeface="Noto Sans CJK KR"/>
-              </a:rPr>
-              <a:t>PRESENT-SCRIPT-01</a:t>
-            </a:r>
-            <a:r>
-              <a:rPr lang="ko-KR" sz="2000" b="0" u="none" strike="noStrike">
-                <a:solidFill>
-                  <a:srgbClr val="000000"/>
-                </a:solidFill>
-                <a:effectLst/>
-                <a:uFillTx/>
-                <a:latin typeface="Noto Sans CJK KR"/>
-              </a:rPr>
-              <a:t>이 이 </a:t>
-            </a:r>
-            <a:r>
-              <a:rPr lang="en-US" sz="2000" b="0" u="none" strike="noStrike">
-                <a:solidFill>
-                  <a:srgbClr val="000000"/>
-                </a:solidFill>
-                <a:effectLst/>
-                <a:uFillTx/>
-                <a:latin typeface="Noto Sans CJK KR"/>
-              </a:rPr>
-              <a:t>notes</a:t>
-            </a:r>
-            <a:r>
-              <a:rPr lang="ko-KR" sz="2000" b="0" u="none" strike="noStrike">
-                <a:solidFill>
-                  <a:srgbClr val="000000"/>
-                </a:solidFill>
-                <a:effectLst/>
-                <a:uFillTx/>
-                <a:latin typeface="Noto Sans CJK KR"/>
-              </a:rPr>
-              <a:t>를 대체한다</a:t>
-            </a:r>
-            <a:r>
-              <a:rPr lang="en-US" sz="2000" b="0" u="none" strike="noStrike">
-                <a:solidFill>
-                  <a:srgbClr val="000000"/>
-                </a:solidFill>
-                <a:effectLst/>
-                <a:uFillTx/>
-                <a:latin typeface="Noto Sans CJK KR"/>
-              </a:rPr>
-              <a:t>.</a:t>
-            </a:r>
-            <a:endParaRPr lang="en-US" sz="2000" b="0" u="none" strike="noStrike">
-              <a:solidFill>
-                <a:srgbClr val="000000"/>
-              </a:solidFill>
-              <a:effectLst/>
-              <a:uFillTx/>
-              <a:latin typeface="Noto Sans CJK KR"/>
-            </a:endParaRPr>
+          <a:p/>
+          <a:p>
+            <a:r>
+              <a:t>그 한 대 안에는 k3s 하나에 네 묶음이 올라가 있습니다.</a:t>
+            </a:r>
+          </a:p>
+          <a:p>
+            <a:r>
+              <a:t>접근·인증, 공급망·배포, 탐지·사람 승인, 보호·복구입니다.</a:t>
+            </a:r>
+          </a:p>
+          <a:p>
+            <a:r>
+              <a:t>아래 VM 네 개는 밖으로 뺐습니다.</a:t>
+            </a:r>
+          </a:p>
+          <a:p>
+            <a:r>
+              <a:t>Postgres와 SeaweedFS S3, Warpgate, NetBird인데 상태를 가졌거나 권한이 다릅니다.</a:t>
+            </a:r>
+          </a:p>
+          <a:p>
+            <a:r>
+              <a:t>장애 도메인을 나눈 건 아닙니다. 노드는 한 대니까요.</a:t>
+            </a:r>
+          </a:p>
+          <a:p>
+            <a:r>
+              <a:t>업데이트와 권한, 복구 단위를 나눈 겁니다.</a:t>
+            </a:r>
           </a:p>
         </p:txBody>
       </p:sp>
@@ -11175,26 +4606,7 @@
               </a:tabLst>
             </a:pPr>
             <a:r>
-              <a:rPr lang="en-US" sz="2000" b="0" u="none" strike="noStrike">
-                <a:solidFill>
-                  <a:srgbClr val="000000"/>
-                </a:solidFill>
-                <a:effectLst/>
-                <a:uFillTx/>
-                <a:latin typeface="Noto Sans CJK KR"/>
-              </a:rPr>
-              <a:t>[10/22 · 00:55] HR System </a:t>
-            </a:r>
-            <a:r>
-              <a:rPr lang="ko-KR" sz="2000" b="0" u="none" strike="noStrike">
-                <a:solidFill>
-                  <a:srgbClr val="000000"/>
-                </a:solidFill>
-                <a:effectLst/>
-                <a:uFillTx/>
-                <a:latin typeface="Noto Sans CJK KR"/>
-              </a:rPr>
-              <a:t>전체 워크로드</a:t>
+              <a:t>[9/23 · 0:44] HR System 워크로드</a:t>
             </a:r>
             <a:endParaRPr lang="en-US" sz="2000" b="0" u="none" strike="noStrike">
               <a:solidFill>
@@ -11205,435 +4617,31 @@
               <a:latin typeface="Noto Sans CJK KR"/>
             </a:endParaRPr>
           </a:p>
-          <a:p>
-            <a:pPr indent="0" algn="l">
-              <a:lnSpc>
-                <a:spcPct val="100000"/>
-              </a:lnSpc>
-              <a:buNone/>
-              <a:tabLst>
-                <a:tab pos="0" algn="l"/>
-              </a:tabLst>
-            </a:pPr>
-            <a:endParaRPr lang="en-US" sz="2000" b="0" u="none" strike="noStrike">
-              <a:solidFill>
-                <a:srgbClr val="000000"/>
-              </a:solidFill>
-              <a:effectLst/>
-              <a:uFillTx/>
-              <a:latin typeface="Noto Sans CJK KR"/>
-            </a:endParaRPr>
-          </a:p>
-          <a:p>
-            <a:pPr indent="0" algn="l">
-              <a:lnSpc>
-                <a:spcPct val="100000"/>
-              </a:lnSpc>
-              <a:buNone/>
-              <a:tabLst>
-                <a:tab pos="0" algn="l"/>
-              </a:tabLst>
-            </a:pPr>
-            <a:r>
-              <a:rPr lang="en-US" sz="2000" b="0" u="none" strike="noStrike">
-                <a:solidFill>
-                  <a:srgbClr val="000000"/>
-                </a:solidFill>
-                <a:effectLst/>
-                <a:uFillTx/>
-                <a:latin typeface="Noto Sans CJK KR"/>
-              </a:rPr>
-              <a:t>PURPOSE: AWS </a:t>
-            </a:r>
-            <a:r>
-              <a:rPr lang="ko-KR" sz="2000" b="0" u="none" strike="noStrike">
-                <a:solidFill>
-                  <a:srgbClr val="000000"/>
-                </a:solidFill>
-                <a:effectLst/>
-                <a:uFillTx/>
-                <a:latin typeface="Noto Sans CJK KR"/>
-              </a:rPr>
-              <a:t>쪽 대표 워크로드의 전체 구조를 한 번에 보여준다</a:t>
-            </a:r>
-            <a:r>
-              <a:rPr lang="en-US" sz="2000" b="0" u="none" strike="noStrike">
-                <a:solidFill>
-                  <a:srgbClr val="000000"/>
-                </a:solidFill>
-                <a:effectLst/>
-                <a:uFillTx/>
-                <a:latin typeface="Noto Sans CJK KR"/>
-              </a:rPr>
-              <a:t>.</a:t>
-            </a:r>
-            <a:endParaRPr lang="en-US" sz="2000" b="0" u="none" strike="noStrike">
-              <a:solidFill>
-                <a:srgbClr val="000000"/>
-              </a:solidFill>
-              <a:effectLst/>
-              <a:uFillTx/>
-              <a:latin typeface="Noto Sans CJK KR"/>
-            </a:endParaRPr>
-          </a:p>
-          <a:p>
-            <a:pPr indent="0" algn="l">
-              <a:lnSpc>
-                <a:spcPct val="100000"/>
-              </a:lnSpc>
-              <a:buNone/>
-              <a:tabLst>
-                <a:tab pos="0" algn="l"/>
-              </a:tabLst>
-            </a:pPr>
-            <a:r>
-              <a:rPr lang="en-US" sz="2000" b="0" u="none" strike="noStrike">
-                <a:solidFill>
-                  <a:srgbClr val="000000"/>
-                </a:solidFill>
-                <a:effectLst/>
-                <a:uFillTx/>
-                <a:latin typeface="Noto Sans CJK KR"/>
-              </a:rPr>
-              <a:t>MESSAGE: frontend·employee-service·hr-service</a:t>
-            </a:r>
-            <a:r>
-              <a:rPr lang="ko-KR" sz="2000" b="0" u="none" strike="noStrike">
-                <a:solidFill>
-                  <a:srgbClr val="000000"/>
-                </a:solidFill>
-                <a:effectLst/>
-                <a:uFillTx/>
-                <a:latin typeface="Noto Sans CJK KR"/>
-              </a:rPr>
-              <a:t>가 </a:t>
-            </a:r>
-            <a:r>
-              <a:rPr lang="en-US" sz="2000" b="0" u="none" strike="noStrike">
-                <a:solidFill>
-                  <a:srgbClr val="000000"/>
-                </a:solidFill>
-                <a:effectLst/>
-                <a:uFillTx/>
-                <a:latin typeface="Noto Sans CJK KR"/>
-              </a:rPr>
-              <a:t>internal ALB </a:t>
-            </a:r>
-            <a:r>
-              <a:rPr lang="ko-KR" sz="2000" b="0" u="none" strike="noStrike">
-                <a:solidFill>
-                  <a:srgbClr val="000000"/>
-                </a:solidFill>
-                <a:effectLst/>
-                <a:uFillTx/>
-                <a:latin typeface="Noto Sans CJK KR"/>
-              </a:rPr>
-              <a:t>뒤에서 </a:t>
-            </a:r>
-            <a:r>
-              <a:rPr lang="en-US" sz="2000" b="0" u="none" strike="noStrike">
-                <a:solidFill>
-                  <a:srgbClr val="000000"/>
-                </a:solidFill>
-                <a:effectLst/>
-                <a:uFillTx/>
-                <a:latin typeface="Noto Sans CJK KR"/>
-              </a:rPr>
-              <a:t>Aurora</a:t>
-            </a:r>
-            <a:r>
-              <a:rPr lang="ko-KR" sz="2000" b="0" u="none" strike="noStrike">
-                <a:solidFill>
-                  <a:srgbClr val="000000"/>
-                </a:solidFill>
-                <a:effectLst/>
-                <a:uFillTx/>
-                <a:latin typeface="Noto Sans CJK KR"/>
-              </a:rPr>
-              <a:t>를 쓰고</a:t>
-            </a:r>
-            <a:r>
-              <a:rPr lang="en-US" sz="2000" b="0" u="none" strike="noStrike">
-                <a:solidFill>
-                  <a:srgbClr val="000000"/>
-                </a:solidFill>
-                <a:effectLst/>
-                <a:uFillTx/>
-                <a:latin typeface="Noto Sans CJK KR"/>
-              </a:rPr>
-              <a:t>, </a:t>
-            </a:r>
-            <a:r>
-              <a:rPr lang="ko-KR" sz="2000" b="0" u="none" strike="noStrike">
-                <a:solidFill>
-                  <a:srgbClr val="000000"/>
-                </a:solidFill>
-                <a:effectLst/>
-                <a:uFillTx/>
-                <a:latin typeface="Noto Sans CJK KR"/>
-              </a:rPr>
-              <a:t>권한은 </a:t>
-            </a:r>
-            <a:r>
-              <a:rPr lang="en-US" sz="2000" b="0" u="none" strike="noStrike">
-                <a:solidFill>
-                  <a:srgbClr val="000000"/>
-                </a:solidFill>
-                <a:effectLst/>
-                <a:uFillTx/>
-                <a:latin typeface="Noto Sans CJK KR"/>
-              </a:rPr>
-              <a:t>IRSA</a:t>
-            </a:r>
-            <a:r>
-              <a:rPr lang="ko-KR" sz="2000" b="0" u="none" strike="noStrike">
-                <a:solidFill>
-                  <a:srgbClr val="000000"/>
-                </a:solidFill>
-                <a:effectLst/>
-                <a:uFillTx/>
-                <a:latin typeface="Noto Sans CJK KR"/>
-              </a:rPr>
-              <a:t>와 </a:t>
-            </a:r>
-            <a:r>
-              <a:rPr lang="en-US" sz="2000" b="0" u="none" strike="noStrike">
-                <a:solidFill>
-                  <a:srgbClr val="000000"/>
-                </a:solidFill>
-                <a:effectLst/>
-                <a:uFillTx/>
-                <a:latin typeface="Noto Sans CJK KR"/>
-              </a:rPr>
-              <a:t>Secrets Manager</a:t>
-            </a:r>
-            <a:r>
-              <a:rPr lang="ko-KR" sz="2000" b="0" u="none" strike="noStrike">
-                <a:solidFill>
-                  <a:srgbClr val="000000"/>
-                </a:solidFill>
-                <a:effectLst/>
-                <a:uFillTx/>
-                <a:latin typeface="Noto Sans CJK KR"/>
-              </a:rPr>
-              <a:t>로 나뉜다</a:t>
-            </a:r>
-            <a:r>
-              <a:rPr lang="en-US" sz="2000" b="0" u="none" strike="noStrike">
-                <a:solidFill>
-                  <a:srgbClr val="000000"/>
-                </a:solidFill>
-                <a:effectLst/>
-                <a:uFillTx/>
-                <a:latin typeface="Noto Sans CJK KR"/>
-              </a:rPr>
-              <a:t>.</a:t>
-            </a:r>
-            <a:endParaRPr lang="en-US" sz="2000" b="0" u="none" strike="noStrike">
-              <a:solidFill>
-                <a:srgbClr val="000000"/>
-              </a:solidFill>
-              <a:effectLst/>
-              <a:uFillTx/>
-              <a:latin typeface="Noto Sans CJK KR"/>
-            </a:endParaRPr>
-          </a:p>
-          <a:p>
-            <a:pPr indent="0" algn="l">
-              <a:lnSpc>
-                <a:spcPct val="100000"/>
-              </a:lnSpc>
-              <a:buNone/>
-              <a:tabLst>
-                <a:tab pos="0" algn="l"/>
-              </a:tabLst>
-            </a:pPr>
-            <a:r>
-              <a:rPr lang="en-US" sz="2000" b="0" u="none" strike="noStrike">
-                <a:solidFill>
-                  <a:srgbClr val="000000"/>
-                </a:solidFill>
-                <a:effectLst/>
-                <a:uFillTx/>
-                <a:latin typeface="Noto Sans CJK KR"/>
-              </a:rPr>
-              <a:t>ASSET: </a:t>
-            </a:r>
-            <a:r>
-              <a:rPr lang="ko-KR" sz="2000" b="0" u="none" strike="noStrike">
-                <a:solidFill>
-                  <a:srgbClr val="000000"/>
-                </a:solidFill>
-                <a:effectLst/>
-                <a:uFillTx/>
-                <a:latin typeface="Noto Sans CJK KR"/>
-              </a:rPr>
-              <a:t>승인 이미지 </a:t>
-            </a:r>
-            <a:r>
-              <a:rPr lang="en-US" sz="2000" b="0" u="none" strike="noStrike">
-                <a:solidFill>
-                  <a:srgbClr val="000000"/>
-                </a:solidFill>
-                <a:effectLst/>
-                <a:uFillTx/>
-                <a:latin typeface="Noto Sans CJK KR"/>
-              </a:rPr>
-              <a:t>+ green </a:t>
-            </a:r>
-            <a:r>
-              <a:rPr lang="ko-KR" sz="2000" b="0" u="none" strike="noStrike">
-                <a:solidFill>
-                  <a:srgbClr val="000000"/>
-                </a:solidFill>
-                <a:effectLst/>
-                <a:uFillTx/>
-                <a:latin typeface="Noto Sans CJK KR"/>
-              </a:rPr>
-              <a:t>강조 도형</a:t>
-            </a:r>
-            <a:endParaRPr lang="en-US" sz="2000" b="0" u="none" strike="noStrike">
-              <a:solidFill>
-                <a:srgbClr val="000000"/>
-              </a:solidFill>
-              <a:effectLst/>
-              <a:uFillTx/>
-              <a:latin typeface="Noto Sans CJK KR"/>
-            </a:endParaRPr>
-          </a:p>
-          <a:p>
-            <a:pPr indent="0" algn="l">
-              <a:lnSpc>
-                <a:spcPct val="100000"/>
-              </a:lnSpc>
-              <a:buNone/>
-              <a:tabLst>
-                <a:tab pos="0" algn="l"/>
-              </a:tabLst>
-            </a:pPr>
-            <a:r>
-              <a:rPr lang="en-US" sz="2000" b="0" u="none" strike="noStrike">
-                <a:solidFill>
-                  <a:srgbClr val="000000"/>
-                </a:solidFill>
-                <a:effectLst/>
-                <a:uFillTx/>
-                <a:latin typeface="Noto Sans CJK KR"/>
-              </a:rPr>
-              <a:t>EVIDENCE: AWS-HR-01 · AWS-DB-SEC-01 · QUALITY-04</a:t>
-            </a:r>
-            <a:endParaRPr lang="en-US" sz="2000" b="0" u="none" strike="noStrike">
-              <a:solidFill>
-                <a:srgbClr val="000000"/>
-              </a:solidFill>
-              <a:effectLst/>
-              <a:uFillTx/>
-              <a:latin typeface="Noto Sans CJK KR"/>
-            </a:endParaRPr>
-          </a:p>
-          <a:p>
-            <a:pPr indent="0" algn="l">
-              <a:lnSpc>
-                <a:spcPct val="100000"/>
-              </a:lnSpc>
-              <a:buNone/>
-              <a:tabLst>
-                <a:tab pos="0" algn="l"/>
-              </a:tabLst>
-            </a:pPr>
-            <a:endParaRPr lang="en-US" sz="2000" b="0" u="none" strike="noStrike">
-              <a:solidFill>
-                <a:srgbClr val="000000"/>
-              </a:solidFill>
-              <a:effectLst/>
-              <a:uFillTx/>
-              <a:latin typeface="Noto Sans CJK KR"/>
-            </a:endParaRPr>
-          </a:p>
-          <a:p>
-            <a:pPr indent="0" algn="l">
-              <a:lnSpc>
-                <a:spcPct val="100000"/>
-              </a:lnSpc>
-              <a:buNone/>
-              <a:tabLst>
-                <a:tab pos="0" algn="l"/>
-              </a:tabLst>
-            </a:pPr>
-            <a:r>
-              <a:rPr lang="en-US" sz="2000" b="0" u="none" strike="noStrike">
-                <a:solidFill>
-                  <a:srgbClr val="000000"/>
-                </a:solidFill>
-                <a:effectLst/>
-                <a:uFillTx/>
-                <a:latin typeface="Noto Sans CJK KR"/>
-              </a:rPr>
-              <a:t>※ 발표 대본은 </a:t>
-            </a:r>
-            <a:r>
-              <a:rPr lang="en-US" sz="2000" b="0" u="none" strike="noStrike">
-                <a:solidFill>
-                  <a:srgbClr val="000000"/>
-                </a:solidFill>
-                <a:effectLst/>
-                <a:uFillTx/>
-                <a:latin typeface="Noto Sans CJK KR"/>
-              </a:rPr>
-              <a:t>PRESENT-SCRIPT-01</a:t>
-            </a:r>
-            <a:r>
-              <a:rPr lang="ko-KR" sz="2000" b="0" u="none" strike="noStrike">
-                <a:solidFill>
-                  <a:srgbClr val="000000"/>
-                </a:solidFill>
-                <a:effectLst/>
-                <a:uFillTx/>
-                <a:latin typeface="Noto Sans CJK KR"/>
-              </a:rPr>
-              <a:t>이 이 </a:t>
-            </a:r>
-            <a:r>
-              <a:rPr lang="en-US" sz="2000" b="0" u="none" strike="noStrike">
-                <a:solidFill>
-                  <a:srgbClr val="000000"/>
-                </a:solidFill>
-                <a:effectLst/>
-                <a:uFillTx/>
-                <a:latin typeface="Noto Sans CJK KR"/>
-              </a:rPr>
-              <a:t>notes</a:t>
-            </a:r>
-            <a:r>
-              <a:rPr lang="ko-KR" sz="2000" b="0" u="none" strike="noStrike">
-                <a:solidFill>
-                  <a:srgbClr val="000000"/>
-                </a:solidFill>
-                <a:effectLst/>
-                <a:uFillTx/>
-                <a:latin typeface="Noto Sans CJK KR"/>
-              </a:rPr>
-              <a:t>를 대체한다</a:t>
-            </a:r>
-            <a:r>
-              <a:rPr lang="en-US" sz="2000" b="0" u="none" strike="noStrike">
-                <a:solidFill>
-                  <a:srgbClr val="000000"/>
-                </a:solidFill>
-                <a:effectLst/>
-                <a:uFillTx/>
-                <a:latin typeface="Noto Sans CJK KR"/>
-              </a:rPr>
-              <a:t>.</a:t>
-            </a:r>
-            <a:endParaRPr lang="en-US" sz="2000" b="0" u="none" strike="noStrike">
-              <a:solidFill>
-                <a:srgbClr val="000000"/>
-              </a:solidFill>
-              <a:effectLst/>
-              <a:uFillTx/>
-              <a:latin typeface="Noto Sans CJK KR"/>
-            </a:endParaRPr>
+          <a:p/>
+          <a:p>
+            <a:r>
+              <a:t>오른쪽 AWS입니다. 대표 워크로드는 HR System 하나고요.</a:t>
+            </a:r>
+          </a:p>
+          <a:p>
+            <a:r>
+              <a:t>EKS는 private endpoint로 열었고, 안에 포털 화면인 frontend와</a:t>
+            </a:r>
+          </a:p>
+          <a:p>
+            <a:r>
+              <a:t>직원 API employee-service, 관리 API hr-service가 있습니다.</a:t>
+            </a:r>
+          </a:p>
+          <a:p>
+            <a:r>
+              <a:t>셋 다 internal ALB 뒤라 인터넷에서 직접 닿지 않고, 데이터는 private 서브넷 Aurora로 들어갑니다.</a:t>
+            </a:r>
+          </a:p>
+          <a:p>
+            <a:r>
+              <a:t>권한은 AWS 자원 쪽은 IRSA가, DB 접속 정보는 Secrets Manager가 맡습니다.</a:t>
+            </a:r>
           </a:p>
         </p:txBody>
       </p:sp>
